--- a/Org_health_diag/docs/2026_조직건강도_AI_Agent_수행결과.pptx
+++ b/Org_health_diag/docs/2026_조직건강도_AI_Agent_수행결과.pptx
@@ -17,7 +17,6 @@
     <p:sldId id="262" r:id="rId11"/>
     <p:sldId id="263" r:id="rId12"/>
     <p:sldId id="266" r:id="rId15"/>
-    <p:sldId id="268" r:id="rId17"/>
     <p:sldId id="269" r:id="rId18"/>
     <p:sldId id="270" r:id="rId19"/>
     <p:sldId id="271" r:id="rId20"/>
@@ -261,266 +260,6 @@
     </a:lvl9pPr>
   </p:defaultTextStyle>
 </p:presentation>
-</file>
-
-<file path=ppt/charts/chart1.xml><?xml version="1.0" encoding="utf-8"?>
-<c:chartSpace xmlns:c="http://schemas.openxmlformats.org/drawingml/2006/chart" xmlns:a="http://schemas.openxmlformats.org/drawingml/2006/main" xmlns:r="http://schemas.openxmlformats.org/officeDocument/2006/relationships">
-  <c:date1904 val="0"/>
-  <c:roundedCorners val="1"/>
-  <c:chart>
-    <c:autoTitleDeleted val="1"/>
-    <c:plotArea>
-      <c:layout/>
-      <c:barChart>
-        <c:barDir val="col"/>
-        <c:grouping val="clustered"/>
-        <c:varyColors val="0"/>
-        <c:ser>
-          <c:idx val="0"/>
-          <c:order val="0"/>
-          <c:tx>
-            <c:strRef>
-              <c:f>Sheet1!$B$1</c:f>
-              <c:strCache>
-                <c:ptCount val="1"/>
-                <c:pt idx="0">
-                  <c:v>긍정 응답 비중</c:v>
-                </c:pt>
-              </c:strCache>
-            </c:strRef>
-          </c:tx>
-          <c:spPr>
-            <a:solidFill>
-              <a:srgbClr val="004381"/>
-            </a:solidFill>
-            <a:effectLst/>
-          </c:spPr>
-          <c:invertIfNegative val="0"/>
-          <c:dLbls>
-            <c:numFmt formatCode="#,##0" sourceLinked="0"/>
-            <c:txPr>
-              <a:bodyPr/>
-              <a:lstStyle/>
-              <a:p>
-                <a:pPr>
-                  <a:defRPr b="0" i="0" strike="noStrike" sz="1000" u="none">
-                    <a:solidFill>
-                      <a:srgbClr val="172033"/>
-                    </a:solidFill>
-                    <a:latin typeface="Malgun Gothic"/>
-                  </a:defRPr>
-                </a:pPr>
-              </a:p>
-            </c:txPr>
-            <c:showLegendKey val="0"/>
-            <c:showVal val="1"/>
-            <c:showCatName val="0"/>
-            <c:showSerName val="0"/>
-            <c:showPercent val="0"/>
-            <c:showBubbleSize val="0"/>
-            <c:showLeaderLines val="0"/>
-          </c:dLbls>
-          <c:cat>
-            <c:multiLvlStrRef>
-              <c:f>Sheet1!$A$2:$A$7</c:f>
-              <c:multiLvlStrCache>
-                <c:ptCount val="6"/>
-                <c:lvl>
-                  <c:pt idx="0">
-                    <c:v>철강사업실</c:v>
-                  </c:pt>
-                  <c:pt idx="1">
-                    <c:v>철강설계실</c:v>
-                  </c:pt>
-                  <c:pt idx="2">
-                    <c:v>기술기획실</c:v>
-                  </c:pt>
-                  <c:pt idx="3">
-                    <c:v>플랜트설계실</c:v>
-                  </c:pt>
-                  <c:pt idx="4">
-                    <c:v>건설전략실</c:v>
-                  </c:pt>
-                  <c:pt idx="5">
-                    <c:v>경영혁신실</c:v>
-                  </c:pt>
-                </c:lvl>
-              </c:multiLvlStrCache>
-            </c:multiLvlStrRef>
-          </c:cat>
-          <c:val>
-            <c:numRef>
-              <c:f>Sheet1!$B$2:$B$7</c:f>
-              <c:numCache>
-                <c:formatCode>General</c:formatCode>
-                <c:ptCount val="6"/>
-                <c:pt idx="0">
-                  <c:v>73.6</c:v>
-                </c:pt>
-                <c:pt idx="1">
-                  <c:v>73.5</c:v>
-                </c:pt>
-                <c:pt idx="2">
-                  <c:v>59.2</c:v>
-                </c:pt>
-                <c:pt idx="3">
-                  <c:v>58.2</c:v>
-                </c:pt>
-                <c:pt idx="4">
-                  <c:v>53</c:v>
-                </c:pt>
-                <c:pt idx="5">
-                  <c:v>52.4</c:v>
-                </c:pt>
-              </c:numCache>
-            </c:numRef>
-          </c:val>
-        </c:ser>
-        <c:dLbls>
-          <c:numFmt formatCode="#,##0" sourceLinked="0"/>
-          <c:txPr>
-            <a:bodyPr/>
-            <a:lstStyle/>
-            <a:p>
-              <a:pPr>
-                <a:defRPr b="0" i="0" strike="noStrike" sz="1000" u="none">
-                  <a:solidFill>
-                    <a:srgbClr val="172033"/>
-                  </a:solidFill>
-                  <a:latin typeface="Malgun Gothic"/>
-                </a:defRPr>
-              </a:pPr>
-            </a:p>
-          </c:txPr>
-          <c:showLegendKey val="0"/>
-          <c:showVal val="1"/>
-          <c:showCatName val="0"/>
-          <c:showSerName val="0"/>
-          <c:showPercent val="0"/>
-          <c:showBubbleSize val="0"/>
-          <c:showLeaderLines val="0"/>
-        </c:dLbls>
-        <c:gapWidth val="150"/>
-        <c:overlap val="0"/>
-        <c:axId val="2094734554"/>
-        <c:axId val="2094734552"/>
-        <c:axId val="2094734556"/>
-      </c:barChart>
-      <c:catAx>
-        <c:axId val="2094734554"/>
-        <c:scaling>
-          <c:orientation val="minMax"/>
-        </c:scaling>
-        <c:delete val="0"/>
-        <c:axPos val="b"/>
-        <c:numFmt formatCode="General" sourceLinked="1"/>
-        <c:majorTickMark val="out"/>
-        <c:minorTickMark val="none"/>
-        <c:tickLblPos val="low"/>
-        <c:spPr>
-          <a:ln w="12700" cap="flat">
-            <a:solidFill>
-              <a:srgbClr val="888888"/>
-            </a:solidFill>
-            <a:prstDash val="solid"/>
-            <a:round/>
-          </a:ln>
-        </c:spPr>
-        <c:txPr>
-          <a:bodyPr/>
-          <a:lstStyle/>
-          <a:p>
-            <a:pPr>
-              <a:defRPr sz="950" b="0" i="0" u="none" strike="noStrike">
-                <a:solidFill>
-                  <a:srgbClr val="65708A"/>
-                </a:solidFill>
-                <a:latin typeface="Malgun Gothic"/>
-              </a:defRPr>
-            </a:pPr>
-            <a:endParaRPr lang="en-US"/>
-          </a:p>
-        </c:txPr>
-        <c:crossAx val="2094734552"/>
-        <c:crosses val="autoZero"/>
-        <c:auto val="1"/>
-        <c:lblAlgn val="ctr"/>
-        <c:noMultiLvlLbl val="1"/>
-      </c:catAx>
-      <c:valAx>
-        <c:axId val="2094734552"/>
-        <c:scaling>
-          <c:orientation val="minMax"/>
-          <c:max val="90"/>
-          <c:min val="0"/>
-        </c:scaling>
-        <c:delete val="0"/>
-        <c:axPos val="l"/>
-        <c:majorGridlines>
-          <c:spPr>
-            <a:ln w="12700" cap="flat">
-              <a:solidFill>
-                <a:srgbClr val="DFE5EF"/>
-              </a:solidFill>
-              <a:prstDash val="solid"/>
-              <a:round/>
-            </a:ln>
-          </c:spPr>
-        </c:majorGridlines>
-        <c:numFmt formatCode="General" sourceLinked="0"/>
-        <c:majorTickMark val="out"/>
-        <c:minorTickMark val="none"/>
-        <c:tickLblPos val="nextTo"/>
-        <c:spPr>
-          <a:ln w="12700" cap="flat">
-            <a:solidFill>
-              <a:srgbClr val="888888"/>
-            </a:solidFill>
-            <a:prstDash val="solid"/>
-            <a:round/>
-          </a:ln>
-        </c:spPr>
-        <c:txPr>
-          <a:bodyPr/>
-          <a:lstStyle/>
-          <a:p>
-            <a:pPr>
-              <a:defRPr sz="950" b="0" i="0" u="none" strike="noStrike">
-                <a:solidFill>
-                  <a:srgbClr val="65708A"/>
-                </a:solidFill>
-                <a:latin typeface="Arial"/>
-              </a:defRPr>
-            </a:pPr>
-            <a:endParaRPr lang="en-US"/>
-          </a:p>
-        </c:txPr>
-        <c:crossAx val="2094734554"/>
-        <c:crosses val="autoZero"/>
-        <c:crossBetween val="between"/>
-      </c:valAx>
-      <c:spPr>
-        <a:noFill/>
-        <a:ln>
-          <a:noFill/>
-        </a:ln>
-        <a:effectLst/>
-      </c:spPr>
-    </c:plotArea>
-    <c:plotVisOnly val="1"/>
-    <c:dispBlanksAs val="span"/>
-  </c:chart>
-  <c:spPr>
-    <a:noFill/>
-    <a:ln>
-      <a:noFill/>
-    </a:ln>
-    <a:effectLst/>
-  </c:spPr>
-  <c:externalData r:id="rId1">
-    <c:autoUpdate val="0"/>
-  </c:externalData>
-</c:chartSpace>
 </file>
 
 <file path=ppt/notesMasters/notesMaster1.xml><?xml version="1.0" encoding="utf-8"?>
@@ -1958,164 +1697,6 @@
       <p:sp>
         <p:nvSpPr>
           <p:cNvPr id="325" name="Google Shape;325;p11:notes"/>
-          <p:cNvSpPr txBox="1"/>
-          <p:nvPr>
-            <p:ph idx="12" type="sldNum"/>
-          </p:nvPr>
-        </p:nvSpPr>
-        <p:spPr>
-          <a:xfrm>
-            <a:off x="3884613" y="8685213"/>
-            <a:ext cx="2971800" cy="458787"/>
-          </a:xfrm>
-          <a:prstGeom prst="rect">
-            <a:avLst/>
-          </a:prstGeom>
-          <a:noFill/>
-          <a:ln>
-            <a:noFill/>
-          </a:ln>
-        </p:spPr>
-        <p:txBody>
-          <a:bodyPr anchorCtr="0" anchor="b" bIns="45700" lIns="91425" spcFirstLastPara="1" rIns="91425" wrap="square" tIns="45700">
-            <a:noAutofit/>
-          </a:bodyPr>
-          <a:lstStyle/>
-          <a:p>
-            <a:pPr indent="0" lvl="0" marL="0" rtl="0" algn="r">
-              <a:spcBef>
-                <a:spcPts val="0"/>
-              </a:spcBef>
-              <a:spcAft>
-                <a:spcPts val="0"/>
-              </a:spcAft>
-              <a:buNone/>
-            </a:pPr>
-            <a:fld id="{00000000-1234-1234-1234-123412341234}" type="slidenum">
-              <a:rPr lang="en-US"/>
-              <a:t>‹#›</a:t>
-            </a:fld>
-            <a:endParaRPr/>
-          </a:p>
-        </p:txBody>
-      </p:sp>
-    </p:spTree>
-  </p:cSld>
-  <p:clrMapOvr>
-    <a:masterClrMapping/>
-  </p:clrMapOvr>
-</p:notes>
-</file>
-
-<file path=ppt/notesSlides/notesSlide13.xml><?xml version="1.0" encoding="utf-8"?>
-<p:notes xmlns:a="http://schemas.openxmlformats.org/drawingml/2006/main" xmlns:r="http://schemas.openxmlformats.org/officeDocument/2006/relationships" xmlns:mc="http://schemas.openxmlformats.org/markup-compatibility/2006" xmlns:mv="urn:schemas-microsoft-com:mac:vml" xmlns:p="http://schemas.openxmlformats.org/presentationml/2006/main" xmlns:c="http://schemas.openxmlformats.org/drawingml/2006/chart" xmlns:dgm="http://schemas.openxmlformats.org/drawingml/2006/diagram" xmlns:o="urn:schemas-microsoft-com:office:office" xmlns:v="urn:schemas-microsoft-com:vml" xmlns:pvml="urn:schemas-microsoft-com:office:powerpoint" xmlns:com="http://schemas.openxmlformats.org/drawingml/2006/compatibility" xmlns:p14="http://schemas.microsoft.com/office/powerpoint/2010/main" xmlns:p15="http://schemas.microsoft.com/office/powerpoint/2012/main" xmlns:ahyp="http://schemas.microsoft.com/office/drawing/2018/hyperlinkcolor" showMasterPhAnim="0" showMasterSp="0">
-  <p:cSld>
-    <p:spTree>
-      <p:nvGrpSpPr>
-        <p:cNvPr id="393" name="Shape 393"/>
-        <p:cNvGrpSpPr/>
-        <p:nvPr/>
-      </p:nvGrpSpPr>
-      <p:grpSpPr>
-        <a:xfrm>
-          <a:off x="0" y="0"/>
-          <a:ext cx="0" cy="0"/>
-          <a:chOff x="0" y="0"/>
-          <a:chExt cx="0" cy="0"/>
-        </a:xfrm>
-      </p:grpSpPr>
-      <p:sp>
-        <p:nvSpPr>
-          <p:cNvPr id="394" name="Google Shape;394;p13:notes"/>
-          <p:cNvSpPr/>
-          <p:nvPr>
-            <p:ph idx="2" type="sldImg"/>
-          </p:nvPr>
-        </p:nvSpPr>
-        <p:spPr>
-          <a:xfrm>
-            <a:off x="685800" y="1143000"/>
-            <a:ext cx="5486400" cy="3086100"/>
-          </a:xfrm>
-          <a:custGeom>
-            <a:rect b="b" l="l" r="r" t="t"/>
-            <a:pathLst>
-              <a:path extrusionOk="0" h="120000" w="120000">
-                <a:moveTo>
-                  <a:pt x="0" y="0"/>
-                </a:moveTo>
-                <a:lnTo>
-                  <a:pt x="120000" y="0"/>
-                </a:lnTo>
-                <a:lnTo>
-                  <a:pt x="120000" y="120000"/>
-                </a:lnTo>
-                <a:lnTo>
-                  <a:pt x="0" y="120000"/>
-                </a:lnTo>
-                <a:close/>
-              </a:path>
-            </a:pathLst>
-          </a:custGeom>
-          <a:noFill/>
-          <a:ln cap="flat" cmpd="sng" w="12700">
-            <a:solidFill>
-              <a:srgbClr val="000000"/>
-            </a:solidFill>
-            <a:prstDash val="solid"/>
-            <a:round/>
-            <a:headEnd len="sm" w="sm" type="none"/>
-            <a:tailEnd len="sm" w="sm" type="none"/>
-          </a:ln>
-        </p:spPr>
-      </p:sp>
-      <p:sp>
-        <p:nvSpPr>
-          <p:cNvPr id="395" name="Google Shape;395;p13:notes"/>
-          <p:cNvSpPr txBox="1"/>
-          <p:nvPr>
-            <p:ph idx="1" type="body"/>
-          </p:nvPr>
-        </p:nvSpPr>
-        <p:spPr>
-          <a:xfrm>
-            <a:off x="685800" y="4400550"/>
-            <a:ext cx="5486400" cy="3600450"/>
-          </a:xfrm>
-          <a:prstGeom prst="rect">
-            <a:avLst/>
-          </a:prstGeom>
-          <a:noFill/>
-          <a:ln>
-            <a:noFill/>
-          </a:ln>
-        </p:spPr>
-        <p:txBody>
-          <a:bodyPr anchorCtr="0" anchor="t" bIns="45700" lIns="91425" spcFirstLastPara="1" rIns="91425" wrap="square" tIns="45700">
-            <a:noAutofit/>
-          </a:bodyPr>
-          <a:lstStyle/>
-          <a:p>
-            <a:pPr indent="0" lvl="0" marL="0" rtl="0" algn="l">
-              <a:spcBef>
-                <a:spcPts val="0"/>
-              </a:spcBef>
-              <a:spcAft>
-                <a:spcPts val="0"/>
-              </a:spcAft>
-              <a:buNone/>
-            </a:pPr>
-            <a:r>
-              <a:rPr lang="en-US"/>
-              <a:t>피드백을 받은 뒤 데이터를 다시 만들되, 다른 화면의 결론이 흔들리지 않도록 제약을 걸었습니다.</a:t>
-            </a:r>
-            <a:endParaRPr/>
-          </a:p>
-        </p:txBody>
-      </p:sp>
-      <p:sp>
-        <p:nvSpPr>
-          <p:cNvPr id="396" name="Google Shape;396;p13:notes"/>
           <p:cNvSpPr txBox="1"/>
           <p:nvPr>
             <p:ph idx="12" type="sldNum"/>
@@ -7227,1619 +6808,6 @@
 </p:sld>
 </file>
 
-<file path=ppt/slides/slide13.xml><?xml version="1.0" encoding="utf-8"?>
-<p:sld xmlns:a="http://schemas.openxmlformats.org/drawingml/2006/main" xmlns:r="http://schemas.openxmlformats.org/officeDocument/2006/relationships" xmlns:mc="http://schemas.openxmlformats.org/markup-compatibility/2006" xmlns:mv="urn:schemas-microsoft-com:mac:vml" xmlns:p="http://schemas.openxmlformats.org/presentationml/2006/main" xmlns:c="http://schemas.openxmlformats.org/drawingml/2006/chart" xmlns:dgm="http://schemas.openxmlformats.org/drawingml/2006/diagram" xmlns:o="urn:schemas-microsoft-com:office:office" xmlns:v="urn:schemas-microsoft-com:vml" xmlns:pvml="urn:schemas-microsoft-com:office:powerpoint" xmlns:com="http://schemas.openxmlformats.org/drawingml/2006/compatibility" xmlns:p14="http://schemas.microsoft.com/office/powerpoint/2010/main" xmlns:p15="http://schemas.microsoft.com/office/powerpoint/2012/main" xmlns:ahyp="http://schemas.microsoft.com/office/drawing/2018/hyperlinkcolor">
-  <p:cSld>
-    <p:bg>
-      <p:bgPr>
-        <a:solidFill>
-          <a:srgbClr val="F5F7FB"/>
-        </a:solidFill>
-      </p:bgPr>
-    </p:bg>
-    <p:spTree>
-      <p:nvGrpSpPr>
-        <p:cNvPr id="397" name="Shape 397"/>
-        <p:cNvGrpSpPr/>
-        <p:nvPr/>
-      </p:nvGrpSpPr>
-      <p:grpSpPr>
-        <a:xfrm>
-          <a:off x="0" y="0"/>
-          <a:ext cx="0" cy="0"/>
-          <a:chOff x="0" y="0"/>
-          <a:chExt cx="0" cy="0"/>
-        </a:xfrm>
-      </p:grpSpPr>
-      <p:sp>
-        <p:nvSpPr>
-          <p:cNvPr id="398" name="Google Shape;398;p15"/>
-          <p:cNvSpPr/>
-          <p:nvPr/>
-        </p:nvSpPr>
-        <p:spPr>
-          <a:xfrm>
-            <a:off x="566928" y="365760"/>
-            <a:ext cx="11057839" cy="219456"/>
-          </a:xfrm>
-          <a:prstGeom prst="rect">
-            <a:avLst/>
-          </a:prstGeom>
-          <a:noFill/>
-          <a:ln>
-            <a:noFill/>
-          </a:ln>
-        </p:spPr>
-        <p:txBody>
-          <a:bodyPr anchorCtr="0" anchor="ctr" bIns="0" lIns="0" spcFirstLastPara="1" rIns="0" wrap="square" tIns="0">
-            <a:noAutofit/>
-          </a:bodyPr>
-          <a:lstStyle/>
-          <a:p>
-            <a:pPr indent="0" lvl="0" marL="0" marR="0" rtl="0" algn="l">
-              <a:spcBef>
-                <a:spcPts val="0"/>
-              </a:spcBef>
-              <a:spcAft>
-                <a:spcPts val="0"/>
-              </a:spcAft>
-              <a:buClr>
-                <a:srgbClr val="0098D9"/>
-              </a:buClr>
-              <a:buSzPts val="1100"/>
-              <a:buFont typeface="Malgun Gothic"/>
-              <a:buNone/>
-            </a:pPr>
-            <a:r>
-              <a:rPr b="1" i="0" lang="en-US" sz="1100" u="none" cap="none" strike="noStrike">
-                <a:solidFill>
-                  <a:srgbClr val="0098D9"/>
-                </a:solidFill>
-                <a:latin typeface="Malgun Gothic"/>
-                <a:ea typeface="Malgun Gothic"/>
-                <a:cs typeface="Malgun Gothic"/>
-                <a:sym typeface="Malgun Gothic"/>
-              </a:rPr>
-              <a:t>RESULTS</a:t>
-            </a:r>
-            <a:endParaRPr b="0" i="0" sz="1100" u="none" cap="none" strike="noStrike">
-              <a:solidFill>
-                <a:schemeClr val="dk1"/>
-              </a:solidFill>
-              <a:latin typeface="Calibri"/>
-              <a:ea typeface="Calibri"/>
-              <a:cs typeface="Calibri"/>
-              <a:sym typeface="Calibri"/>
-            </a:endParaRPr>
-          </a:p>
-        </p:txBody>
-      </p:sp>
-      <p:sp>
-        <p:nvSpPr>
-          <p:cNvPr id="399" name="Google Shape;399;p15"/>
-          <p:cNvSpPr/>
-          <p:nvPr/>
-        </p:nvSpPr>
-        <p:spPr>
-          <a:xfrm>
-            <a:off x="566928" y="603504"/>
-            <a:ext cx="11057839" cy="566928"/>
-          </a:xfrm>
-          <a:prstGeom prst="rect">
-            <a:avLst/>
-          </a:prstGeom>
-          <a:noFill/>
-          <a:ln>
-            <a:noFill/>
-          </a:ln>
-        </p:spPr>
-        <p:txBody>
-          <a:bodyPr anchorCtr="0" anchor="ctr" bIns="0" lIns="0" spcFirstLastPara="1" rIns="0" wrap="square" tIns="0">
-            <a:noAutofit/>
-          </a:bodyPr>
-          <a:lstStyle/>
-          <a:p>
-            <a:pPr indent="0" lvl="0" marL="0" marR="0" rtl="0" algn="l">
-              <a:spcBef>
-                <a:spcPts val="0"/>
-              </a:spcBef>
-              <a:spcAft>
-                <a:spcPts val="0"/>
-              </a:spcAft>
-              <a:buClr>
-                <a:srgbClr val="002D5A"/>
-              </a:buClr>
-              <a:buSzPts val="3000"/>
-              <a:buFont typeface="Malgun Gothic"/>
-              <a:buNone/>
-            </a:pPr>
-            <a:r>
-              <a:rPr b="1" i="0" lang="en-US" sz="3000" u="none" cap="none" strike="noStrike">
-                <a:solidFill>
-                  <a:srgbClr val="002D5A"/>
-                </a:solidFill>
-                <a:latin typeface="Malgun Gothic"/>
-                <a:ea typeface="Malgun Gothic"/>
-                <a:cs typeface="Malgun Gothic"/>
-                <a:sym typeface="Malgun Gothic"/>
-              </a:rPr>
-              <a:t>해석이 실제로 갈리는지 수치로 확인</a:t>
-            </a:r>
-            <a:endParaRPr b="0" i="0" sz="3000" u="none" cap="none" strike="noStrike">
-              <a:solidFill>
-                <a:schemeClr val="dk1"/>
-              </a:solidFill>
-              <a:latin typeface="Calibri"/>
-              <a:ea typeface="Calibri"/>
-              <a:cs typeface="Calibri"/>
-              <a:sym typeface="Calibri"/>
-            </a:endParaRPr>
-          </a:p>
-        </p:txBody>
-      </p:sp>
-      <p:sp>
-        <p:nvSpPr>
-          <p:cNvPr id="400" name="Google Shape;400;p15"/>
-          <p:cNvSpPr/>
-          <p:nvPr/>
-        </p:nvSpPr>
-        <p:spPr>
-          <a:xfrm>
-            <a:off x="11076127" y="6355080"/>
-            <a:ext cx="548640" cy="256032"/>
-          </a:xfrm>
-          <a:prstGeom prst="rect">
-            <a:avLst/>
-          </a:prstGeom>
-          <a:noFill/>
-          <a:ln>
-            <a:noFill/>
-          </a:ln>
-        </p:spPr>
-        <p:txBody>
-          <a:bodyPr anchorCtr="0" anchor="ctr" bIns="0" lIns="0" spcFirstLastPara="1" rIns="0" wrap="square" tIns="0">
-            <a:noAutofit/>
-          </a:bodyPr>
-          <a:lstStyle/>
-          <a:p>
-            <a:pPr indent="0" lvl="0" marL="0" marR="0" rtl="0" algn="r">
-              <a:spcBef>
-                <a:spcPts val="0"/>
-              </a:spcBef>
-              <a:spcAft>
-                <a:spcPts val="0"/>
-              </a:spcAft>
-              <a:buClr>
-                <a:srgbClr val="65708A"/>
-              </a:buClr>
-              <a:buSzPts val="1000"/>
-              <a:buFont typeface="Malgun Gothic"/>
-              <a:buNone/>
-            </a:pPr>
-            <a:r>
-              <a:rPr b="0" i="0" lang="en-US" sz="1000" u="none" cap="none" strike="noStrike">
-                <a:solidFill>
-                  <a:srgbClr val="65708A"/>
-                </a:solidFill>
-                <a:latin typeface="Malgun Gothic"/>
-                <a:ea typeface="Malgun Gothic"/>
-                <a:cs typeface="Malgun Gothic"/>
-                <a:sym typeface="Malgun Gothic"/>
-              </a:rPr>
-              <a:t>9</a:t>
-            </a:r>
-            <a:endParaRPr b="0" i="0" sz="1000" u="none" cap="none" strike="noStrike">
-              <a:solidFill>
-                <a:schemeClr val="dk1"/>
-              </a:solidFill>
-              <a:latin typeface="Calibri"/>
-              <a:ea typeface="Calibri"/>
-              <a:cs typeface="Calibri"/>
-              <a:sym typeface="Calibri"/>
-            </a:endParaRPr>
-          </a:p>
-        </p:txBody>
-      </p:sp>
-      <p:sp>
-        <p:nvSpPr>
-          <p:cNvPr id="401" name="Google Shape;401;p15"/>
-          <p:cNvSpPr/>
-          <p:nvPr/>
-        </p:nvSpPr>
-        <p:spPr>
-          <a:xfrm>
-            <a:off x="566928" y="1389888"/>
-            <a:ext cx="6126480" cy="3749040"/>
-          </a:xfrm>
-          <a:prstGeom prst="roundRect">
-            <a:avLst>
-              <a:gd fmla="val 1951" name="adj"/>
-            </a:avLst>
-          </a:prstGeom>
-          <a:solidFill>
-            <a:srgbClr val="FFFFFF"/>
-          </a:solidFill>
-          <a:ln cap="flat" cmpd="sng" w="12700">
-            <a:solidFill>
-              <a:srgbClr val="DFE5EF"/>
-            </a:solidFill>
-            <a:prstDash val="solid"/>
-            <a:round/>
-            <a:headEnd len="sm" w="sm" type="none"/>
-            <a:tailEnd len="sm" w="sm" type="none"/>
-          </a:ln>
-          <a:effectLst>
-            <a:outerShdw blurRad="127000" rotWithShape="0" algn="bl" dir="5400000" dist="25400">
-              <a:srgbClr val="8894A8">
-                <a:alpha val="18039"/>
-              </a:srgbClr>
-            </a:outerShdw>
-          </a:effectLst>
-        </p:spPr>
-        <p:txBody>
-          <a:bodyPr anchorCtr="0" anchor="ctr" bIns="91425" lIns="91425" spcFirstLastPara="1" rIns="91425" wrap="square" tIns="91425">
-            <a:noAutofit/>
-          </a:bodyPr>
-          <a:lstStyle/>
-          <a:p>
-            <a:pPr indent="0" lvl="0" marL="0" rtl="0" algn="l">
-              <a:spcBef>
-                <a:spcPts val="0"/>
-              </a:spcBef>
-              <a:spcAft>
-                <a:spcPts val="0"/>
-              </a:spcAft>
-              <a:buNone/>
-            </a:pPr>
-            <a:r>
-              <a:t/>
-            </a:r>
-            <a:endParaRPr/>
-          </a:p>
-        </p:txBody>
-      </p:sp>
-      <p:sp>
-        <p:nvSpPr>
-          <p:cNvPr id="402" name="Google Shape;402;p15"/>
-          <p:cNvSpPr/>
-          <p:nvPr/>
-        </p:nvSpPr>
-        <p:spPr>
-          <a:xfrm>
-            <a:off x="859536" y="1572768"/>
-            <a:ext cx="5486400" cy="292608"/>
-          </a:xfrm>
-          <a:prstGeom prst="rect">
-            <a:avLst/>
-          </a:prstGeom>
-          <a:noFill/>
-          <a:ln>
-            <a:noFill/>
-          </a:ln>
-        </p:spPr>
-        <p:txBody>
-          <a:bodyPr anchorCtr="0" anchor="ctr" bIns="0" lIns="0" spcFirstLastPara="1" rIns="0" wrap="square" tIns="0">
-            <a:noAutofit/>
-          </a:bodyPr>
-          <a:lstStyle/>
-          <a:p>
-            <a:pPr indent="0" lvl="0" marL="0" marR="0" rtl="0" algn="l">
-              <a:spcBef>
-                <a:spcPts val="0"/>
-              </a:spcBef>
-              <a:spcAft>
-                <a:spcPts val="0"/>
-              </a:spcAft>
-              <a:buClr>
-                <a:srgbClr val="002D5A"/>
-              </a:buClr>
-              <a:buSzPts val="1350"/>
-              <a:buFont typeface="Malgun Gothic"/>
-              <a:buNone/>
-            </a:pPr>
-            <a:r>
-              <a:rPr b="1" i="0" lang="en-US" sz="1350" u="none" cap="none" strike="noStrike">
-                <a:solidFill>
-                  <a:srgbClr val="002D5A"/>
-                </a:solidFill>
-                <a:latin typeface="Malgun Gothic"/>
-                <a:ea typeface="Malgun Gothic"/>
-                <a:cs typeface="Malgun Gothic"/>
-                <a:sym typeface="Malgun Gothic"/>
-              </a:rPr>
-              <a:t>부서별 긍정 응답 비중 (2026)</a:t>
-            </a:r>
-            <a:endParaRPr b="0" i="0" sz="1350" u="none" cap="none" strike="noStrike">
-              <a:solidFill>
-                <a:schemeClr val="dk1"/>
-              </a:solidFill>
-              <a:latin typeface="Calibri"/>
-              <a:ea typeface="Calibri"/>
-              <a:cs typeface="Calibri"/>
-              <a:sym typeface="Calibri"/>
-            </a:endParaRPr>
-          </a:p>
-        </p:txBody>
-      </p:sp>
-      <p:graphicFrame>
-        <p:nvGraphicFramePr>
-          <p:cNvPr id="403" name="Google Shape;403;p15"/>
-          <p:cNvGraphicFramePr/>
-          <p:nvPr/>
-        </p:nvGraphicFramePr>
-        <p:xfrm>
-          <a:off x="768096" y="1938528"/>
-          <a:ext cx="5724144" cy="3035808"/>
-        </p:xfrm>
-        <a:graphic>
-          <a:graphicData uri="http://schemas.openxmlformats.org/drawingml/2006/chart">
-            <c:chart r:id="rId3"/>
-          </a:graphicData>
-        </a:graphic>
-      </p:graphicFrame>
-      <p:sp>
-        <p:nvSpPr>
-          <p:cNvPr id="404" name="Google Shape;404;p15"/>
-          <p:cNvSpPr/>
-          <p:nvPr/>
-        </p:nvSpPr>
-        <p:spPr>
-          <a:xfrm>
-            <a:off x="6912864" y="1389888"/>
-            <a:ext cx="4711903" cy="292608"/>
-          </a:xfrm>
-          <a:prstGeom prst="rect">
-            <a:avLst/>
-          </a:prstGeom>
-          <a:noFill/>
-          <a:ln>
-            <a:noFill/>
-          </a:ln>
-        </p:spPr>
-        <p:txBody>
-          <a:bodyPr anchorCtr="0" anchor="ctr" bIns="0" lIns="0" spcFirstLastPara="1" rIns="0" wrap="square" tIns="0">
-            <a:noAutofit/>
-          </a:bodyPr>
-          <a:lstStyle/>
-          <a:p>
-            <a:pPr indent="0" lvl="0" marL="0" marR="0" rtl="0" algn="l">
-              <a:spcBef>
-                <a:spcPts val="0"/>
-              </a:spcBef>
-              <a:spcAft>
-                <a:spcPts val="0"/>
-              </a:spcAft>
-              <a:buClr>
-                <a:srgbClr val="002D5A"/>
-              </a:buClr>
-              <a:buSzPts val="1350"/>
-              <a:buFont typeface="Malgun Gothic"/>
-              <a:buNone/>
-            </a:pPr>
-            <a:r>
-              <a:rPr b="1" i="0" lang="en-US" sz="1350" u="none" cap="none" strike="noStrike">
-                <a:solidFill>
-                  <a:srgbClr val="002D5A"/>
-                </a:solidFill>
-                <a:latin typeface="Malgun Gothic"/>
-                <a:ea typeface="Malgun Gothic"/>
-                <a:cs typeface="Malgun Gothic"/>
-                <a:sym typeface="Malgun Gothic"/>
-              </a:rPr>
-              <a:t>개선 전후 비교</a:t>
-            </a:r>
-            <a:endParaRPr b="0" i="0" sz="1350" u="none" cap="none" strike="noStrike">
-              <a:solidFill>
-                <a:schemeClr val="dk1"/>
-              </a:solidFill>
-              <a:latin typeface="Calibri"/>
-              <a:ea typeface="Calibri"/>
-              <a:cs typeface="Calibri"/>
-              <a:sym typeface="Calibri"/>
-            </a:endParaRPr>
-          </a:p>
-        </p:txBody>
-      </p:sp>
-      <p:sp>
-        <p:nvSpPr>
-          <p:cNvPr id="405" name="Google Shape;405;p15"/>
-          <p:cNvSpPr/>
-          <p:nvPr/>
-        </p:nvSpPr>
-        <p:spPr>
-          <a:xfrm>
-            <a:off x="6912864" y="1792224"/>
-            <a:ext cx="4711903" cy="969264"/>
-          </a:xfrm>
-          <a:prstGeom prst="roundRect">
-            <a:avLst>
-              <a:gd fmla="val 7547" name="adj"/>
-            </a:avLst>
-          </a:prstGeom>
-          <a:solidFill>
-            <a:srgbClr val="FFFFFF"/>
-          </a:solidFill>
-          <a:ln cap="flat" cmpd="sng" w="12700">
-            <a:solidFill>
-              <a:srgbClr val="DFE5EF"/>
-            </a:solidFill>
-            <a:prstDash val="solid"/>
-            <a:round/>
-            <a:headEnd len="sm" w="sm" type="none"/>
-            <a:tailEnd len="sm" w="sm" type="none"/>
-          </a:ln>
-          <a:effectLst>
-            <a:outerShdw blurRad="127000" rotWithShape="0" algn="bl" dir="5400000" dist="25400">
-              <a:srgbClr val="8894A8">
-                <a:alpha val="18039"/>
-              </a:srgbClr>
-            </a:outerShdw>
-          </a:effectLst>
-        </p:spPr>
-        <p:txBody>
-          <a:bodyPr anchorCtr="0" anchor="ctr" bIns="91425" lIns="91425" spcFirstLastPara="1" rIns="91425" wrap="square" tIns="91425">
-            <a:noAutofit/>
-          </a:bodyPr>
-          <a:lstStyle/>
-          <a:p>
-            <a:pPr indent="0" lvl="0" marL="0" rtl="0" algn="l">
-              <a:spcBef>
-                <a:spcPts val="0"/>
-              </a:spcBef>
-              <a:spcAft>
-                <a:spcPts val="0"/>
-              </a:spcAft>
-              <a:buNone/>
-            </a:pPr>
-            <a:r>
-              <a:t/>
-            </a:r>
-            <a:endParaRPr/>
-          </a:p>
-        </p:txBody>
-      </p:sp>
-      <p:sp>
-        <p:nvSpPr>
-          <p:cNvPr id="406" name="Google Shape;406;p15"/>
-          <p:cNvSpPr/>
-          <p:nvPr/>
-        </p:nvSpPr>
-        <p:spPr>
-          <a:xfrm>
-            <a:off x="7150608" y="1920240"/>
-            <a:ext cx="4236415" cy="237744"/>
-          </a:xfrm>
-          <a:prstGeom prst="rect">
-            <a:avLst/>
-          </a:prstGeom>
-          <a:noFill/>
-          <a:ln>
-            <a:noFill/>
-          </a:ln>
-        </p:spPr>
-        <p:txBody>
-          <a:bodyPr anchorCtr="0" anchor="ctr" bIns="0" lIns="0" spcFirstLastPara="1" rIns="0" wrap="square" tIns="0">
-            <a:noAutofit/>
-          </a:bodyPr>
-          <a:lstStyle/>
-          <a:p>
-            <a:pPr indent="0" lvl="0" marL="0" marR="0" rtl="0" algn="l">
-              <a:spcBef>
-                <a:spcPts val="0"/>
-              </a:spcBef>
-              <a:spcAft>
-                <a:spcPts val="0"/>
-              </a:spcAft>
-              <a:buClr>
-                <a:srgbClr val="002D5A"/>
-              </a:buClr>
-              <a:buSzPts val="1150"/>
-              <a:buFont typeface="Malgun Gothic"/>
-              <a:buNone/>
-            </a:pPr>
-            <a:r>
-              <a:rPr b="1" i="0" lang="en-US" sz="1150" u="none" cap="none" strike="noStrike">
-                <a:solidFill>
-                  <a:srgbClr val="002D5A"/>
-                </a:solidFill>
-                <a:latin typeface="Malgun Gothic"/>
-                <a:ea typeface="Malgun Gothic"/>
-                <a:cs typeface="Malgun Gothic"/>
-                <a:sym typeface="Malgun Gothic"/>
-              </a:rPr>
-              <a:t>더미 데이터 편차 주입</a:t>
-            </a:r>
-            <a:endParaRPr b="0" i="0" sz="1150" u="none" cap="none" strike="noStrike">
-              <a:solidFill>
-                <a:schemeClr val="dk1"/>
-              </a:solidFill>
-              <a:latin typeface="Calibri"/>
-              <a:ea typeface="Calibri"/>
-              <a:cs typeface="Calibri"/>
-              <a:sym typeface="Calibri"/>
-            </a:endParaRPr>
-          </a:p>
-        </p:txBody>
-      </p:sp>
-      <p:sp>
-        <p:nvSpPr>
-          <p:cNvPr id="407" name="Google Shape;407;p15"/>
-          <p:cNvSpPr/>
-          <p:nvPr/>
-        </p:nvSpPr>
-        <p:spPr>
-          <a:xfrm>
-            <a:off x="7150608" y="2157984"/>
-            <a:ext cx="4236415" cy="201168"/>
-          </a:xfrm>
-          <a:prstGeom prst="rect">
-            <a:avLst/>
-          </a:prstGeom>
-          <a:noFill/>
-          <a:ln>
-            <a:noFill/>
-          </a:ln>
-        </p:spPr>
-        <p:txBody>
-          <a:bodyPr anchorCtr="0" anchor="ctr" bIns="0" lIns="0" spcFirstLastPara="1" rIns="0" wrap="square" tIns="0">
-            <a:noAutofit/>
-          </a:bodyPr>
-          <a:lstStyle/>
-          <a:p>
-            <a:pPr indent="0" lvl="0" marL="0" marR="0" rtl="0" algn="l">
-              <a:spcBef>
-                <a:spcPts val="0"/>
-              </a:spcBef>
-              <a:spcAft>
-                <a:spcPts val="0"/>
-              </a:spcAft>
-              <a:buClr>
-                <a:srgbClr val="65708A"/>
-              </a:buClr>
-              <a:buSzPts val="950"/>
-              <a:buFont typeface="Malgun Gothic"/>
-              <a:buNone/>
-            </a:pPr>
-            <a:r>
-              <a:rPr b="0" i="0" lang="en-US" sz="950" u="none" cap="none" strike="noStrike">
-                <a:solidFill>
-                  <a:srgbClr val="65708A"/>
-                </a:solidFill>
-                <a:latin typeface="Malgun Gothic"/>
-                <a:ea typeface="Malgun Gothic"/>
-                <a:cs typeface="Malgun Gothic"/>
-                <a:sym typeface="Malgun Gothic"/>
-              </a:rPr>
-              <a:t>"비슷한 수준" 문구 비율</a:t>
-            </a:r>
-            <a:endParaRPr b="0" i="0" sz="950" u="none" cap="none" strike="noStrike">
-              <a:solidFill>
-                <a:schemeClr val="dk1"/>
-              </a:solidFill>
-              <a:latin typeface="Calibri"/>
-              <a:ea typeface="Calibri"/>
-              <a:cs typeface="Calibri"/>
-              <a:sym typeface="Calibri"/>
-            </a:endParaRPr>
-          </a:p>
-        </p:txBody>
-      </p:sp>
-      <p:sp>
-        <p:nvSpPr>
-          <p:cNvPr id="408" name="Google Shape;408;p15"/>
-          <p:cNvSpPr/>
-          <p:nvPr/>
-        </p:nvSpPr>
-        <p:spPr>
-          <a:xfrm>
-            <a:off x="7150608" y="2359152"/>
-            <a:ext cx="1188720" cy="310896"/>
-          </a:xfrm>
-          <a:prstGeom prst="rect">
-            <a:avLst/>
-          </a:prstGeom>
-          <a:noFill/>
-          <a:ln>
-            <a:noFill/>
-          </a:ln>
-        </p:spPr>
-        <p:txBody>
-          <a:bodyPr anchorCtr="0" anchor="ctr" bIns="0" lIns="0" spcFirstLastPara="1" rIns="0" wrap="square" tIns="0">
-            <a:noAutofit/>
-          </a:bodyPr>
-          <a:lstStyle/>
-          <a:p>
-            <a:pPr indent="0" lvl="0" marL="0" marR="0" rtl="0" algn="l">
-              <a:spcBef>
-                <a:spcPts val="0"/>
-              </a:spcBef>
-              <a:spcAft>
-                <a:spcPts val="0"/>
-              </a:spcAft>
-              <a:buClr>
-                <a:srgbClr val="65708A"/>
-              </a:buClr>
-              <a:buSzPts val="1600"/>
-              <a:buFont typeface="Malgun Gothic"/>
-              <a:buNone/>
-            </a:pPr>
-            <a:r>
-              <a:rPr b="1" i="0" lang="en-US" sz="1600" u="none" cap="none" strike="noStrike">
-                <a:solidFill>
-                  <a:srgbClr val="65708A"/>
-                </a:solidFill>
-                <a:latin typeface="Malgun Gothic"/>
-                <a:ea typeface="Malgun Gothic"/>
-                <a:cs typeface="Malgun Gothic"/>
-                <a:sym typeface="Malgun Gothic"/>
-              </a:rPr>
-              <a:t>64%</a:t>
-            </a:r>
-            <a:endParaRPr b="0" i="0" sz="1600" u="none" cap="none" strike="noStrike">
-              <a:solidFill>
-                <a:schemeClr val="dk1"/>
-              </a:solidFill>
-              <a:latin typeface="Calibri"/>
-              <a:ea typeface="Calibri"/>
-              <a:cs typeface="Calibri"/>
-              <a:sym typeface="Calibri"/>
-            </a:endParaRPr>
-          </a:p>
-        </p:txBody>
-      </p:sp>
-      <p:sp>
-        <p:nvSpPr>
-          <p:cNvPr id="409" name="Google Shape;409;p15"/>
-          <p:cNvSpPr/>
-          <p:nvPr/>
-        </p:nvSpPr>
-        <p:spPr>
-          <a:xfrm>
-            <a:off x="8339328" y="2468880"/>
-            <a:ext cx="237744" cy="128016"/>
-          </a:xfrm>
-          <a:prstGeom prst="rightArrow">
-            <a:avLst>
-              <a:gd fmla="val 50000" name="adj1"/>
-              <a:gd fmla="val 50000" name="adj2"/>
-            </a:avLst>
-          </a:prstGeom>
-          <a:solidFill>
-            <a:srgbClr val="65708A"/>
-          </a:solidFill>
-          <a:ln>
-            <a:noFill/>
-          </a:ln>
-        </p:spPr>
-        <p:txBody>
-          <a:bodyPr anchorCtr="0" anchor="ctr" bIns="91425" lIns="91425" spcFirstLastPara="1" rIns="91425" wrap="square" tIns="91425">
-            <a:noAutofit/>
-          </a:bodyPr>
-          <a:lstStyle/>
-          <a:p>
-            <a:pPr indent="0" lvl="0" marL="0" rtl="0" algn="l">
-              <a:spcBef>
-                <a:spcPts val="0"/>
-              </a:spcBef>
-              <a:spcAft>
-                <a:spcPts val="0"/>
-              </a:spcAft>
-              <a:buNone/>
-            </a:pPr>
-            <a:r>
-              <a:t/>
-            </a:r>
-            <a:endParaRPr/>
-          </a:p>
-        </p:txBody>
-      </p:sp>
-      <p:sp>
-        <p:nvSpPr>
-          <p:cNvPr id="410" name="Google Shape;410;p15"/>
-          <p:cNvSpPr/>
-          <p:nvPr/>
-        </p:nvSpPr>
-        <p:spPr>
-          <a:xfrm>
-            <a:off x="8686800" y="2359152"/>
-            <a:ext cx="1463040" cy="310896"/>
-          </a:xfrm>
-          <a:prstGeom prst="rect">
-            <a:avLst/>
-          </a:prstGeom>
-          <a:noFill/>
-          <a:ln>
-            <a:noFill/>
-          </a:ln>
-        </p:spPr>
-        <p:txBody>
-          <a:bodyPr anchorCtr="0" anchor="ctr" bIns="0" lIns="0" spcFirstLastPara="1" rIns="0" wrap="square" tIns="0">
-            <a:noAutofit/>
-          </a:bodyPr>
-          <a:lstStyle/>
-          <a:p>
-            <a:pPr indent="0" lvl="0" marL="0" marR="0" rtl="0" algn="l">
-              <a:spcBef>
-                <a:spcPts val="0"/>
-              </a:spcBef>
-              <a:spcAft>
-                <a:spcPts val="0"/>
-              </a:spcAft>
-              <a:buClr>
-                <a:srgbClr val="00A950"/>
-              </a:buClr>
-              <a:buSzPts val="1600"/>
-              <a:buFont typeface="Malgun Gothic"/>
-              <a:buNone/>
-            </a:pPr>
-            <a:r>
-              <a:rPr b="1" i="0" lang="en-US" sz="1600" u="none" cap="none" strike="noStrike">
-                <a:solidFill>
-                  <a:srgbClr val="00A950"/>
-                </a:solidFill>
-                <a:latin typeface="Malgun Gothic"/>
-                <a:ea typeface="Malgun Gothic"/>
-                <a:cs typeface="Malgun Gothic"/>
-                <a:sym typeface="Malgun Gothic"/>
-              </a:rPr>
-              <a:t>18%</a:t>
-            </a:r>
-            <a:endParaRPr b="0" i="0" sz="1600" u="none" cap="none" strike="noStrike">
-              <a:solidFill>
-                <a:schemeClr val="dk1"/>
-              </a:solidFill>
-              <a:latin typeface="Calibri"/>
-              <a:ea typeface="Calibri"/>
-              <a:cs typeface="Calibri"/>
-              <a:sym typeface="Calibri"/>
-            </a:endParaRPr>
-          </a:p>
-        </p:txBody>
-      </p:sp>
-      <p:sp>
-        <p:nvSpPr>
-          <p:cNvPr id="411" name="Google Shape;411;p15"/>
-          <p:cNvSpPr/>
-          <p:nvPr/>
-        </p:nvSpPr>
-        <p:spPr>
-          <a:xfrm>
-            <a:off x="6912864" y="2926080"/>
-            <a:ext cx="4711903" cy="969264"/>
-          </a:xfrm>
-          <a:prstGeom prst="roundRect">
-            <a:avLst>
-              <a:gd fmla="val 7547" name="adj"/>
-            </a:avLst>
-          </a:prstGeom>
-          <a:solidFill>
-            <a:srgbClr val="FFFFFF"/>
-          </a:solidFill>
-          <a:ln cap="flat" cmpd="sng" w="12700">
-            <a:solidFill>
-              <a:srgbClr val="DFE5EF"/>
-            </a:solidFill>
-            <a:prstDash val="solid"/>
-            <a:round/>
-            <a:headEnd len="sm" w="sm" type="none"/>
-            <a:tailEnd len="sm" w="sm" type="none"/>
-          </a:ln>
-          <a:effectLst>
-            <a:outerShdw blurRad="127000" rotWithShape="0" algn="bl" dir="5400000" dist="25400">
-              <a:srgbClr val="8894A8">
-                <a:alpha val="18039"/>
-              </a:srgbClr>
-            </a:outerShdw>
-          </a:effectLst>
-        </p:spPr>
-        <p:txBody>
-          <a:bodyPr anchorCtr="0" anchor="ctr" bIns="91425" lIns="91425" spcFirstLastPara="1" rIns="91425" wrap="square" tIns="91425">
-            <a:noAutofit/>
-          </a:bodyPr>
-          <a:lstStyle/>
-          <a:p>
-            <a:pPr indent="0" lvl="0" marL="0" rtl="0" algn="l">
-              <a:spcBef>
-                <a:spcPts val="0"/>
-              </a:spcBef>
-              <a:spcAft>
-                <a:spcPts val="0"/>
-              </a:spcAft>
-              <a:buNone/>
-            </a:pPr>
-            <a:r>
-              <a:t/>
-            </a:r>
-            <a:endParaRPr/>
-          </a:p>
-        </p:txBody>
-      </p:sp>
-      <p:sp>
-        <p:nvSpPr>
-          <p:cNvPr id="412" name="Google Shape;412;p15"/>
-          <p:cNvSpPr/>
-          <p:nvPr/>
-        </p:nvSpPr>
-        <p:spPr>
-          <a:xfrm>
-            <a:off x="7150608" y="3054096"/>
-            <a:ext cx="4236415" cy="237744"/>
-          </a:xfrm>
-          <a:prstGeom prst="rect">
-            <a:avLst/>
-          </a:prstGeom>
-          <a:noFill/>
-          <a:ln>
-            <a:noFill/>
-          </a:ln>
-        </p:spPr>
-        <p:txBody>
-          <a:bodyPr anchorCtr="0" anchor="ctr" bIns="0" lIns="0" spcFirstLastPara="1" rIns="0" wrap="square" tIns="0">
-            <a:noAutofit/>
-          </a:bodyPr>
-          <a:lstStyle/>
-          <a:p>
-            <a:pPr indent="0" lvl="0" marL="0" marR="0" rtl="0" algn="l">
-              <a:spcBef>
-                <a:spcPts val="0"/>
-              </a:spcBef>
-              <a:spcAft>
-                <a:spcPts val="0"/>
-              </a:spcAft>
-              <a:buClr>
-                <a:srgbClr val="002D5A"/>
-              </a:buClr>
-              <a:buSzPts val="1150"/>
-              <a:buFont typeface="Malgun Gothic"/>
-              <a:buNone/>
-            </a:pPr>
-            <a:r>
-              <a:rPr b="1" i="0" lang="en-US" sz="1150" u="none" cap="none" strike="noStrike">
-                <a:solidFill>
-                  <a:srgbClr val="002D5A"/>
-                </a:solidFill>
-                <a:latin typeface="Malgun Gothic"/>
-                <a:ea typeface="Malgun Gothic"/>
-                <a:cs typeface="Malgun Gothic"/>
-                <a:sym typeface="Malgun Gothic"/>
-              </a:rPr>
-              <a:t>대화 기록 저장 방식 전환</a:t>
-            </a:r>
-            <a:endParaRPr b="0" i="0" sz="1150" u="none" cap="none" strike="noStrike">
-              <a:solidFill>
-                <a:schemeClr val="dk1"/>
-              </a:solidFill>
-              <a:latin typeface="Calibri"/>
-              <a:ea typeface="Calibri"/>
-              <a:cs typeface="Calibri"/>
-              <a:sym typeface="Calibri"/>
-            </a:endParaRPr>
-          </a:p>
-        </p:txBody>
-      </p:sp>
-      <p:sp>
-        <p:nvSpPr>
-          <p:cNvPr id="413" name="Google Shape;413;p15"/>
-          <p:cNvSpPr/>
-          <p:nvPr/>
-        </p:nvSpPr>
-        <p:spPr>
-          <a:xfrm>
-            <a:off x="7150608" y="3291840"/>
-            <a:ext cx="4236415" cy="201168"/>
-          </a:xfrm>
-          <a:prstGeom prst="rect">
-            <a:avLst/>
-          </a:prstGeom>
-          <a:noFill/>
-          <a:ln>
-            <a:noFill/>
-          </a:ln>
-        </p:spPr>
-        <p:txBody>
-          <a:bodyPr anchorCtr="0" anchor="ctr" bIns="0" lIns="0" spcFirstLastPara="1" rIns="0" wrap="square" tIns="0">
-            <a:noAutofit/>
-          </a:bodyPr>
-          <a:lstStyle/>
-          <a:p>
-            <a:pPr indent="0" lvl="0" marL="0" marR="0" rtl="0" algn="l">
-              <a:spcBef>
-                <a:spcPts val="0"/>
-              </a:spcBef>
-              <a:spcAft>
-                <a:spcPts val="0"/>
-              </a:spcAft>
-              <a:buClr>
-                <a:srgbClr val="65708A"/>
-              </a:buClr>
-              <a:buSzPts val="950"/>
-              <a:buFont typeface="Malgun Gothic"/>
-              <a:buNone/>
-            </a:pPr>
-            <a:r>
-              <a:rPr b="0" i="0" lang="en-US" sz="950" u="none" cap="none" strike="noStrike">
-                <a:solidFill>
-                  <a:srgbClr val="65708A"/>
-                </a:solidFill>
-                <a:latin typeface="Malgun Gothic"/>
-                <a:ea typeface="Malgun Gothic"/>
-                <a:cs typeface="Malgun Gothic"/>
-                <a:sym typeface="Malgun Gothic"/>
-              </a:rPr>
-              <a:t>다운로드에 남는 문답 수</a:t>
-            </a:r>
-            <a:endParaRPr b="0" i="0" sz="950" u="none" cap="none" strike="noStrike">
-              <a:solidFill>
-                <a:schemeClr val="dk1"/>
-              </a:solidFill>
-              <a:latin typeface="Calibri"/>
-              <a:ea typeface="Calibri"/>
-              <a:cs typeface="Calibri"/>
-              <a:sym typeface="Calibri"/>
-            </a:endParaRPr>
-          </a:p>
-        </p:txBody>
-      </p:sp>
-      <p:sp>
-        <p:nvSpPr>
-          <p:cNvPr id="414" name="Google Shape;414;p15"/>
-          <p:cNvSpPr/>
-          <p:nvPr/>
-        </p:nvSpPr>
-        <p:spPr>
-          <a:xfrm>
-            <a:off x="7150608" y="3493008"/>
-            <a:ext cx="1188720" cy="310896"/>
-          </a:xfrm>
-          <a:prstGeom prst="rect">
-            <a:avLst/>
-          </a:prstGeom>
-          <a:noFill/>
-          <a:ln>
-            <a:noFill/>
-          </a:ln>
-        </p:spPr>
-        <p:txBody>
-          <a:bodyPr anchorCtr="0" anchor="ctr" bIns="0" lIns="0" spcFirstLastPara="1" rIns="0" wrap="square" tIns="0">
-            <a:noAutofit/>
-          </a:bodyPr>
-          <a:lstStyle/>
-          <a:p>
-            <a:pPr indent="0" lvl="0" marL="0" marR="0" rtl="0" algn="l">
-              <a:spcBef>
-                <a:spcPts val="0"/>
-              </a:spcBef>
-              <a:spcAft>
-                <a:spcPts val="0"/>
-              </a:spcAft>
-              <a:buClr>
-                <a:srgbClr val="65708A"/>
-              </a:buClr>
-              <a:buSzPts val="1600"/>
-              <a:buFont typeface="Malgun Gothic"/>
-              <a:buNone/>
-            </a:pPr>
-            <a:r>
-              <a:rPr b="1" i="0" lang="en-US" sz="1600" u="none" cap="none" strike="noStrike">
-                <a:solidFill>
-                  <a:srgbClr val="65708A"/>
-                </a:solidFill>
-                <a:latin typeface="Malgun Gothic"/>
-                <a:ea typeface="Malgun Gothic"/>
-                <a:cs typeface="Malgun Gothic"/>
-                <a:sym typeface="Malgun Gothic"/>
-              </a:rPr>
-              <a:t>1턴</a:t>
-            </a:r>
-            <a:endParaRPr b="0" i="0" sz="1600" u="none" cap="none" strike="noStrike">
-              <a:solidFill>
-                <a:schemeClr val="dk1"/>
-              </a:solidFill>
-              <a:latin typeface="Calibri"/>
-              <a:ea typeface="Calibri"/>
-              <a:cs typeface="Calibri"/>
-              <a:sym typeface="Calibri"/>
-            </a:endParaRPr>
-          </a:p>
-        </p:txBody>
-      </p:sp>
-      <p:sp>
-        <p:nvSpPr>
-          <p:cNvPr id="415" name="Google Shape;415;p15"/>
-          <p:cNvSpPr/>
-          <p:nvPr/>
-        </p:nvSpPr>
-        <p:spPr>
-          <a:xfrm>
-            <a:off x="8339328" y="3602736"/>
-            <a:ext cx="237744" cy="128016"/>
-          </a:xfrm>
-          <a:prstGeom prst="rightArrow">
-            <a:avLst>
-              <a:gd fmla="val 50000" name="adj1"/>
-              <a:gd fmla="val 50000" name="adj2"/>
-            </a:avLst>
-          </a:prstGeom>
-          <a:solidFill>
-            <a:srgbClr val="65708A"/>
-          </a:solidFill>
-          <a:ln>
-            <a:noFill/>
-          </a:ln>
-        </p:spPr>
-        <p:txBody>
-          <a:bodyPr anchorCtr="0" anchor="ctr" bIns="91425" lIns="91425" spcFirstLastPara="1" rIns="91425" wrap="square" tIns="91425">
-            <a:noAutofit/>
-          </a:bodyPr>
-          <a:lstStyle/>
-          <a:p>
-            <a:pPr indent="0" lvl="0" marL="0" rtl="0" algn="l">
-              <a:spcBef>
-                <a:spcPts val="0"/>
-              </a:spcBef>
-              <a:spcAft>
-                <a:spcPts val="0"/>
-              </a:spcAft>
-              <a:buNone/>
-            </a:pPr>
-            <a:r>
-              <a:t/>
-            </a:r>
-            <a:endParaRPr/>
-          </a:p>
-        </p:txBody>
-      </p:sp>
-      <p:sp>
-        <p:nvSpPr>
-          <p:cNvPr id="416" name="Google Shape;416;p15"/>
-          <p:cNvSpPr/>
-          <p:nvPr/>
-        </p:nvSpPr>
-        <p:spPr>
-          <a:xfrm>
-            <a:off x="8686800" y="3493008"/>
-            <a:ext cx="1463040" cy="310896"/>
-          </a:xfrm>
-          <a:prstGeom prst="rect">
-            <a:avLst/>
-          </a:prstGeom>
-          <a:noFill/>
-          <a:ln>
-            <a:noFill/>
-          </a:ln>
-        </p:spPr>
-        <p:txBody>
-          <a:bodyPr anchorCtr="0" anchor="ctr" bIns="0" lIns="0" spcFirstLastPara="1" rIns="0" wrap="square" tIns="0">
-            <a:noAutofit/>
-          </a:bodyPr>
-          <a:lstStyle/>
-          <a:p>
-            <a:pPr indent="0" lvl="0" marL="0" marR="0" rtl="0" algn="l">
-              <a:spcBef>
-                <a:spcPts val="0"/>
-              </a:spcBef>
-              <a:spcAft>
-                <a:spcPts val="0"/>
-              </a:spcAft>
-              <a:buClr>
-                <a:srgbClr val="00A950"/>
-              </a:buClr>
-              <a:buSzPts val="1600"/>
-              <a:buFont typeface="Malgun Gothic"/>
-              <a:buNone/>
-            </a:pPr>
-            <a:r>
-              <a:rPr b="1" i="0" lang="en-US" sz="1600" u="none" cap="none" strike="noStrike">
-                <a:solidFill>
-                  <a:srgbClr val="00A950"/>
-                </a:solidFill>
-                <a:latin typeface="Malgun Gothic"/>
-                <a:ea typeface="Malgun Gothic"/>
-                <a:cs typeface="Malgun Gothic"/>
-                <a:sym typeface="Malgun Gothic"/>
-              </a:rPr>
-              <a:t>전체</a:t>
-            </a:r>
-            <a:endParaRPr b="0" i="0" sz="1600" u="none" cap="none" strike="noStrike">
-              <a:solidFill>
-                <a:schemeClr val="dk1"/>
-              </a:solidFill>
-              <a:latin typeface="Calibri"/>
-              <a:ea typeface="Calibri"/>
-              <a:cs typeface="Calibri"/>
-              <a:sym typeface="Calibri"/>
-            </a:endParaRPr>
-          </a:p>
-        </p:txBody>
-      </p:sp>
-      <p:sp>
-        <p:nvSpPr>
-          <p:cNvPr id="417" name="Google Shape;417;p15"/>
-          <p:cNvSpPr/>
-          <p:nvPr/>
-        </p:nvSpPr>
-        <p:spPr>
-          <a:xfrm>
-            <a:off x="6912864" y="4059936"/>
-            <a:ext cx="4711903" cy="969264"/>
-          </a:xfrm>
-          <a:prstGeom prst="roundRect">
-            <a:avLst>
-              <a:gd fmla="val 7547" name="adj"/>
-            </a:avLst>
-          </a:prstGeom>
-          <a:solidFill>
-            <a:srgbClr val="FFFFFF"/>
-          </a:solidFill>
-          <a:ln cap="flat" cmpd="sng" w="12700">
-            <a:solidFill>
-              <a:srgbClr val="DFE5EF"/>
-            </a:solidFill>
-            <a:prstDash val="solid"/>
-            <a:round/>
-            <a:headEnd len="sm" w="sm" type="none"/>
-            <a:tailEnd len="sm" w="sm" type="none"/>
-          </a:ln>
-          <a:effectLst>
-            <a:outerShdw blurRad="127000" rotWithShape="0" algn="bl" dir="5400000" dist="25400">
-              <a:srgbClr val="8894A8">
-                <a:alpha val="18039"/>
-              </a:srgbClr>
-            </a:outerShdw>
-          </a:effectLst>
-        </p:spPr>
-        <p:txBody>
-          <a:bodyPr anchorCtr="0" anchor="ctr" bIns="91425" lIns="91425" spcFirstLastPara="1" rIns="91425" wrap="square" tIns="91425">
-            <a:noAutofit/>
-          </a:bodyPr>
-          <a:lstStyle/>
-          <a:p>
-            <a:pPr indent="0" lvl="0" marL="0" rtl="0" algn="l">
-              <a:spcBef>
-                <a:spcPts val="0"/>
-              </a:spcBef>
-              <a:spcAft>
-                <a:spcPts val="0"/>
-              </a:spcAft>
-              <a:buNone/>
-            </a:pPr>
-            <a:r>
-              <a:t/>
-            </a:r>
-            <a:endParaRPr/>
-          </a:p>
-        </p:txBody>
-      </p:sp>
-      <p:sp>
-        <p:nvSpPr>
-          <p:cNvPr id="418" name="Google Shape;418;p15"/>
-          <p:cNvSpPr/>
-          <p:nvPr/>
-        </p:nvSpPr>
-        <p:spPr>
-          <a:xfrm>
-            <a:off x="7150608" y="4187952"/>
-            <a:ext cx="4236415" cy="237744"/>
-          </a:xfrm>
-          <a:prstGeom prst="rect">
-            <a:avLst/>
-          </a:prstGeom>
-          <a:noFill/>
-          <a:ln>
-            <a:noFill/>
-          </a:ln>
-        </p:spPr>
-        <p:txBody>
-          <a:bodyPr anchorCtr="0" anchor="ctr" bIns="0" lIns="0" spcFirstLastPara="1" rIns="0" wrap="square" tIns="0">
-            <a:noAutofit/>
-          </a:bodyPr>
-          <a:lstStyle/>
-          <a:p>
-            <a:pPr indent="0" lvl="0" marL="0" marR="0" rtl="0" algn="l">
-              <a:spcBef>
-                <a:spcPts val="0"/>
-              </a:spcBef>
-              <a:spcAft>
-                <a:spcPts val="0"/>
-              </a:spcAft>
-              <a:buClr>
-                <a:srgbClr val="002D5A"/>
-              </a:buClr>
-              <a:buSzPts val="1150"/>
-              <a:buFont typeface="Malgun Gothic"/>
-              <a:buNone/>
-            </a:pPr>
-            <a:r>
-              <a:rPr b="1" i="0" lang="en-US" sz="1150" u="none" cap="none" strike="noStrike">
-                <a:solidFill>
-                  <a:srgbClr val="002D5A"/>
-                </a:solidFill>
-                <a:latin typeface="Malgun Gothic"/>
-                <a:ea typeface="Malgun Gothic"/>
-                <a:cs typeface="Malgun Gothic"/>
-                <a:sym typeface="Malgun Gothic"/>
-              </a:rPr>
-              <a:t>막대 정렬 개선</a:t>
-            </a:r>
-            <a:endParaRPr b="0" i="0" sz="1150" u="none" cap="none" strike="noStrike">
-              <a:solidFill>
-                <a:schemeClr val="dk1"/>
-              </a:solidFill>
-              <a:latin typeface="Calibri"/>
-              <a:ea typeface="Calibri"/>
-              <a:cs typeface="Calibri"/>
-              <a:sym typeface="Calibri"/>
-            </a:endParaRPr>
-          </a:p>
-        </p:txBody>
-      </p:sp>
-      <p:sp>
-        <p:nvSpPr>
-          <p:cNvPr id="419" name="Google Shape;419;p15"/>
-          <p:cNvSpPr/>
-          <p:nvPr/>
-        </p:nvSpPr>
-        <p:spPr>
-          <a:xfrm>
-            <a:off x="7150608" y="4425696"/>
-            <a:ext cx="4236415" cy="201168"/>
-          </a:xfrm>
-          <a:prstGeom prst="rect">
-            <a:avLst/>
-          </a:prstGeom>
-          <a:noFill/>
-          <a:ln>
-            <a:noFill/>
-          </a:ln>
-        </p:spPr>
-        <p:txBody>
-          <a:bodyPr anchorCtr="0" anchor="ctr" bIns="0" lIns="0" spcFirstLastPara="1" rIns="0" wrap="square" tIns="0">
-            <a:noAutofit/>
-          </a:bodyPr>
-          <a:lstStyle/>
-          <a:p>
-            <a:pPr indent="0" lvl="0" marL="0" marR="0" rtl="0" algn="l">
-              <a:spcBef>
-                <a:spcPts val="0"/>
-              </a:spcBef>
-              <a:spcAft>
-                <a:spcPts val="0"/>
-              </a:spcAft>
-              <a:buClr>
-                <a:srgbClr val="65708A"/>
-              </a:buClr>
-              <a:buSzPts val="950"/>
-              <a:buFont typeface="Malgun Gothic"/>
-              <a:buNone/>
-            </a:pPr>
-            <a:r>
-              <a:rPr b="0" i="0" lang="en-US" sz="950" u="none" cap="none" strike="noStrike">
-                <a:solidFill>
-                  <a:srgbClr val="65708A"/>
-                </a:solidFill>
-                <a:latin typeface="Malgun Gothic"/>
-                <a:ea typeface="Malgun Gothic"/>
-                <a:cs typeface="Malgun Gothic"/>
-                <a:sym typeface="Malgun Gothic"/>
-              </a:rPr>
-              <a:t>문항별 막대 폭 편차</a:t>
-            </a:r>
-            <a:endParaRPr b="0" i="0" sz="950" u="none" cap="none" strike="noStrike">
-              <a:solidFill>
-                <a:schemeClr val="dk1"/>
-              </a:solidFill>
-              <a:latin typeface="Calibri"/>
-              <a:ea typeface="Calibri"/>
-              <a:cs typeface="Calibri"/>
-              <a:sym typeface="Calibri"/>
-            </a:endParaRPr>
-          </a:p>
-        </p:txBody>
-      </p:sp>
-      <p:sp>
-        <p:nvSpPr>
-          <p:cNvPr id="420" name="Google Shape;420;p15"/>
-          <p:cNvSpPr/>
-          <p:nvPr/>
-        </p:nvSpPr>
-        <p:spPr>
-          <a:xfrm>
-            <a:off x="7150608" y="4626864"/>
-            <a:ext cx="1188720" cy="310896"/>
-          </a:xfrm>
-          <a:prstGeom prst="rect">
-            <a:avLst/>
-          </a:prstGeom>
-          <a:noFill/>
-          <a:ln>
-            <a:noFill/>
-          </a:ln>
-        </p:spPr>
-        <p:txBody>
-          <a:bodyPr anchorCtr="0" anchor="ctr" bIns="0" lIns="0" spcFirstLastPara="1" rIns="0" wrap="square" tIns="0">
-            <a:noAutofit/>
-          </a:bodyPr>
-          <a:lstStyle/>
-          <a:p>
-            <a:pPr indent="0" lvl="0" marL="0" marR="0" rtl="0" algn="l">
-              <a:spcBef>
-                <a:spcPts val="0"/>
-              </a:spcBef>
-              <a:spcAft>
-                <a:spcPts val="0"/>
-              </a:spcAft>
-              <a:buClr>
-                <a:srgbClr val="65708A"/>
-              </a:buClr>
-              <a:buSzPts val="1600"/>
-              <a:buFont typeface="Malgun Gothic"/>
-              <a:buNone/>
-            </a:pPr>
-            <a:r>
-              <a:rPr b="1" i="0" lang="en-US" sz="1600" u="none" cap="none" strike="noStrike">
-                <a:solidFill>
-                  <a:srgbClr val="65708A"/>
-                </a:solidFill>
-                <a:latin typeface="Malgun Gothic"/>
-                <a:ea typeface="Malgun Gothic"/>
-                <a:cs typeface="Malgun Gothic"/>
-                <a:sym typeface="Malgun Gothic"/>
-              </a:rPr>
-              <a:t>3종</a:t>
-            </a:r>
-            <a:endParaRPr b="0" i="0" sz="1600" u="none" cap="none" strike="noStrike">
-              <a:solidFill>
-                <a:schemeClr val="dk1"/>
-              </a:solidFill>
-              <a:latin typeface="Calibri"/>
-              <a:ea typeface="Calibri"/>
-              <a:cs typeface="Calibri"/>
-              <a:sym typeface="Calibri"/>
-            </a:endParaRPr>
-          </a:p>
-        </p:txBody>
-      </p:sp>
-      <p:sp>
-        <p:nvSpPr>
-          <p:cNvPr id="421" name="Google Shape;421;p15"/>
-          <p:cNvSpPr/>
-          <p:nvPr/>
-        </p:nvSpPr>
-        <p:spPr>
-          <a:xfrm>
-            <a:off x="8339328" y="4736592"/>
-            <a:ext cx="237744" cy="128016"/>
-          </a:xfrm>
-          <a:prstGeom prst="rightArrow">
-            <a:avLst>
-              <a:gd fmla="val 50000" name="adj1"/>
-              <a:gd fmla="val 50000" name="adj2"/>
-            </a:avLst>
-          </a:prstGeom>
-          <a:solidFill>
-            <a:srgbClr val="65708A"/>
-          </a:solidFill>
-          <a:ln>
-            <a:noFill/>
-          </a:ln>
-        </p:spPr>
-        <p:txBody>
-          <a:bodyPr anchorCtr="0" anchor="ctr" bIns="91425" lIns="91425" spcFirstLastPara="1" rIns="91425" wrap="square" tIns="91425">
-            <a:noAutofit/>
-          </a:bodyPr>
-          <a:lstStyle/>
-          <a:p>
-            <a:pPr indent="0" lvl="0" marL="0" rtl="0" algn="l">
-              <a:spcBef>
-                <a:spcPts val="0"/>
-              </a:spcBef>
-              <a:spcAft>
-                <a:spcPts val="0"/>
-              </a:spcAft>
-              <a:buNone/>
-            </a:pPr>
-            <a:r>
-              <a:t/>
-            </a:r>
-            <a:endParaRPr/>
-          </a:p>
-        </p:txBody>
-      </p:sp>
-      <p:sp>
-        <p:nvSpPr>
-          <p:cNvPr id="422" name="Google Shape;422;p15"/>
-          <p:cNvSpPr/>
-          <p:nvPr/>
-        </p:nvSpPr>
-        <p:spPr>
-          <a:xfrm>
-            <a:off x="8686800" y="4626864"/>
-            <a:ext cx="1463040" cy="310896"/>
-          </a:xfrm>
-          <a:prstGeom prst="rect">
-            <a:avLst/>
-          </a:prstGeom>
-          <a:noFill/>
-          <a:ln>
-            <a:noFill/>
-          </a:ln>
-        </p:spPr>
-        <p:txBody>
-          <a:bodyPr anchorCtr="0" anchor="ctr" bIns="0" lIns="0" spcFirstLastPara="1" rIns="0" wrap="square" tIns="0">
-            <a:noAutofit/>
-          </a:bodyPr>
-          <a:lstStyle/>
-          <a:p>
-            <a:pPr indent="0" lvl="0" marL="0" marR="0" rtl="0" algn="l">
-              <a:spcBef>
-                <a:spcPts val="0"/>
-              </a:spcBef>
-              <a:spcAft>
-                <a:spcPts val="0"/>
-              </a:spcAft>
-              <a:buClr>
-                <a:srgbClr val="00A950"/>
-              </a:buClr>
-              <a:buSzPts val="1600"/>
-              <a:buFont typeface="Malgun Gothic"/>
-              <a:buNone/>
-            </a:pPr>
-            <a:r>
-              <a:rPr b="1" i="0" lang="en-US" sz="1600" u="none" cap="none" strike="noStrike">
-                <a:solidFill>
-                  <a:srgbClr val="00A950"/>
-                </a:solidFill>
-                <a:latin typeface="Malgun Gothic"/>
-                <a:ea typeface="Malgun Gothic"/>
-                <a:cs typeface="Malgun Gothic"/>
-                <a:sym typeface="Malgun Gothic"/>
-              </a:rPr>
-              <a:t>1종</a:t>
-            </a:r>
-            <a:endParaRPr b="0" i="0" sz="1600" u="none" cap="none" strike="noStrike">
-              <a:solidFill>
-                <a:schemeClr val="dk1"/>
-              </a:solidFill>
-              <a:latin typeface="Calibri"/>
-              <a:ea typeface="Calibri"/>
-              <a:cs typeface="Calibri"/>
-              <a:sym typeface="Calibri"/>
-            </a:endParaRPr>
-          </a:p>
-        </p:txBody>
-      </p:sp>
-      <p:sp>
-        <p:nvSpPr>
-          <p:cNvPr id="423" name="Google Shape;423;p15"/>
-          <p:cNvSpPr/>
-          <p:nvPr/>
-        </p:nvSpPr>
-        <p:spPr>
-          <a:xfrm>
-            <a:off x="566928" y="5321808"/>
-            <a:ext cx="11057839" cy="1024128"/>
-          </a:xfrm>
-          <a:prstGeom prst="roundRect">
-            <a:avLst>
-              <a:gd fmla="val 7143" name="adj"/>
-            </a:avLst>
-          </a:prstGeom>
-          <a:solidFill>
-            <a:srgbClr val="E8F1F8"/>
-          </a:solidFill>
-          <a:ln cap="flat" cmpd="sng" w="12700">
-            <a:solidFill>
-              <a:srgbClr val="DFE5EF"/>
-            </a:solidFill>
-            <a:prstDash val="solid"/>
-            <a:round/>
-            <a:headEnd len="sm" w="sm" type="none"/>
-            <a:tailEnd len="sm" w="sm" type="none"/>
-          </a:ln>
-          <a:effectLst>
-            <a:outerShdw blurRad="127000" rotWithShape="0" algn="bl" dir="5400000" dist="25400">
-              <a:srgbClr val="8894A8">
-                <a:alpha val="18039"/>
-              </a:srgbClr>
-            </a:outerShdw>
-          </a:effectLst>
-        </p:spPr>
-        <p:txBody>
-          <a:bodyPr anchorCtr="0" anchor="ctr" bIns="91425" lIns="91425" spcFirstLastPara="1" rIns="91425" wrap="square" tIns="91425">
-            <a:noAutofit/>
-          </a:bodyPr>
-          <a:lstStyle/>
-          <a:p>
-            <a:pPr indent="0" lvl="0" marL="0" rtl="0" algn="l">
-              <a:spcBef>
-                <a:spcPts val="0"/>
-              </a:spcBef>
-              <a:spcAft>
-                <a:spcPts val="0"/>
-              </a:spcAft>
-              <a:buNone/>
-            </a:pPr>
-            <a:r>
-              <a:t/>
-            </a:r>
-            <a:endParaRPr/>
-          </a:p>
-        </p:txBody>
-      </p:sp>
-      <p:sp>
-        <p:nvSpPr>
-          <p:cNvPr id="424" name="Google Shape;424;p15"/>
-          <p:cNvSpPr/>
-          <p:nvPr/>
-        </p:nvSpPr>
-        <p:spPr>
-          <a:xfrm>
-            <a:off x="859536" y="5468112"/>
-            <a:ext cx="10472623" cy="749808"/>
-          </a:xfrm>
-          <a:prstGeom prst="rect">
-            <a:avLst/>
-          </a:prstGeom>
-          <a:noFill/>
-          <a:ln>
-            <a:noFill/>
-          </a:ln>
-        </p:spPr>
-        <p:txBody>
-          <a:bodyPr anchorCtr="0" anchor="ctr" bIns="0" lIns="0" spcFirstLastPara="1" rIns="0" wrap="square" tIns="0">
-            <a:noAutofit/>
-          </a:bodyPr>
-          <a:lstStyle/>
-          <a:p>
-            <a:pPr indent="0" lvl="0" marL="0" marR="0" rtl="0" algn="l">
-              <a:lnSpc>
-                <a:spcPct val="147826"/>
-              </a:lnSpc>
-              <a:spcBef>
-                <a:spcPts val="0"/>
-              </a:spcBef>
-              <a:spcAft>
-                <a:spcPts val="0"/>
-              </a:spcAft>
-              <a:buClr>
-                <a:srgbClr val="172033"/>
-              </a:buClr>
-              <a:buSzPts val="1150"/>
-              <a:buFont typeface="Malgun Gothic"/>
-              <a:buNone/>
-            </a:pPr>
-            <a:r>
-              <a:rPr b="0" i="0" lang="en-US" sz="1150" u="none" cap="none" strike="noStrike">
-                <a:solidFill>
-                  <a:srgbClr val="172033"/>
-                </a:solidFill>
-                <a:latin typeface="Malgun Gothic"/>
-                <a:ea typeface="Malgun Gothic"/>
-                <a:cs typeface="Malgun Gothic"/>
-                <a:sym typeface="Malgun Gothic"/>
-              </a:rPr>
-              <a:t>시연 중 "대부분의 답변이 비슷한 수준이라 단조롭다"는 피드백 반영 → 조직×중분류마다 목표 편차(±13~17%p)를 부여해 더미 데이터 재생성 · 편차는 대분류 안에서 상쇄되도록 설계해 부서 전체 평균과 HR 화면의 부서 간 비교 결과는 그대로 유지</a:t>
-            </a:r>
-            <a:endParaRPr b="0" i="0" sz="1150" u="none" cap="none" strike="noStrike">
-              <a:solidFill>
-                <a:schemeClr val="dk1"/>
-              </a:solidFill>
-              <a:latin typeface="Calibri"/>
-              <a:ea typeface="Calibri"/>
-              <a:cs typeface="Calibri"/>
-              <a:sym typeface="Calibri"/>
-            </a:endParaRPr>
-          </a:p>
-        </p:txBody>
-      </p:sp>
-    </p:spTree>
-  </p:cSld>
-  <p:clrMapOvr>
-    <a:masterClrMapping/>
-  </p:clrMapOvr>
-</p:sld>
-</file>
-
 <file path=ppt/slides/slide14.xml><?xml version="1.0" encoding="utf-8"?>
 <p:sld xmlns:a="http://schemas.openxmlformats.org/drawingml/2006/main" xmlns:r="http://schemas.openxmlformats.org/officeDocument/2006/relationships" xmlns:mc="http://schemas.openxmlformats.org/markup-compatibility/2006" xmlns:mv="urn:schemas-microsoft-com:mac:vml" xmlns:p="http://schemas.openxmlformats.org/presentationml/2006/main" xmlns:c="http://schemas.openxmlformats.org/drawingml/2006/chart" xmlns:dgm="http://schemas.openxmlformats.org/drawingml/2006/diagram" xmlns:o="urn:schemas-microsoft-com:office:office" xmlns:v="urn:schemas-microsoft-com:vml" xmlns:pvml="urn:schemas-microsoft-com:office:powerpoint" xmlns:com="http://schemas.openxmlformats.org/drawingml/2006/compatibility" xmlns:p14="http://schemas.microsoft.com/office/powerpoint/2010/main" xmlns:p15="http://schemas.microsoft.com/office/powerpoint/2012/main" xmlns:ahyp="http://schemas.microsoft.com/office/drawing/2018/hyperlinkcolor">
   <p:cSld>
@@ -9039,7 +7007,7 @@
                 <a:cs typeface="Malgun Gothic"/>
                 <a:sym typeface="Malgun Gothic"/>
               </a:rPr>
-              <a:t>10</a:t>
+              <a:t>9</a:t>
             </a:r>
             <a:endParaRPr b="0" i="0" sz="1000" u="none" cap="none" strike="noStrike">
               <a:solidFill>
@@ -11070,7 +9038,7 @@
                 <a:cs typeface="Malgun Gothic"/>
                 <a:sym typeface="Malgun Gothic"/>
               </a:rPr>
-              <a:t>11</a:t>
+              <a:t>10</a:t>
             </a:r>
             <a:endParaRPr b="0" i="0" sz="1000" u="none" cap="none" strike="noStrike">
               <a:solidFill>
@@ -12990,7 +10958,7 @@
         <p:spPr>
           <a:xfrm>
             <a:off x="566925" y="2286000"/>
-            <a:ext cx="9805800" cy="2299800"/>
+            <a:ext cx="11055096" cy="2299800"/>
           </a:xfrm>
           <a:prstGeom prst="rect">
             <a:avLst/>
@@ -13024,7 +10992,7 @@
               <a:buNone/>
             </a:pPr>
             <a:r>
-              <a:rPr b="1" i="0" lang="en-US" sz="3800" u="none" cap="none" strike="noStrike">
+              <a:rPr b="1" i="0" lang="en-US" sz="3400" u="none" cap="none" strike="noStrike">
                 <a:solidFill>
                   <a:srgbClr val="FFFFFF"/>
                 </a:solidFill>
@@ -13033,7 +11001,7 @@
                 <a:cs typeface="Malgun Gothic"/>
                 <a:sym typeface="Malgun Gothic"/>
               </a:rPr>
-              <a:t>"부서장에게 우리 조직의</a:t>
+              <a:t>"우리 조직의 건강도 진단 결과를 구체적으로 전달하고,</a:t>
             </a:r>
             <a:endParaRPr b="0" i="0" sz="3800" u="none" cap="none" strike="noStrike">
               <a:solidFill>
@@ -13064,7 +11032,7 @@
               <a:buNone/>
             </a:pPr>
             <a:r>
-              <a:rPr b="1" lang="en-US" sz="3800">
+              <a:rPr b="1" lang="en-US" sz="3400">
                 <a:solidFill>
                   <a:srgbClr val="FFFFFF"/>
                 </a:solidFill>
@@ -13073,7 +11041,7 @@
                 <a:cs typeface="Malgun Gothic"/>
                 <a:sym typeface="Malgun Gothic"/>
               </a:rPr>
-              <a:t>  건강도를 최대한 구체적으로 전달한다."</a:t>
+              <a:t>  조직 운영을 위한 가이드를 제공한다"</a:t>
             </a:r>
             <a:endParaRPr b="1" sz="3800">
               <a:solidFill>

--- a/Org_health_diag/docs/2026_조직건강도_AI_Agent_수행결과.pptx
+++ b/Org_health_diag/docs/2026_조직건강도_AI_Agent_수행결과.pptx
@@ -12,7 +12,6 @@
     <p:sldId id="257" r:id="rId6"/>
     <p:sldId id="258" r:id="rId7"/>
     <p:sldId id="259" r:id="rId8"/>
-    <p:sldId id="260" r:id="rId9"/>
     <p:sldId id="261" r:id="rId10"/>
     <p:sldId id="262" r:id="rId11"/>
     <p:sldId id="263" r:id="rId12"/>
@@ -2645,164 +2644,6 @@
       <p:sp>
         <p:nvSpPr>
           <p:cNvPr id="92" name="Google Shape;92;p4:notes"/>
-          <p:cNvSpPr txBox="1"/>
-          <p:nvPr>
-            <p:ph idx="12" type="sldNum"/>
-          </p:nvPr>
-        </p:nvSpPr>
-        <p:spPr>
-          <a:xfrm>
-            <a:off x="3884613" y="8685213"/>
-            <a:ext cx="2971800" cy="458787"/>
-          </a:xfrm>
-          <a:prstGeom prst="rect">
-            <a:avLst/>
-          </a:prstGeom>
-          <a:noFill/>
-          <a:ln>
-            <a:noFill/>
-          </a:ln>
-        </p:spPr>
-        <p:txBody>
-          <a:bodyPr anchorCtr="0" anchor="b" bIns="45700" lIns="91425" spcFirstLastPara="1" rIns="91425" wrap="square" tIns="45700">
-            <a:noAutofit/>
-          </a:bodyPr>
-          <a:lstStyle/>
-          <a:p>
-            <a:pPr indent="0" lvl="0" marL="0" rtl="0" algn="r">
-              <a:spcBef>
-                <a:spcPts val="0"/>
-              </a:spcBef>
-              <a:spcAft>
-                <a:spcPts val="0"/>
-              </a:spcAft>
-              <a:buNone/>
-            </a:pPr>
-            <a:fld id="{00000000-1234-1234-1234-123412341234}" type="slidenum">
-              <a:rPr lang="en-US"/>
-              <a:t>‹#›</a:t>
-            </a:fld>
-            <a:endParaRPr/>
-          </a:p>
-        </p:txBody>
-      </p:sp>
-    </p:spTree>
-  </p:cSld>
-  <p:clrMapOvr>
-    <a:masterClrMapping/>
-  </p:clrMapOvr>
-</p:notes>
-</file>
-
-<file path=ppt/notesSlides/notesSlide5.xml><?xml version="1.0" encoding="utf-8"?>
-<p:notes xmlns:a="http://schemas.openxmlformats.org/drawingml/2006/main" xmlns:r="http://schemas.openxmlformats.org/officeDocument/2006/relationships" xmlns:mc="http://schemas.openxmlformats.org/markup-compatibility/2006" xmlns:mv="urn:schemas-microsoft-com:mac:vml" xmlns:p="http://schemas.openxmlformats.org/presentationml/2006/main" xmlns:c="http://schemas.openxmlformats.org/drawingml/2006/chart" xmlns:dgm="http://schemas.openxmlformats.org/drawingml/2006/diagram" xmlns:o="urn:schemas-microsoft-com:office:office" xmlns:v="urn:schemas-microsoft-com:vml" xmlns:pvml="urn:schemas-microsoft-com:office:powerpoint" xmlns:com="http://schemas.openxmlformats.org/drawingml/2006/compatibility" xmlns:p14="http://schemas.microsoft.com/office/powerpoint/2010/main" xmlns:p15="http://schemas.microsoft.com/office/powerpoint/2012/main" xmlns:ahyp="http://schemas.microsoft.com/office/drawing/2018/hyperlinkcolor" showMasterPhAnim="0" showMasterSp="0">
-  <p:cSld>
-    <p:spTree>
-      <p:nvGrpSpPr>
-        <p:cNvPr id="117" name="Shape 117"/>
-        <p:cNvGrpSpPr/>
-        <p:nvPr/>
-      </p:nvGrpSpPr>
-      <p:grpSpPr>
-        <a:xfrm>
-          <a:off x="0" y="0"/>
-          <a:ext cx="0" cy="0"/>
-          <a:chOff x="0" y="0"/>
-          <a:chExt cx="0" cy="0"/>
-        </a:xfrm>
-      </p:grpSpPr>
-      <p:sp>
-        <p:nvSpPr>
-          <p:cNvPr id="118" name="Google Shape;118;p5:notes"/>
-          <p:cNvSpPr/>
-          <p:nvPr>
-            <p:ph idx="2" type="sldImg"/>
-          </p:nvPr>
-        </p:nvSpPr>
-        <p:spPr>
-          <a:xfrm>
-            <a:off x="685800" y="1143000"/>
-            <a:ext cx="5486400" cy="3086100"/>
-          </a:xfrm>
-          <a:custGeom>
-            <a:rect b="b" l="l" r="r" t="t"/>
-            <a:pathLst>
-              <a:path extrusionOk="0" h="120000" w="120000">
-                <a:moveTo>
-                  <a:pt x="0" y="0"/>
-                </a:moveTo>
-                <a:lnTo>
-                  <a:pt x="120000" y="0"/>
-                </a:lnTo>
-                <a:lnTo>
-                  <a:pt x="120000" y="120000"/>
-                </a:lnTo>
-                <a:lnTo>
-                  <a:pt x="0" y="120000"/>
-                </a:lnTo>
-                <a:close/>
-              </a:path>
-            </a:pathLst>
-          </a:custGeom>
-          <a:noFill/>
-          <a:ln cap="flat" cmpd="sng" w="12700">
-            <a:solidFill>
-              <a:srgbClr val="000000"/>
-            </a:solidFill>
-            <a:prstDash val="solid"/>
-            <a:round/>
-            <a:headEnd len="sm" w="sm" type="none"/>
-            <a:tailEnd len="sm" w="sm" type="none"/>
-          </a:ln>
-        </p:spPr>
-      </p:sp>
-      <p:sp>
-        <p:nvSpPr>
-          <p:cNvPr id="119" name="Google Shape;119;p5:notes"/>
-          <p:cNvSpPr txBox="1"/>
-          <p:nvPr>
-            <p:ph idx="1" type="body"/>
-          </p:nvPr>
-        </p:nvSpPr>
-        <p:spPr>
-          <a:xfrm>
-            <a:off x="685800" y="4400550"/>
-            <a:ext cx="5486400" cy="3600450"/>
-          </a:xfrm>
-          <a:prstGeom prst="rect">
-            <a:avLst/>
-          </a:prstGeom>
-          <a:noFill/>
-          <a:ln>
-            <a:noFill/>
-          </a:ln>
-        </p:spPr>
-        <p:txBody>
-          <a:bodyPr anchorCtr="0" anchor="t" bIns="45700" lIns="91425" spcFirstLastPara="1" rIns="91425" wrap="square" tIns="45700">
-            <a:noAutofit/>
-          </a:bodyPr>
-          <a:lstStyle/>
-          <a:p>
-            <a:pPr indent="0" lvl="0" marL="0" rtl="0" algn="l">
-              <a:spcBef>
-                <a:spcPts val="0"/>
-              </a:spcBef>
-              <a:spcAft>
-                <a:spcPts val="0"/>
-              </a:spcAft>
-              <a:buNone/>
-            </a:pPr>
-            <a:r>
-              <a:rPr lang="en-US"/>
-              <a:t>3계층 구조. 해석 사전을 공유해 두 프론트엔드가 같은 문장을 내보냅니다.</a:t>
-            </a:r>
-            <a:endParaRPr/>
-          </a:p>
-        </p:txBody>
-      </p:sp>
-      <p:sp>
-        <p:nvSpPr>
-          <p:cNvPr id="120" name="Google Shape;120;p5:notes"/>
           <p:cNvSpPr txBox="1"/>
           <p:nvPr>
             <p:ph idx="12" type="sldNum"/>
@@ -4500,7 +4341,7 @@
                 <a:cs typeface="Malgun Gothic"/>
                 <a:sym typeface="Malgun Gothic"/>
               </a:rPr>
-              <a:t>8</a:t>
+              <a:t>7</a:t>
             </a:r>
             <a:endParaRPr b="0" i="0" sz="1000" u="none" cap="none" strike="noStrike">
               <a:solidFill>
@@ -4688,8 +4529,8 @@
         </p:nvSpPr>
         <p:spPr>
           <a:xfrm>
-            <a:off x="822960" y="2103120"/>
-            <a:ext cx="2954426" cy="640080"/>
+            <a:off x="822960" y="2139696"/>
+            <a:ext cx="2954426" cy="768096"/>
           </a:xfrm>
           <a:prstGeom prst="rect">
             <a:avLst/>
@@ -4723,7 +4564,7 @@
               <a:buNone/>
             </a:pPr>
             <a:r>
-              <a:rPr b="1" i="0" lang="en-US" sz="1350" u="none" cap="none" strike="noStrike">
+              <a:rPr b="1" i="0" lang="en-US" sz="1500" u="none" cap="none" strike="noStrike">
                 <a:solidFill>
                   <a:srgbClr val="002D5A"/>
                 </a:solidFill>
@@ -4754,8 +4595,8 @@
         </p:nvSpPr>
         <p:spPr>
           <a:xfrm>
-            <a:off x="822960" y="2779776"/>
-            <a:ext cx="2954426" cy="219456"/>
+            <a:off x="822960" y="3017520"/>
+            <a:ext cx="2954426" cy="256032"/>
           </a:xfrm>
           <a:prstGeom prst="rect">
             <a:avLst/>
@@ -4786,7 +4627,7 @@
               <a:buNone/>
             </a:pPr>
             <a:r>
-              <a:rPr b="1" i="0" lang="en-US" sz="1000" u="none" cap="none" strike="noStrike">
+              <a:rPr b="1" i="0" lang="en-US" sz="1100" u="none" cap="none" strike="noStrike">
                 <a:solidFill>
                   <a:srgbClr val="65708A"/>
                 </a:solidFill>
@@ -4817,8 +4658,8 @@
         </p:nvSpPr>
         <p:spPr>
           <a:xfrm>
-            <a:off x="822960" y="3017520"/>
-            <a:ext cx="2954426" cy="1225296"/>
+            <a:off x="822960" y="3310128"/>
+            <a:ext cx="2954426" cy="2084831"/>
           </a:xfrm>
           <a:prstGeom prst="rect">
             <a:avLst/>
@@ -4852,7 +4693,7 @@
               <a:buChar char="•"/>
             </a:pPr>
             <a:r>
-              <a:rPr b="0" i="0" lang="en-US" sz="1100" u="none" cap="none" strike="noStrike">
+              <a:rPr b="0" i="0" lang="en-US" sz="1400" u="none" cap="none" strike="noStrike">
                 <a:solidFill>
                   <a:srgbClr val="172033"/>
                 </a:solidFill>
@@ -4879,7 +4720,7 @@
                 <a:spcPct val="100000"/>
               </a:lnSpc>
               <a:spcBef>
-                <a:spcPts val="200"/>
+                <a:spcPts val="600"/>
               </a:spcBef>
               <a:spcAft>
                 <a:spcPts val="0"/>
@@ -4892,7 +4733,7 @@
               <a:buChar char="•"/>
             </a:pPr>
             <a:r>
-              <a:rPr b="0" i="0" lang="en-US" sz="1100" u="none" cap="none" strike="noStrike">
+              <a:rPr b="0" i="0" lang="en-US" sz="1400" u="none" cap="none" strike="noStrike">
                 <a:solidFill>
                   <a:srgbClr val="172033"/>
                 </a:solidFill>
@@ -4919,7 +4760,7 @@
                 <a:spcPct val="100000"/>
               </a:lnSpc>
               <a:spcBef>
-                <a:spcPts val="200"/>
+                <a:spcPts val="600"/>
               </a:spcBef>
               <a:spcAft>
                 <a:spcPts val="0"/>
@@ -4932,7 +4773,7 @@
               <a:buChar char="•"/>
             </a:pPr>
             <a:r>
-              <a:rPr b="0" i="0" lang="en-US" sz="1100" u="none" cap="none" strike="noStrike">
+              <a:rPr b="0" i="0" lang="en-US" sz="1400" u="none" cap="none" strike="noStrike">
                 <a:solidFill>
                   <a:srgbClr val="172033"/>
                 </a:solidFill>
@@ -4959,7 +4800,7 @@
                 <a:spcPct val="100000"/>
               </a:lnSpc>
               <a:spcBef>
-                <a:spcPts val="200"/>
+                <a:spcPts val="600"/>
               </a:spcBef>
               <a:spcAft>
                 <a:spcPts val="0"/>
@@ -4972,7 +4813,7 @@
               <a:buChar char="•"/>
             </a:pPr>
             <a:r>
-              <a:rPr b="0" i="0" lang="en-US" sz="1100" u="none" cap="none" strike="noStrike">
+              <a:rPr b="0" i="0" lang="en-US" sz="1400" u="none" cap="none" strike="noStrike">
                 <a:solidFill>
                   <a:srgbClr val="172033"/>
                 </a:solidFill>
@@ -4999,7 +4840,7 @@
                 <a:spcPct val="100000"/>
               </a:lnSpc>
               <a:spcBef>
-                <a:spcPts val="200"/>
+                <a:spcPts val="600"/>
               </a:spcBef>
               <a:spcAft>
                 <a:spcPts val="0"/>
@@ -5012,7 +4853,7 @@
               <a:buChar char="•"/>
             </a:pPr>
             <a:r>
-              <a:rPr b="0" i="0" lang="en-US" sz="1100" u="none" cap="none" strike="noStrike">
+              <a:rPr b="0" i="0" lang="en-US" sz="1400" u="none" cap="none" strike="noStrike">
                 <a:solidFill>
                   <a:srgbClr val="172033"/>
                 </a:solidFill>
@@ -5039,7 +4880,7 @@
                 <a:spcPct val="100000"/>
               </a:lnSpc>
               <a:spcBef>
-                <a:spcPts val="200"/>
+                <a:spcPts val="600"/>
               </a:spcBef>
               <a:spcAft>
                 <a:spcPts val="0"/>
@@ -5052,7 +4893,7 @@
               <a:buChar char="•"/>
             </a:pPr>
             <a:r>
-              <a:rPr b="0" i="0" lang="en-US" sz="1100" u="none" cap="none" strike="noStrike">
+              <a:rPr b="0" i="0" lang="en-US" sz="1400" u="none" cap="none" strike="noStrike">
                 <a:solidFill>
                   <a:srgbClr val="172033"/>
                 </a:solidFill>
@@ -5064,220 +4905,6 @@
               <a:t>로그인·챗봇·다운로드 전량 로깅</a:t>
             </a:r>
             <a:endParaRPr b="0" i="0" sz="1100" u="none" cap="none" strike="noStrike">
-              <a:solidFill>
-                <a:schemeClr val="dk1"/>
-              </a:solidFill>
-              <a:latin typeface="Calibri"/>
-              <a:ea typeface="Calibri"/>
-              <a:cs typeface="Calibri"/>
-              <a:sym typeface="Calibri"/>
-            </a:endParaRPr>
-          </a:p>
-        </p:txBody>
-      </p:sp>
-      <p:sp>
-        <p:nvSpPr>
-          <p:cNvPr id="336" name="Google Shape;336;p13"/>
-          <p:cNvSpPr/>
-          <p:nvPr/>
-        </p:nvSpPr>
-        <p:spPr>
-          <a:xfrm>
-            <a:off x="822960" y="4315968"/>
-            <a:ext cx="2954426" cy="1188720"/>
-          </a:xfrm>
-          <a:prstGeom prst="roundRect">
-            <a:avLst>
-              <a:gd fmla="val 4667" name="adj"/>
-            </a:avLst>
-          </a:prstGeom>
-          <a:solidFill>
-            <a:srgbClr val="E8F1F8"/>
-          </a:solidFill>
-          <a:ln>
-            <a:noFill/>
-          </a:ln>
-        </p:spPr>
-        <p:txBody>
-          <a:bodyPr anchorCtr="0" anchor="ctr" bIns="91425" lIns="91425" spcFirstLastPara="1" rIns="91425" wrap="square" tIns="91425">
-            <a:noAutofit/>
-          </a:bodyPr>
-          <a:lstStyle/>
-          <a:p>
-            <a:pPr indent="0" lvl="0" marL="0" rtl="0" algn="l">
-              <a:spcBef>
-                <a:spcPts val="0"/>
-              </a:spcBef>
-              <a:spcAft>
-                <a:spcPts val="0"/>
-              </a:spcAft>
-              <a:buNone/>
-            </a:pPr>
-            <a:r>
-              <a:t/>
-            </a:r>
-            <a:endParaRPr/>
-          </a:p>
-        </p:txBody>
-      </p:sp>
-      <p:sp>
-        <p:nvSpPr>
-          <p:cNvPr id="337" name="Google Shape;337;p13"/>
-          <p:cNvSpPr/>
-          <p:nvPr/>
-        </p:nvSpPr>
-        <p:spPr>
-          <a:xfrm>
-            <a:off x="987552" y="4425696"/>
-            <a:ext cx="2625242" cy="219456"/>
-          </a:xfrm>
-          <a:prstGeom prst="rect">
-            <a:avLst/>
-          </a:prstGeom>
-          <a:noFill/>
-          <a:ln>
-            <a:noFill/>
-          </a:ln>
-        </p:spPr>
-        <p:txBody>
-          <a:bodyPr anchorCtr="0" anchor="ctr" bIns="0" lIns="0" spcFirstLastPara="1" rIns="0" wrap="square" tIns="0">
-            <a:noAutofit/>
-          </a:bodyPr>
-          <a:lstStyle/>
-          <a:p>
-            <a:pPr indent="0" lvl="0" marL="0" marR="0" rtl="0" algn="l">
-              <a:spcBef>
-                <a:spcPts val="0"/>
-              </a:spcBef>
-              <a:spcAft>
-                <a:spcPts val="0"/>
-              </a:spcAft>
-              <a:buClr>
-                <a:srgbClr val="004381"/>
-              </a:buClr>
-              <a:buSzPts val="1000"/>
-              <a:buFont typeface="Malgun Gothic"/>
-              <a:buNone/>
-            </a:pPr>
-            <a:r>
-              <a:rPr b="1" i="0" lang="en-US" sz="1000" u="none" cap="none" strike="noStrike">
-                <a:solidFill>
-                  <a:srgbClr val="004381"/>
-                </a:solidFill>
-                <a:latin typeface="Malgun Gothic"/>
-                <a:ea typeface="Malgun Gothic"/>
-                <a:cs typeface="Malgun Gothic"/>
-                <a:sym typeface="Malgun Gothic"/>
-              </a:rPr>
-              <a:t>근거 위치</a:t>
-            </a:r>
-            <a:endParaRPr b="0" i="0" sz="1000" u="none" cap="none" strike="noStrike">
-              <a:solidFill>
-                <a:schemeClr val="dk1"/>
-              </a:solidFill>
-              <a:latin typeface="Calibri"/>
-              <a:ea typeface="Calibri"/>
-              <a:cs typeface="Calibri"/>
-              <a:sym typeface="Calibri"/>
-            </a:endParaRPr>
-          </a:p>
-        </p:txBody>
-      </p:sp>
-      <p:sp>
-        <p:nvSpPr>
-          <p:cNvPr id="338" name="Google Shape;338;p13"/>
-          <p:cNvSpPr/>
-          <p:nvPr/>
-        </p:nvSpPr>
-        <p:spPr>
-          <a:xfrm>
-            <a:off x="987552" y="4681728"/>
-            <a:ext cx="2625242" cy="731520"/>
-          </a:xfrm>
-          <a:prstGeom prst="rect">
-            <a:avLst/>
-          </a:prstGeom>
-          <a:noFill/>
-          <a:ln>
-            <a:noFill/>
-          </a:ln>
-        </p:spPr>
-        <p:txBody>
-          <a:bodyPr anchorCtr="0" anchor="ctr" bIns="0" lIns="0" spcFirstLastPara="1" rIns="0" wrap="square" tIns="0">
-            <a:noAutofit/>
-          </a:bodyPr>
-          <a:lstStyle/>
-          <a:p>
-            <a:pPr indent="-171450" lvl="0" marL="171450" marR="0" rtl="0" algn="l">
-              <a:lnSpc>
-                <a:spcPct val="100000"/>
-              </a:lnSpc>
-              <a:spcBef>
-                <a:spcPts val="0"/>
-              </a:spcBef>
-              <a:spcAft>
-                <a:spcPts val="0"/>
-              </a:spcAft>
-              <a:buClr>
-                <a:srgbClr val="172033"/>
-              </a:buClr>
-              <a:buSzPts val="1050"/>
-              <a:buFont typeface="Malgun Gothic"/>
-              <a:buChar char="•"/>
-            </a:pPr>
-            <a:r>
-              <a:rPr b="0" i="0" lang="en-US" sz="1050" u="none" cap="none" strike="noStrike">
-                <a:solidFill>
-                  <a:srgbClr val="172033"/>
-                </a:solidFill>
-                <a:latin typeface="Malgun Gothic"/>
-                <a:ea typeface="Malgun Gothic"/>
-                <a:cs typeface="Malgun Gothic"/>
-                <a:sym typeface="Malgun Gothic"/>
-              </a:rPr>
-              <a:t>설계 단계 스키마 미포함 · is_suppressed() 게이트</a:t>
-            </a:r>
-            <a:endParaRPr b="0" i="0" sz="1050" u="none" cap="none" strike="noStrike">
-              <a:solidFill>
-                <a:schemeClr val="dk1"/>
-              </a:solidFill>
-              <a:latin typeface="Calibri"/>
-              <a:ea typeface="Calibri"/>
-              <a:cs typeface="Calibri"/>
-              <a:sym typeface="Calibri"/>
-            </a:endParaRPr>
-          </a:p>
-          <a:p>
-            <a:pPr indent="-171450" lvl="0" marL="171450" marR="0" rtl="0" algn="l">
-              <a:lnSpc>
-                <a:spcPct val="100000"/>
-              </a:lnSpc>
-              <a:spcBef>
-                <a:spcPts val="200"/>
-              </a:spcBef>
-              <a:spcAft>
-                <a:spcPts val="0"/>
-              </a:spcAft>
-              <a:buClr>
-                <a:srgbClr val="172033"/>
-              </a:buClr>
-              <a:buSzPts val="1050"/>
-              <a:buFont typeface="Malgun Gothic"/>
-              <a:buChar char="•"/>
-            </a:pPr>
-            <a:r>
-              <a:rPr b="0" i="0" lang="en-US" sz="1050" u="none" cap="none" strike="noStrike">
-                <a:solidFill>
-                  <a:srgbClr val="172033"/>
-                </a:solidFill>
-                <a:latin typeface="Malgun Gothic"/>
-                <a:ea typeface="Malgun Gothic"/>
-                <a:cs typeface="Malgun Gothic"/>
-                <a:sym typeface="Malgun Gothic"/>
-              </a:rPr>
-              <a:t>catalog.MID_INTERPRETATION · access_logs 테이블</a:t>
-            </a:r>
-            <a:endParaRPr b="0" i="0" sz="1050" u="none" cap="none" strike="noStrike">
               <a:solidFill>
                 <a:schemeClr val="dk1"/>
               </a:solidFill>
@@ -5463,8 +5090,8 @@
         </p:nvSpPr>
         <p:spPr>
           <a:xfrm>
-            <a:off x="4618634" y="2103120"/>
-            <a:ext cx="2954426" cy="640080"/>
+            <a:off x="4618634" y="2139696"/>
+            <a:ext cx="2954426" cy="768096"/>
           </a:xfrm>
           <a:prstGeom prst="rect">
             <a:avLst/>
@@ -5498,7 +5125,7 @@
               <a:buNone/>
             </a:pPr>
             <a:r>
-              <a:rPr b="1" i="0" lang="en-US" sz="1350" u="none" cap="none" strike="noStrike">
+              <a:rPr b="1" i="0" lang="en-US" sz="1500" u="none" cap="none" strike="noStrike">
                 <a:solidFill>
                   <a:srgbClr val="002D5A"/>
                 </a:solidFill>
@@ -5529,8 +5156,8 @@
         </p:nvSpPr>
         <p:spPr>
           <a:xfrm>
-            <a:off x="4618634" y="2779776"/>
-            <a:ext cx="2954426" cy="219456"/>
+            <a:off x="4618634" y="3017520"/>
+            <a:ext cx="2954426" cy="256032"/>
           </a:xfrm>
           <a:prstGeom prst="rect">
             <a:avLst/>
@@ -5561,7 +5188,7 @@
               <a:buNone/>
             </a:pPr>
             <a:r>
-              <a:rPr b="1" i="0" lang="en-US" sz="1000" u="none" cap="none" strike="noStrike">
+              <a:rPr b="1" i="0" lang="en-US" sz="1100" u="none" cap="none" strike="noStrike">
                 <a:solidFill>
                   <a:srgbClr val="65708A"/>
                 </a:solidFill>
@@ -5592,8 +5219,8 @@
         </p:nvSpPr>
         <p:spPr>
           <a:xfrm>
-            <a:off x="4618634" y="3017520"/>
-            <a:ext cx="2954426" cy="1225296"/>
+            <a:off x="4618634" y="3310128"/>
+            <a:ext cx="2954426" cy="2084831"/>
           </a:xfrm>
           <a:prstGeom prst="rect">
             <a:avLst/>
@@ -5627,7 +5254,7 @@
               <a:buChar char="•"/>
             </a:pPr>
             <a:r>
-              <a:rPr b="0" i="0" lang="en-US" sz="1100" u="none" cap="none" strike="noStrike">
+              <a:rPr b="0" i="0" lang="en-US" sz="1400" u="none" cap="none" strike="noStrike">
                 <a:solidFill>
                   <a:srgbClr val="172033"/>
                 </a:solidFill>
@@ -5654,7 +5281,7 @@
                 <a:spcPct val="100000"/>
               </a:lnSpc>
               <a:spcBef>
-                <a:spcPts val="200"/>
+                <a:spcPts val="600"/>
               </a:spcBef>
               <a:spcAft>
                 <a:spcPts val="0"/>
@@ -5667,7 +5294,7 @@
               <a:buChar char="•"/>
             </a:pPr>
             <a:r>
-              <a:rPr b="0" i="0" lang="en-US" sz="1100" u="none" cap="none" strike="noStrike">
+              <a:rPr b="0" i="0" lang="en-US" sz="1400" u="none" cap="none" strike="noStrike">
                 <a:solidFill>
                   <a:srgbClr val="172033"/>
                 </a:solidFill>
@@ -5694,7 +5321,7 @@
                 <a:spcPct val="100000"/>
               </a:lnSpc>
               <a:spcBef>
-                <a:spcPts val="200"/>
+                <a:spcPts val="600"/>
               </a:spcBef>
               <a:spcAft>
                 <a:spcPts val="0"/>
@@ -5707,7 +5334,7 @@
               <a:buChar char="•"/>
             </a:pPr>
             <a:r>
-              <a:rPr b="0" i="0" lang="en-US" sz="1100" u="none" cap="none" strike="noStrike">
+              <a:rPr b="0" i="0" lang="en-US" sz="1400" u="none" cap="none" strike="noStrike">
                 <a:solidFill>
                   <a:srgbClr val="172033"/>
                 </a:solidFill>
@@ -5734,7 +5361,7 @@
                 <a:spcPct val="100000"/>
               </a:lnSpc>
               <a:spcBef>
-                <a:spcPts val="200"/>
+                <a:spcPts val="600"/>
               </a:spcBef>
               <a:spcAft>
                 <a:spcPts val="0"/>
@@ -5747,7 +5374,7 @@
               <a:buChar char="•"/>
             </a:pPr>
             <a:r>
-              <a:rPr b="0" i="0" lang="en-US" sz="1100" u="none" cap="none" strike="noStrike">
+              <a:rPr b="0" i="0" lang="en-US" sz="1400" u="none" cap="none" strike="noStrike">
                 <a:solidFill>
                   <a:srgbClr val="172033"/>
                 </a:solidFill>
@@ -5774,7 +5401,7 @@
                 <a:spcPct val="100000"/>
               </a:lnSpc>
               <a:spcBef>
-                <a:spcPts val="200"/>
+                <a:spcPts val="600"/>
               </a:spcBef>
               <a:spcAft>
                 <a:spcPts val="0"/>
@@ -5787,7 +5414,7 @@
               <a:buChar char="•"/>
             </a:pPr>
             <a:r>
-              <a:rPr b="0" i="0" lang="en-US" sz="1100" u="none" cap="none" strike="noStrike">
+              <a:rPr b="0" i="0" lang="en-US" sz="1400" u="none" cap="none" strike="noStrike">
                 <a:solidFill>
                   <a:srgbClr val="172033"/>
                 </a:solidFill>
@@ -5799,220 +5426,6 @@
               <a:t>→ 비교 대상이 부서 내부에 한정</a:t>
             </a:r>
             <a:endParaRPr b="0" i="0" sz="1100" u="none" cap="none" strike="noStrike">
-              <a:solidFill>
-                <a:schemeClr val="dk1"/>
-              </a:solidFill>
-              <a:latin typeface="Calibri"/>
-              <a:ea typeface="Calibri"/>
-              <a:cs typeface="Calibri"/>
-              <a:sym typeface="Calibri"/>
-            </a:endParaRPr>
-          </a:p>
-        </p:txBody>
-      </p:sp>
-      <p:sp>
-        <p:nvSpPr>
-          <p:cNvPr id="345" name="Google Shape;345;p13"/>
-          <p:cNvSpPr/>
-          <p:nvPr/>
-        </p:nvSpPr>
-        <p:spPr>
-          <a:xfrm>
-            <a:off x="4618634" y="4315968"/>
-            <a:ext cx="2954426" cy="1188720"/>
-          </a:xfrm>
-          <a:prstGeom prst="roundRect">
-            <a:avLst>
-              <a:gd fmla="val 4667" name="adj"/>
-            </a:avLst>
-          </a:prstGeom>
-          <a:solidFill>
-            <a:srgbClr val="E8F1F8"/>
-          </a:solidFill>
-          <a:ln>
-            <a:noFill/>
-          </a:ln>
-        </p:spPr>
-        <p:txBody>
-          <a:bodyPr anchorCtr="0" anchor="ctr" bIns="91425" lIns="91425" spcFirstLastPara="1" rIns="91425" wrap="square" tIns="91425">
-            <a:noAutofit/>
-          </a:bodyPr>
-          <a:lstStyle/>
-          <a:p>
-            <a:pPr indent="0" lvl="0" marL="0" rtl="0" algn="l">
-              <a:spcBef>
-                <a:spcPts val="0"/>
-              </a:spcBef>
-              <a:spcAft>
-                <a:spcPts val="0"/>
-              </a:spcAft>
-              <a:buNone/>
-            </a:pPr>
-            <a:r>
-              <a:t/>
-            </a:r>
-            <a:endParaRPr/>
-          </a:p>
-        </p:txBody>
-      </p:sp>
-      <p:sp>
-        <p:nvSpPr>
-          <p:cNvPr id="346" name="Google Shape;346;p13"/>
-          <p:cNvSpPr/>
-          <p:nvPr/>
-        </p:nvSpPr>
-        <p:spPr>
-          <a:xfrm>
-            <a:off x="4783226" y="4425696"/>
-            <a:ext cx="2625242" cy="219456"/>
-          </a:xfrm>
-          <a:prstGeom prst="rect">
-            <a:avLst/>
-          </a:prstGeom>
-          <a:noFill/>
-          <a:ln>
-            <a:noFill/>
-          </a:ln>
-        </p:spPr>
-        <p:txBody>
-          <a:bodyPr anchorCtr="0" anchor="ctr" bIns="0" lIns="0" spcFirstLastPara="1" rIns="0" wrap="square" tIns="0">
-            <a:noAutofit/>
-          </a:bodyPr>
-          <a:lstStyle/>
-          <a:p>
-            <a:pPr indent="0" lvl="0" marL="0" marR="0" rtl="0" algn="l">
-              <a:spcBef>
-                <a:spcPts val="0"/>
-              </a:spcBef>
-              <a:spcAft>
-                <a:spcPts val="0"/>
-              </a:spcAft>
-              <a:buClr>
-                <a:srgbClr val="004381"/>
-              </a:buClr>
-              <a:buSzPts val="1000"/>
-              <a:buFont typeface="Malgun Gothic"/>
-              <a:buNone/>
-            </a:pPr>
-            <a:r>
-              <a:rPr b="1" i="0" lang="en-US" sz="1000" u="none" cap="none" strike="noStrike">
-                <a:solidFill>
-                  <a:srgbClr val="004381"/>
-                </a:solidFill>
-                <a:latin typeface="Malgun Gothic"/>
-                <a:ea typeface="Malgun Gothic"/>
-                <a:cs typeface="Malgun Gothic"/>
-                <a:sym typeface="Malgun Gothic"/>
-              </a:rPr>
-              <a:t>비교 대상 3단 폴백</a:t>
-            </a:r>
-            <a:endParaRPr b="0" i="0" sz="1000" u="none" cap="none" strike="noStrike">
-              <a:solidFill>
-                <a:schemeClr val="dk1"/>
-              </a:solidFill>
-              <a:latin typeface="Calibri"/>
-              <a:ea typeface="Calibri"/>
-              <a:cs typeface="Calibri"/>
-              <a:sym typeface="Calibri"/>
-            </a:endParaRPr>
-          </a:p>
-        </p:txBody>
-      </p:sp>
-      <p:sp>
-        <p:nvSpPr>
-          <p:cNvPr id="347" name="Google Shape;347;p13"/>
-          <p:cNvSpPr/>
-          <p:nvPr/>
-        </p:nvSpPr>
-        <p:spPr>
-          <a:xfrm>
-            <a:off x="4783226" y="4681728"/>
-            <a:ext cx="2625242" cy="731520"/>
-          </a:xfrm>
-          <a:prstGeom prst="rect">
-            <a:avLst/>
-          </a:prstGeom>
-          <a:noFill/>
-          <a:ln>
-            <a:noFill/>
-          </a:ln>
-        </p:spPr>
-        <p:txBody>
-          <a:bodyPr anchorCtr="0" anchor="ctr" bIns="0" lIns="0" spcFirstLastPara="1" rIns="0" wrap="square" tIns="0">
-            <a:noAutofit/>
-          </a:bodyPr>
-          <a:lstStyle/>
-          <a:p>
-            <a:pPr indent="-171450" lvl="0" marL="171450" marR="0" rtl="0" algn="l">
-              <a:lnSpc>
-                <a:spcPct val="100000"/>
-              </a:lnSpc>
-              <a:spcBef>
-                <a:spcPts val="0"/>
-              </a:spcBef>
-              <a:spcAft>
-                <a:spcPts val="0"/>
-              </a:spcAft>
-              <a:buClr>
-                <a:srgbClr val="172033"/>
-              </a:buClr>
-              <a:buSzPts val="1050"/>
-              <a:buFont typeface="Malgun Gothic"/>
-              <a:buChar char="•"/>
-            </a:pPr>
-            <a:r>
-              <a:rPr b="0" i="0" lang="en-US" sz="1050" u="none" cap="none" strike="noStrike">
-                <a:solidFill>
-                  <a:srgbClr val="172033"/>
-                </a:solidFill>
-                <a:latin typeface="Malgun Gothic"/>
-                <a:ea typeface="Malgun Gothic"/>
-                <a:cs typeface="Malgun Gothic"/>
-                <a:sym typeface="Malgun Gothic"/>
-              </a:rPr>
-              <a:t>1순위 같은 중분류 내 다른 문항 · 2순위 같은 대분류 내 다른 문항</a:t>
-            </a:r>
-            <a:endParaRPr b="0" i="0" sz="1050" u="none" cap="none" strike="noStrike">
-              <a:solidFill>
-                <a:schemeClr val="dk1"/>
-              </a:solidFill>
-              <a:latin typeface="Calibri"/>
-              <a:ea typeface="Calibri"/>
-              <a:cs typeface="Calibri"/>
-              <a:sym typeface="Calibri"/>
-            </a:endParaRPr>
-          </a:p>
-          <a:p>
-            <a:pPr indent="-171450" lvl="0" marL="171450" marR="0" rtl="0" algn="l">
-              <a:lnSpc>
-                <a:spcPct val="100000"/>
-              </a:lnSpc>
-              <a:spcBef>
-                <a:spcPts val="200"/>
-              </a:spcBef>
-              <a:spcAft>
-                <a:spcPts val="0"/>
-              </a:spcAft>
-              <a:buClr>
-                <a:srgbClr val="172033"/>
-              </a:buClr>
-              <a:buSzPts val="1050"/>
-              <a:buFont typeface="Malgun Gothic"/>
-              <a:buChar char="•"/>
-            </a:pPr>
-            <a:r>
-              <a:rPr b="0" i="0" lang="en-US" sz="1050" u="none" cap="none" strike="noStrike">
-                <a:solidFill>
-                  <a:srgbClr val="172033"/>
-                </a:solidFill>
-                <a:latin typeface="Malgun Gothic"/>
-                <a:ea typeface="Malgun Gothic"/>
-                <a:cs typeface="Malgun Gothic"/>
-                <a:sym typeface="Malgun Gothic"/>
-              </a:rPr>
-              <a:t>3순위 비교 없이 분포만 서술</a:t>
-            </a:r>
-            <a:endParaRPr b="0" i="0" sz="1050" u="none" cap="none" strike="noStrike">
               <a:solidFill>
                 <a:schemeClr val="dk1"/>
               </a:solidFill>
@@ -6198,8 +5611,8 @@
         </p:nvSpPr>
         <p:spPr>
           <a:xfrm>
-            <a:off x="8414309" y="2103120"/>
-            <a:ext cx="2954426" cy="640080"/>
+            <a:off x="8414309" y="2139696"/>
+            <a:ext cx="2954426" cy="768096"/>
           </a:xfrm>
           <a:prstGeom prst="rect">
             <a:avLst/>
@@ -6233,7 +5646,7 @@
               <a:buNone/>
             </a:pPr>
             <a:r>
-              <a:rPr b="1" i="0" lang="en-US" sz="1350" u="none" cap="none" strike="noStrike">
+              <a:rPr b="1" i="0" lang="en-US" sz="1500" u="none" cap="none" strike="noStrike">
                 <a:solidFill>
                   <a:srgbClr val="002D5A"/>
                 </a:solidFill>
@@ -6264,8 +5677,8 @@
         </p:nvSpPr>
         <p:spPr>
           <a:xfrm>
-            <a:off x="8414309" y="2779776"/>
-            <a:ext cx="2954426" cy="219456"/>
+            <a:off x="8414309" y="3017520"/>
+            <a:ext cx="2954426" cy="256032"/>
           </a:xfrm>
           <a:prstGeom prst="rect">
             <a:avLst/>
@@ -6296,7 +5709,7 @@
               <a:buNone/>
             </a:pPr>
             <a:r>
-              <a:rPr b="1" i="0" lang="en-US" sz="1000" u="none" cap="none" strike="noStrike">
+              <a:rPr b="1" i="0" lang="en-US" sz="1100" u="none" cap="none" strike="noStrike">
                 <a:solidFill>
                   <a:srgbClr val="65708A"/>
                 </a:solidFill>
@@ -6327,8 +5740,8 @@
         </p:nvSpPr>
         <p:spPr>
           <a:xfrm>
-            <a:off x="8414309" y="3017520"/>
-            <a:ext cx="2954426" cy="1225296"/>
+            <a:off x="8414309" y="3310128"/>
+            <a:ext cx="2954426" cy="2084831"/>
           </a:xfrm>
           <a:prstGeom prst="rect">
             <a:avLst/>
@@ -6362,7 +5775,7 @@
               <a:buChar char="•"/>
             </a:pPr>
             <a:r>
-              <a:rPr b="0" i="0" lang="en-US" sz="1100" u="none" cap="none" strike="noStrike">
+              <a:rPr b="0" i="0" lang="en-US" sz="1400" u="none" cap="none" strike="noStrike">
                 <a:solidFill>
                   <a:srgbClr val="172033"/>
                 </a:solidFill>
@@ -6389,7 +5802,7 @@
                 <a:spcPct val="100000"/>
               </a:lnSpc>
               <a:spcBef>
-                <a:spcPts val="200"/>
+                <a:spcPts val="600"/>
               </a:spcBef>
               <a:spcAft>
                 <a:spcPts val="0"/>
@@ -6402,7 +5815,7 @@
               <a:buChar char="•"/>
             </a:pPr>
             <a:r>
-              <a:rPr b="0" i="0" lang="en-US" sz="1100" u="none" cap="none" strike="noStrike">
+              <a:rPr b="0" i="0" lang="en-US" sz="1400" u="none" cap="none" strike="noStrike">
                 <a:solidFill>
                   <a:srgbClr val="172033"/>
                 </a:solidFill>
@@ -6429,7 +5842,7 @@
                 <a:spcPct val="100000"/>
               </a:lnSpc>
               <a:spcBef>
-                <a:spcPts val="200"/>
+                <a:spcPts val="600"/>
               </a:spcBef>
               <a:spcAft>
                 <a:spcPts val="0"/>
@@ -6442,7 +5855,7 @@
               <a:buChar char="•"/>
             </a:pPr>
             <a:r>
-              <a:rPr b="0" i="0" lang="en-US" sz="1100" u="none" cap="none" strike="noStrike">
+              <a:rPr b="0" i="0" lang="en-US" sz="1400" u="none" cap="none" strike="noStrike">
                 <a:solidFill>
                   <a:srgbClr val="172033"/>
                 </a:solidFill>
@@ -6454,220 +5867,6 @@
               <a:t>2027 시트를 넣은 4개년 파일로 전 화면 자동 확장 실증</a:t>
             </a:r>
             <a:endParaRPr b="0" i="0" sz="1100" u="none" cap="none" strike="noStrike">
-              <a:solidFill>
-                <a:schemeClr val="dk1"/>
-              </a:solidFill>
-              <a:latin typeface="Calibri"/>
-              <a:ea typeface="Calibri"/>
-              <a:cs typeface="Calibri"/>
-              <a:sym typeface="Calibri"/>
-            </a:endParaRPr>
-          </a:p>
-        </p:txBody>
-      </p:sp>
-      <p:sp>
-        <p:nvSpPr>
-          <p:cNvPr id="354" name="Google Shape;354;p13"/>
-          <p:cNvSpPr/>
-          <p:nvPr/>
-        </p:nvSpPr>
-        <p:spPr>
-          <a:xfrm>
-            <a:off x="8414309" y="4315968"/>
-            <a:ext cx="2954426" cy="1188720"/>
-          </a:xfrm>
-          <a:prstGeom prst="roundRect">
-            <a:avLst>
-              <a:gd fmla="val 4667" name="adj"/>
-            </a:avLst>
-          </a:prstGeom>
-          <a:solidFill>
-            <a:srgbClr val="E8F1F8"/>
-          </a:solidFill>
-          <a:ln>
-            <a:noFill/>
-          </a:ln>
-        </p:spPr>
-        <p:txBody>
-          <a:bodyPr anchorCtr="0" anchor="ctr" bIns="91425" lIns="91425" spcFirstLastPara="1" rIns="91425" wrap="square" tIns="91425">
-            <a:noAutofit/>
-          </a:bodyPr>
-          <a:lstStyle/>
-          <a:p>
-            <a:pPr indent="0" lvl="0" marL="0" rtl="0" algn="l">
-              <a:spcBef>
-                <a:spcPts val="0"/>
-              </a:spcBef>
-              <a:spcAft>
-                <a:spcPts val="0"/>
-              </a:spcAft>
-              <a:buNone/>
-            </a:pPr>
-            <a:r>
-              <a:t/>
-            </a:r>
-            <a:endParaRPr/>
-          </a:p>
-        </p:txBody>
-      </p:sp>
-      <p:sp>
-        <p:nvSpPr>
-          <p:cNvPr id="355" name="Google Shape;355;p13"/>
-          <p:cNvSpPr/>
-          <p:nvPr/>
-        </p:nvSpPr>
-        <p:spPr>
-          <a:xfrm>
-            <a:off x="8578901" y="4425696"/>
-            <a:ext cx="2625242" cy="219456"/>
-          </a:xfrm>
-          <a:prstGeom prst="rect">
-            <a:avLst/>
-          </a:prstGeom>
-          <a:noFill/>
-          <a:ln>
-            <a:noFill/>
-          </a:ln>
-        </p:spPr>
-        <p:txBody>
-          <a:bodyPr anchorCtr="0" anchor="ctr" bIns="0" lIns="0" spcFirstLastPara="1" rIns="0" wrap="square" tIns="0">
-            <a:noAutofit/>
-          </a:bodyPr>
-          <a:lstStyle/>
-          <a:p>
-            <a:pPr indent="0" lvl="0" marL="0" marR="0" rtl="0" algn="l">
-              <a:spcBef>
-                <a:spcPts val="0"/>
-              </a:spcBef>
-              <a:spcAft>
-                <a:spcPts val="0"/>
-              </a:spcAft>
-              <a:buClr>
-                <a:srgbClr val="004381"/>
-              </a:buClr>
-              <a:buSzPts val="1000"/>
-              <a:buFont typeface="Malgun Gothic"/>
-              <a:buNone/>
-            </a:pPr>
-            <a:r>
-              <a:rPr b="1" i="0" lang="en-US" sz="1000" u="none" cap="none" strike="noStrike">
-                <a:solidFill>
-                  <a:srgbClr val="004381"/>
-                </a:solidFill>
-                <a:latin typeface="Malgun Gothic"/>
-                <a:ea typeface="Malgun Gothic"/>
-                <a:cs typeface="Malgun Gothic"/>
-                <a:sym typeface="Malgun Gothic"/>
-              </a:rPr>
-              <a:t>대화 기록 유실 조치</a:t>
-            </a:r>
-            <a:endParaRPr b="0" i="0" sz="1000" u="none" cap="none" strike="noStrike">
-              <a:solidFill>
-                <a:schemeClr val="dk1"/>
-              </a:solidFill>
-              <a:latin typeface="Calibri"/>
-              <a:ea typeface="Calibri"/>
-              <a:cs typeface="Calibri"/>
-              <a:sym typeface="Calibri"/>
-            </a:endParaRPr>
-          </a:p>
-        </p:txBody>
-      </p:sp>
-      <p:sp>
-        <p:nvSpPr>
-          <p:cNvPr id="356" name="Google Shape;356;p13"/>
-          <p:cNvSpPr/>
-          <p:nvPr/>
-        </p:nvSpPr>
-        <p:spPr>
-          <a:xfrm>
-            <a:off x="8578901" y="4681728"/>
-            <a:ext cx="2625242" cy="731520"/>
-          </a:xfrm>
-          <a:prstGeom prst="rect">
-            <a:avLst/>
-          </a:prstGeom>
-          <a:noFill/>
-          <a:ln>
-            <a:noFill/>
-          </a:ln>
-        </p:spPr>
-        <p:txBody>
-          <a:bodyPr anchorCtr="0" anchor="ctr" bIns="0" lIns="0" spcFirstLastPara="1" rIns="0" wrap="square" tIns="0">
-            <a:noAutofit/>
-          </a:bodyPr>
-          <a:lstStyle/>
-          <a:p>
-            <a:pPr indent="-171450" lvl="0" marL="171450" marR="0" rtl="0" algn="l">
-              <a:lnSpc>
-                <a:spcPct val="100000"/>
-              </a:lnSpc>
-              <a:spcBef>
-                <a:spcPts val="0"/>
-              </a:spcBef>
-              <a:spcAft>
-                <a:spcPts val="0"/>
-              </a:spcAft>
-              <a:buClr>
-                <a:srgbClr val="172033"/>
-              </a:buClr>
-              <a:buSzPts val="1050"/>
-              <a:buFont typeface="Malgun Gothic"/>
-              <a:buChar char="•"/>
-            </a:pPr>
-            <a:r>
-              <a:rPr b="0" i="0" lang="en-US" sz="1050" u="none" cap="none" strike="noStrike">
-                <a:solidFill>
-                  <a:srgbClr val="172033"/>
-                </a:solidFill>
-                <a:latin typeface="Malgun Gothic"/>
-                <a:ea typeface="Malgun Gothic"/>
-                <a:cs typeface="Malgun Gothic"/>
-                <a:sym typeface="Malgun Gothic"/>
-              </a:rPr>
-              <a:t>Starlette 세션이 전체를 쿠키에 저장해 4KB 초과</a:t>
-            </a:r>
-            <a:endParaRPr b="0" i="0" sz="1050" u="none" cap="none" strike="noStrike">
-              <a:solidFill>
-                <a:schemeClr val="dk1"/>
-              </a:solidFill>
-              <a:latin typeface="Calibri"/>
-              <a:ea typeface="Calibri"/>
-              <a:cs typeface="Calibri"/>
-              <a:sym typeface="Calibri"/>
-            </a:endParaRPr>
-          </a:p>
-          <a:p>
-            <a:pPr indent="-171450" lvl="0" marL="171450" marR="0" rtl="0" algn="l">
-              <a:lnSpc>
-                <a:spcPct val="100000"/>
-              </a:lnSpc>
-              <a:spcBef>
-                <a:spcPts val="200"/>
-              </a:spcBef>
-              <a:spcAft>
-                <a:spcPts val="0"/>
-              </a:spcAft>
-              <a:buClr>
-                <a:srgbClr val="172033"/>
-              </a:buClr>
-              <a:buSzPts val="1050"/>
-              <a:buFont typeface="Malgun Gothic"/>
-              <a:buChar char="•"/>
-            </a:pPr>
-            <a:r>
-              <a:rPr b="0" i="0" lang="en-US" sz="1050" u="none" cap="none" strike="noStrike">
-                <a:solidFill>
-                  <a:srgbClr val="172033"/>
-                </a:solidFill>
-                <a:latin typeface="Malgun Gothic"/>
-                <a:ea typeface="Malgun Gothic"/>
-                <a:cs typeface="Malgun Gothic"/>
-                <a:sym typeface="Malgun Gothic"/>
-              </a:rPr>
-              <a:t>→ chat_messages 테이블로 이전, 쿠키엔 토큰만</a:t>
-            </a:r>
-            <a:endParaRPr b="0" i="0" sz="1050" u="none" cap="none" strike="noStrike">
               <a:solidFill>
                 <a:schemeClr val="dk1"/>
               </a:solidFill>
@@ -7007,7 +6206,7 @@
                 <a:cs typeface="Malgun Gothic"/>
                 <a:sym typeface="Malgun Gothic"/>
               </a:rPr>
-              <a:t>9</a:t>
+              <a:t>8</a:t>
             </a:r>
             <a:endParaRPr b="0" i="0" sz="1000" u="none" cap="none" strike="noStrike">
               <a:solidFill>
@@ -7030,7 +6229,7 @@
         <p:spPr>
           <a:xfrm>
             <a:off x="566928" y="1408176"/>
-            <a:ext cx="3466490" cy="3200400"/>
+            <a:ext cx="3466490" cy="4480560"/>
           </a:xfrm>
           <a:prstGeom prst="roundRect">
             <a:avLst>
@@ -7087,8 +6286,8 @@
         </p:nvSpPr>
         <p:spPr>
           <a:xfrm>
-            <a:off x="841248" y="1645920"/>
-            <a:ext cx="2917850" cy="237744"/>
+            <a:off x="841248" y="1737360"/>
+            <a:ext cx="2917850" cy="274320"/>
           </a:xfrm>
           <a:prstGeom prst="rect">
             <a:avLst/>
@@ -7119,7 +6318,7 @@
               <a:buNone/>
             </a:pPr>
             <a:r>
-              <a:rPr b="1" i="0" lang="en-US" sz="1000" u="none" cap="none" strike="noStrike">
+              <a:rPr b="1" i="0" lang="en-US" sz="1100" u="none" cap="none" strike="noStrike">
                 <a:solidFill>
                   <a:srgbClr val="65708A"/>
                 </a:solidFill>
@@ -7150,8 +6349,8 @@
         </p:nvSpPr>
         <p:spPr>
           <a:xfrm>
-            <a:off x="841248" y="1901952"/>
-            <a:ext cx="2917850" cy="365760"/>
+            <a:off x="841248" y="2084831"/>
+            <a:ext cx="2917850" cy="548640"/>
           </a:xfrm>
           <a:prstGeom prst="rect">
             <a:avLst/>
@@ -7182,7 +6381,7 @@
               <a:buNone/>
             </a:pPr>
             <a:r>
-              <a:rPr b="1" i="0" lang="en-US" sz="1800" u="none" cap="none" strike="noStrike">
+              <a:rPr b="1" i="0" lang="en-US" sz="2200" u="none" cap="none" strike="noStrike">
                 <a:solidFill>
                   <a:srgbClr val="002D5A"/>
                 </a:solidFill>
@@ -7213,8 +6412,8 @@
         </p:nvSpPr>
         <p:spPr>
           <a:xfrm>
-            <a:off x="841248" y="2377440"/>
-            <a:ext cx="2917850" cy="2011680"/>
+            <a:off x="841248" y="2788920"/>
+            <a:ext cx="2917850" cy="2926080"/>
           </a:xfrm>
           <a:prstGeom prst="rect">
             <a:avLst/>
@@ -7231,6 +6430,9 @@
           <a:lstStyle/>
           <a:p>
             <a:pPr indent="-342900" lvl="0" marL="342900" marR="0" rtl="0" algn="l">
+              <a:lnSpc>
+                <a:spcPct val="145000"/>
+              </a:lnSpc>
               <a:spcBef>
                 <a:spcPts val="0"/>
               </a:spcBef>
@@ -7245,7 +6447,7 @@
               <a:buChar char="•"/>
             </a:pPr>
             <a:r>
-              <a:rPr b="0" i="0" lang="en-US" sz="1100" u="none" cap="none" strike="noStrike">
+              <a:rPr b="0" i="0" lang="en-US" sz="1400" u="none" cap="none" strike="noStrike">
                 <a:solidFill>
                   <a:srgbClr val="172033"/>
                 </a:solidFill>
@@ -7268,6 +6470,9 @@
           </a:p>
           <a:p>
             <a:pPr indent="-342900" lvl="0" marL="342900" marR="0" rtl="0" algn="l">
+              <a:lnSpc>
+                <a:spcPct val="145000"/>
+              </a:lnSpc>
               <a:spcBef>
                 <a:spcPts val="800"/>
               </a:spcBef>
@@ -7282,7 +6487,7 @@
               <a:buChar char="•"/>
             </a:pPr>
             <a:r>
-              <a:rPr b="0" i="0" lang="en-US" sz="1100" u="none" cap="none" strike="noStrike">
+              <a:rPr b="0" i="0" lang="en-US" sz="1400" u="none" cap="none" strike="noStrike">
                 <a:solidFill>
                   <a:srgbClr val="172033"/>
                 </a:solidFill>
@@ -7305,6 +6510,9 @@
           </a:p>
           <a:p>
             <a:pPr indent="-342900" lvl="0" marL="342900" marR="0" rtl="0" algn="l">
+              <a:lnSpc>
+                <a:spcPct val="145000"/>
+              </a:lnSpc>
               <a:spcBef>
                 <a:spcPts val="800"/>
               </a:spcBef>
@@ -7319,7 +6527,7 @@
               <a:buChar char="•"/>
             </a:pPr>
             <a:r>
-              <a:rPr b="0" i="0" lang="en-US" sz="1100" u="none" cap="none" strike="noStrike">
+              <a:rPr b="0" i="0" lang="en-US" sz="1400" u="none" cap="none" strike="noStrike">
                 <a:solidFill>
                   <a:srgbClr val="172033"/>
                 </a:solidFill>
@@ -7342,6 +6550,9 @@
           </a:p>
           <a:p>
             <a:pPr indent="0" lvl="0" marL="0" marR="0" rtl="0" algn="l">
+              <a:lnSpc>
+                <a:spcPct val="145000"/>
+              </a:lnSpc>
               <a:spcBef>
                 <a:spcPts val="800"/>
               </a:spcBef>
@@ -7356,7 +6567,7 @@
               <a:buNone/>
             </a:pPr>
             <a:r>
-              <a:rPr b="0" i="0" lang="en-US" sz="1100" u="none" cap="none" strike="noStrike">
+              <a:rPr b="0" i="0" lang="en-US" sz="1400" u="none" cap="none" strike="noStrike">
                 <a:solidFill>
                   <a:srgbClr val="172033"/>
                 </a:solidFill>
@@ -7388,7 +6599,7 @@
         <p:spPr>
           <a:xfrm>
             <a:off x="4362602" y="1408176"/>
-            <a:ext cx="3466490" cy="3200400"/>
+            <a:ext cx="3466490" cy="4480560"/>
           </a:xfrm>
           <a:prstGeom prst="roundRect">
             <a:avLst>
@@ -7445,8 +6656,8 @@
         </p:nvSpPr>
         <p:spPr>
           <a:xfrm>
-            <a:off x="4636922" y="1645920"/>
-            <a:ext cx="2917850" cy="237744"/>
+            <a:off x="4636922" y="1737360"/>
+            <a:ext cx="2917850" cy="274320"/>
           </a:xfrm>
           <a:prstGeom prst="rect">
             <a:avLst/>
@@ -7477,7 +6688,7 @@
               <a:buNone/>
             </a:pPr>
             <a:r>
-              <a:rPr b="1" i="0" lang="en-US" sz="1000" u="none" cap="none" strike="noStrike">
+              <a:rPr b="1" i="0" lang="en-US" sz="1100" u="none" cap="none" strike="noStrike">
                 <a:solidFill>
                   <a:srgbClr val="004381"/>
                 </a:solidFill>
@@ -7508,8 +6719,8 @@
         </p:nvSpPr>
         <p:spPr>
           <a:xfrm>
-            <a:off x="4636922" y="1901952"/>
-            <a:ext cx="2917850" cy="365760"/>
+            <a:off x="4636922" y="2084831"/>
+            <a:ext cx="2917850" cy="548640"/>
           </a:xfrm>
           <a:prstGeom prst="rect">
             <a:avLst/>
@@ -7540,7 +6751,7 @@
               <a:buNone/>
             </a:pPr>
             <a:r>
-              <a:rPr b="1" i="0" lang="en-US" sz="1800" u="none" cap="none" strike="noStrike">
+              <a:rPr b="1" i="0" lang="en-US" sz="2200" u="none" cap="none" strike="noStrike">
                 <a:solidFill>
                   <a:srgbClr val="002D5A"/>
                 </a:solidFill>
@@ -7571,8 +6782,8 @@
         </p:nvSpPr>
         <p:spPr>
           <a:xfrm>
-            <a:off x="4636922" y="2377440"/>
-            <a:ext cx="2917850" cy="2011680"/>
+            <a:off x="4636922" y="2788920"/>
+            <a:ext cx="2917850" cy="2926080"/>
           </a:xfrm>
           <a:prstGeom prst="rect">
             <a:avLst/>
@@ -7589,6 +6800,9 @@
           <a:lstStyle/>
           <a:p>
             <a:pPr indent="-342900" lvl="0" marL="342900" marR="0" rtl="0" algn="l">
+              <a:lnSpc>
+                <a:spcPct val="145000"/>
+              </a:lnSpc>
               <a:spcBef>
                 <a:spcPts val="0"/>
               </a:spcBef>
@@ -7603,7 +6817,7 @@
               <a:buChar char="•"/>
             </a:pPr>
             <a:r>
-              <a:rPr b="0" i="0" lang="en-US" sz="1100" u="none" cap="none" strike="noStrike">
+              <a:rPr b="0" i="0" lang="en-US" sz="1400" u="none" cap="none" strike="noStrike">
                 <a:solidFill>
                   <a:srgbClr val="172033"/>
                 </a:solidFill>
@@ -7626,6 +6840,9 @@
           </a:p>
           <a:p>
             <a:pPr indent="-342900" lvl="0" marL="342900" marR="0" rtl="0" algn="l">
+              <a:lnSpc>
+                <a:spcPct val="145000"/>
+              </a:lnSpc>
               <a:spcBef>
                 <a:spcPts val="800"/>
               </a:spcBef>
@@ -7640,7 +6857,7 @@
               <a:buChar char="•"/>
             </a:pPr>
             <a:r>
-              <a:rPr b="0" i="0" lang="en-US" sz="1100" u="none" cap="none" strike="noStrike">
+              <a:rPr b="0" i="0" lang="en-US" sz="1400" u="none" cap="none" strike="noStrike">
                 <a:solidFill>
                   <a:srgbClr val="172033"/>
                 </a:solidFill>
@@ -7663,6 +6880,9 @@
           </a:p>
           <a:p>
             <a:pPr indent="-342900" lvl="0" marL="342900" marR="0" rtl="0" algn="l">
+              <a:lnSpc>
+                <a:spcPct val="145000"/>
+              </a:lnSpc>
               <a:spcBef>
                 <a:spcPts val="800"/>
               </a:spcBef>
@@ -7677,7 +6897,7 @@
               <a:buChar char="•"/>
             </a:pPr>
             <a:r>
-              <a:rPr b="0" i="0" lang="en-US" sz="1100" u="none" cap="none" strike="noStrike">
+              <a:rPr b="0" i="0" lang="en-US" sz="1400" u="none" cap="none" strike="noStrike">
                 <a:solidFill>
                   <a:srgbClr val="172033"/>
                 </a:solidFill>
@@ -7700,6 +6920,9 @@
           </a:p>
           <a:p>
             <a:pPr indent="0" lvl="0" marL="0" marR="0" rtl="0" algn="l">
+              <a:lnSpc>
+                <a:spcPct val="145000"/>
+              </a:lnSpc>
               <a:spcBef>
                 <a:spcPts val="800"/>
               </a:spcBef>
@@ -7714,7 +6937,7 @@
               <a:buNone/>
             </a:pPr>
             <a:r>
-              <a:rPr b="0" i="0" lang="en-US" sz="1100" u="none" cap="none" strike="noStrike">
+              <a:rPr b="0" i="0" lang="en-US" sz="1400" u="none" cap="none" strike="noStrike">
                 <a:solidFill>
                   <a:srgbClr val="172033"/>
                 </a:solidFill>
@@ -7746,7 +6969,7 @@
         <p:spPr>
           <a:xfrm>
             <a:off x="8158277" y="1408176"/>
-            <a:ext cx="3466490" cy="3200400"/>
+            <a:ext cx="3466490" cy="4480560"/>
           </a:xfrm>
           <a:prstGeom prst="roundRect">
             <a:avLst>
@@ -7803,8 +7026,8 @@
         </p:nvSpPr>
         <p:spPr>
           <a:xfrm>
-            <a:off x="8432597" y="1645920"/>
-            <a:ext cx="2917850" cy="237744"/>
+            <a:off x="8432597" y="1737360"/>
+            <a:ext cx="2917850" cy="274320"/>
           </a:xfrm>
           <a:prstGeom prst="rect">
             <a:avLst/>
@@ -7835,7 +7058,7 @@
               <a:buNone/>
             </a:pPr>
             <a:r>
-              <a:rPr b="1" i="0" lang="en-US" sz="1000" u="none" cap="none" strike="noStrike">
+              <a:rPr b="1" i="0" lang="en-US" sz="1100" u="none" cap="none" strike="noStrike">
                 <a:solidFill>
                   <a:srgbClr val="0098D9"/>
                 </a:solidFill>
@@ -7866,8 +7089,8 @@
         </p:nvSpPr>
         <p:spPr>
           <a:xfrm>
-            <a:off x="8432597" y="1901952"/>
-            <a:ext cx="2917850" cy="365760"/>
+            <a:off x="8432597" y="2084831"/>
+            <a:ext cx="2917850" cy="548640"/>
           </a:xfrm>
           <a:prstGeom prst="rect">
             <a:avLst/>
@@ -7898,7 +7121,7 @@
               <a:buNone/>
             </a:pPr>
             <a:r>
-              <a:rPr b="1" i="0" lang="en-US" sz="1800" u="none" cap="none" strike="noStrike">
+              <a:rPr b="1" i="0" lang="en-US" sz="2200" u="none" cap="none" strike="noStrike">
                 <a:solidFill>
                   <a:srgbClr val="002D5A"/>
                 </a:solidFill>
@@ -7929,8 +7152,8 @@
         </p:nvSpPr>
         <p:spPr>
           <a:xfrm>
-            <a:off x="8432597" y="2377440"/>
-            <a:ext cx="2917850" cy="2011680"/>
+            <a:off x="8432597" y="2788920"/>
+            <a:ext cx="2917850" cy="2926080"/>
           </a:xfrm>
           <a:prstGeom prst="rect">
             <a:avLst/>
@@ -7947,6 +7170,9 @@
           <a:lstStyle/>
           <a:p>
             <a:pPr indent="-342900" lvl="0" marL="342900" marR="0" rtl="0" algn="l">
+              <a:lnSpc>
+                <a:spcPct val="145000"/>
+              </a:lnSpc>
               <a:spcBef>
                 <a:spcPts val="0"/>
               </a:spcBef>
@@ -7961,7 +7187,7 @@
               <a:buChar char="•"/>
             </a:pPr>
             <a:r>
-              <a:rPr b="0" i="0" lang="en-US" sz="1100" u="none" cap="none" strike="noStrike">
+              <a:rPr b="0" i="0" lang="en-US" sz="1400" u="none" cap="none" strike="noStrike">
                 <a:solidFill>
                   <a:srgbClr val="172033"/>
                 </a:solidFill>
@@ -7984,6 +7210,9 @@
           </a:p>
           <a:p>
             <a:pPr indent="-342900" lvl="0" marL="342900" marR="0" rtl="0" algn="l">
+              <a:lnSpc>
+                <a:spcPct val="145000"/>
+              </a:lnSpc>
               <a:spcBef>
                 <a:spcPts val="800"/>
               </a:spcBef>
@@ -7998,7 +7227,7 @@
               <a:buChar char="•"/>
             </a:pPr>
             <a:r>
-              <a:rPr b="0" i="0" lang="en-US" sz="1100" u="none" cap="none" strike="noStrike">
+              <a:rPr b="0" i="0" lang="en-US" sz="1400" u="none" cap="none" strike="noStrike">
                 <a:solidFill>
                   <a:srgbClr val="172033"/>
                 </a:solidFill>
@@ -8021,6 +7250,9 @@
           </a:p>
           <a:p>
             <a:pPr indent="-342900" lvl="0" marL="342900" marR="0" rtl="0" algn="l">
+              <a:lnSpc>
+                <a:spcPct val="145000"/>
+              </a:lnSpc>
               <a:spcBef>
                 <a:spcPts val="800"/>
               </a:spcBef>
@@ -8035,7 +7267,7 @@
               <a:buChar char="•"/>
             </a:pPr>
             <a:r>
-              <a:rPr b="0" i="0" lang="en-US" sz="1100" u="none" cap="none" strike="noStrike">
+              <a:rPr b="0" i="0" lang="en-US" sz="1400" u="none" cap="none" strike="noStrike">
                 <a:solidFill>
                   <a:srgbClr val="172033"/>
                 </a:solidFill>
@@ -8058,6 +7290,9 @@
           </a:p>
           <a:p>
             <a:pPr indent="0" lvl="0" marL="0" marR="0" rtl="0" algn="l">
+              <a:lnSpc>
+                <a:spcPct val="145000"/>
+              </a:lnSpc>
               <a:spcBef>
                 <a:spcPts val="800"/>
               </a:spcBef>
@@ -8072,7 +7307,7 @@
               <a:buNone/>
             </a:pPr>
             <a:r>
-              <a:rPr b="0" i="0" lang="en-US" sz="1100" u="none" cap="none" strike="noStrike">
+              <a:rPr b="0" i="0" lang="en-US" sz="1400" u="none" cap="none" strike="noStrike">
                 <a:solidFill>
                   <a:srgbClr val="172033"/>
                 </a:solidFill>
@@ -8084,742 +7319,6 @@
               <a:t>→ 키가 없으면 규칙 기반으로 자동 폴백</a:t>
             </a:r>
             <a:endParaRPr b="0" i="0" sz="1100" u="none" cap="none" strike="noStrike">
-              <a:solidFill>
-                <a:schemeClr val="dk1"/>
-              </a:solidFill>
-              <a:latin typeface="Calibri"/>
-              <a:ea typeface="Calibri"/>
-              <a:cs typeface="Calibri"/>
-              <a:sym typeface="Calibri"/>
-            </a:endParaRPr>
-          </a:p>
-        </p:txBody>
-      </p:sp>
-      <p:sp>
-        <p:nvSpPr>
-          <p:cNvPr id="445" name="Google Shape;445;p16"/>
-          <p:cNvSpPr/>
-          <p:nvPr/>
-        </p:nvSpPr>
-        <p:spPr>
-          <a:xfrm>
-            <a:off x="566928" y="4791456"/>
-            <a:ext cx="2558720" cy="1097280"/>
-          </a:xfrm>
-          <a:prstGeom prst="roundRect">
-            <a:avLst>
-              <a:gd fmla="val 6667" name="adj"/>
-            </a:avLst>
-          </a:prstGeom>
-          <a:solidFill>
-            <a:srgbClr val="E8F1F8"/>
-          </a:solidFill>
-          <a:ln cap="flat" cmpd="sng" w="12700">
-            <a:solidFill>
-              <a:srgbClr val="DFE5EF"/>
-            </a:solidFill>
-            <a:prstDash val="solid"/>
-            <a:round/>
-            <a:headEnd len="sm" w="sm" type="none"/>
-            <a:tailEnd len="sm" w="sm" type="none"/>
-          </a:ln>
-          <a:effectLst>
-            <a:outerShdw blurRad="127000" rotWithShape="0" algn="bl" dir="5400000" dist="25400">
-              <a:srgbClr val="8894A8">
-                <a:alpha val="18039"/>
-              </a:srgbClr>
-            </a:outerShdw>
-          </a:effectLst>
-        </p:spPr>
-        <p:txBody>
-          <a:bodyPr anchorCtr="0" anchor="ctr" bIns="91425" lIns="91425" spcFirstLastPara="1" rIns="91425" wrap="square" tIns="91425">
-            <a:noAutofit/>
-          </a:bodyPr>
-          <a:lstStyle/>
-          <a:p>
-            <a:pPr indent="0" lvl="0" marL="0" rtl="0" algn="l">
-              <a:spcBef>
-                <a:spcPts val="0"/>
-              </a:spcBef>
-              <a:spcAft>
-                <a:spcPts val="0"/>
-              </a:spcAft>
-              <a:buNone/>
-            </a:pPr>
-            <a:r>
-              <a:t/>
-            </a:r>
-            <a:endParaRPr/>
-          </a:p>
-        </p:txBody>
-      </p:sp>
-      <p:sp>
-        <p:nvSpPr>
-          <p:cNvPr id="446" name="Google Shape;446;p16"/>
-          <p:cNvSpPr/>
-          <p:nvPr/>
-        </p:nvSpPr>
-        <p:spPr>
-          <a:xfrm>
-            <a:off x="804672" y="4956048"/>
-            <a:ext cx="2101520" cy="457200"/>
-          </a:xfrm>
-          <a:prstGeom prst="rect">
-            <a:avLst/>
-          </a:prstGeom>
-          <a:noFill/>
-          <a:ln>
-            <a:noFill/>
-          </a:ln>
-        </p:spPr>
-        <p:txBody>
-          <a:bodyPr anchorCtr="0" anchor="ctr" bIns="0" lIns="0" spcFirstLastPara="1" rIns="0" wrap="square" tIns="0">
-            <a:noAutofit/>
-          </a:bodyPr>
-          <a:lstStyle/>
-          <a:p>
-            <a:pPr indent="0" lvl="0" marL="0" marR="0" rtl="0" algn="l">
-              <a:spcBef>
-                <a:spcPts val="0"/>
-              </a:spcBef>
-              <a:spcAft>
-                <a:spcPts val="0"/>
-              </a:spcAft>
-              <a:buClr>
-                <a:srgbClr val="004381"/>
-              </a:buClr>
-              <a:buSzPts val="2400"/>
-              <a:buFont typeface="Malgun Gothic"/>
-              <a:buNone/>
-            </a:pPr>
-            <a:r>
-              <a:rPr b="1" i="0" lang="en-US" sz="2400" u="none" cap="none" strike="noStrike">
-                <a:solidFill>
-                  <a:srgbClr val="004381"/>
-                </a:solidFill>
-                <a:latin typeface="Malgun Gothic"/>
-                <a:ea typeface="Malgun Gothic"/>
-                <a:cs typeface="Malgun Gothic"/>
-                <a:sym typeface="Malgun Gothic"/>
-              </a:rPr>
-              <a:t>5,033</a:t>
-            </a:r>
-            <a:endParaRPr b="0" i="0" sz="2400" u="none" cap="none" strike="noStrike">
-              <a:solidFill>
-                <a:schemeClr val="dk1"/>
-              </a:solidFill>
-              <a:latin typeface="Calibri"/>
-              <a:ea typeface="Calibri"/>
-              <a:cs typeface="Calibri"/>
-              <a:sym typeface="Calibri"/>
-            </a:endParaRPr>
-          </a:p>
-        </p:txBody>
-      </p:sp>
-      <p:sp>
-        <p:nvSpPr>
-          <p:cNvPr id="447" name="Google Shape;447;p16"/>
-          <p:cNvSpPr/>
-          <p:nvPr/>
-        </p:nvSpPr>
-        <p:spPr>
-          <a:xfrm>
-            <a:off x="804672" y="5431536"/>
-            <a:ext cx="2101520" cy="256032"/>
-          </a:xfrm>
-          <a:prstGeom prst="rect">
-            <a:avLst/>
-          </a:prstGeom>
-          <a:noFill/>
-          <a:ln>
-            <a:noFill/>
-          </a:ln>
-        </p:spPr>
-        <p:txBody>
-          <a:bodyPr anchorCtr="0" anchor="ctr" bIns="0" lIns="0" spcFirstLastPara="1" rIns="0" wrap="square" tIns="0">
-            <a:noAutofit/>
-          </a:bodyPr>
-          <a:lstStyle/>
-          <a:p>
-            <a:pPr indent="0" lvl="0" marL="0" marR="0" rtl="0" algn="l">
-              <a:spcBef>
-                <a:spcPts val="0"/>
-              </a:spcBef>
-              <a:spcAft>
-                <a:spcPts val="0"/>
-              </a:spcAft>
-              <a:buClr>
-                <a:srgbClr val="65708A"/>
-              </a:buClr>
-              <a:buSzPts val="1050"/>
-              <a:buFont typeface="Malgun Gothic"/>
-              <a:buNone/>
-            </a:pPr>
-            <a:r>
-              <a:rPr b="0" i="0" lang="en-US" sz="1050" u="none" cap="none" strike="noStrike">
-                <a:solidFill>
-                  <a:srgbClr val="65708A"/>
-                </a:solidFill>
-                <a:latin typeface="Malgun Gothic"/>
-                <a:ea typeface="Malgun Gothic"/>
-                <a:cs typeface="Malgun Gothic"/>
-                <a:sym typeface="Malgun Gothic"/>
-              </a:rPr>
-              <a:t>라인 (앱 코드)</a:t>
-            </a:r>
-            <a:endParaRPr b="0" i="0" sz="1050" u="none" cap="none" strike="noStrike">
-              <a:solidFill>
-                <a:schemeClr val="dk1"/>
-              </a:solidFill>
-              <a:latin typeface="Calibri"/>
-              <a:ea typeface="Calibri"/>
-              <a:cs typeface="Calibri"/>
-              <a:sym typeface="Calibri"/>
-            </a:endParaRPr>
-          </a:p>
-        </p:txBody>
-      </p:sp>
-      <p:sp>
-        <p:nvSpPr>
-          <p:cNvPr id="448" name="Google Shape;448;p16"/>
-          <p:cNvSpPr/>
-          <p:nvPr/>
-        </p:nvSpPr>
-        <p:spPr>
-          <a:xfrm>
-            <a:off x="3399968" y="4791456"/>
-            <a:ext cx="2558720" cy="1097280"/>
-          </a:xfrm>
-          <a:prstGeom prst="roundRect">
-            <a:avLst>
-              <a:gd fmla="val 6667" name="adj"/>
-            </a:avLst>
-          </a:prstGeom>
-          <a:solidFill>
-            <a:srgbClr val="E8F1F8"/>
-          </a:solidFill>
-          <a:ln cap="flat" cmpd="sng" w="12700">
-            <a:solidFill>
-              <a:srgbClr val="DFE5EF"/>
-            </a:solidFill>
-            <a:prstDash val="solid"/>
-            <a:round/>
-            <a:headEnd len="sm" w="sm" type="none"/>
-            <a:tailEnd len="sm" w="sm" type="none"/>
-          </a:ln>
-          <a:effectLst>
-            <a:outerShdw blurRad="127000" rotWithShape="0" algn="bl" dir="5400000" dist="25400">
-              <a:srgbClr val="8894A8">
-                <a:alpha val="18039"/>
-              </a:srgbClr>
-            </a:outerShdw>
-          </a:effectLst>
-        </p:spPr>
-        <p:txBody>
-          <a:bodyPr anchorCtr="0" anchor="ctr" bIns="91425" lIns="91425" spcFirstLastPara="1" rIns="91425" wrap="square" tIns="91425">
-            <a:noAutofit/>
-          </a:bodyPr>
-          <a:lstStyle/>
-          <a:p>
-            <a:pPr indent="0" lvl="0" marL="0" rtl="0" algn="l">
-              <a:spcBef>
-                <a:spcPts val="0"/>
-              </a:spcBef>
-              <a:spcAft>
-                <a:spcPts val="0"/>
-              </a:spcAft>
-              <a:buNone/>
-            </a:pPr>
-            <a:r>
-              <a:t/>
-            </a:r>
-            <a:endParaRPr/>
-          </a:p>
-        </p:txBody>
-      </p:sp>
-      <p:sp>
-        <p:nvSpPr>
-          <p:cNvPr id="449" name="Google Shape;449;p16"/>
-          <p:cNvSpPr/>
-          <p:nvPr/>
-        </p:nvSpPr>
-        <p:spPr>
-          <a:xfrm>
-            <a:off x="3637712" y="4956048"/>
-            <a:ext cx="2101520" cy="457200"/>
-          </a:xfrm>
-          <a:prstGeom prst="rect">
-            <a:avLst/>
-          </a:prstGeom>
-          <a:noFill/>
-          <a:ln>
-            <a:noFill/>
-          </a:ln>
-        </p:spPr>
-        <p:txBody>
-          <a:bodyPr anchorCtr="0" anchor="ctr" bIns="0" lIns="0" spcFirstLastPara="1" rIns="0" wrap="square" tIns="0">
-            <a:noAutofit/>
-          </a:bodyPr>
-          <a:lstStyle/>
-          <a:p>
-            <a:pPr indent="0" lvl="0" marL="0" marR="0" rtl="0" algn="l">
-              <a:spcBef>
-                <a:spcPts val="0"/>
-              </a:spcBef>
-              <a:spcAft>
-                <a:spcPts val="0"/>
-              </a:spcAft>
-              <a:buClr>
-                <a:srgbClr val="004381"/>
-              </a:buClr>
-              <a:buSzPts val="2400"/>
-              <a:buFont typeface="Malgun Gothic"/>
-              <a:buNone/>
-            </a:pPr>
-            <a:r>
-              <a:rPr b="1" i="0" lang="en-US" sz="2400" u="none" cap="none" strike="noStrike">
-                <a:solidFill>
-                  <a:srgbClr val="004381"/>
-                </a:solidFill>
-                <a:latin typeface="Malgun Gothic"/>
-                <a:ea typeface="Malgun Gothic"/>
-                <a:cs typeface="Malgun Gothic"/>
-                <a:sym typeface="Malgun Gothic"/>
-              </a:rPr>
-              <a:t>13</a:t>
-            </a:r>
-            <a:endParaRPr b="0" i="0" sz="2400" u="none" cap="none" strike="noStrike">
-              <a:solidFill>
-                <a:schemeClr val="dk1"/>
-              </a:solidFill>
-              <a:latin typeface="Calibri"/>
-              <a:ea typeface="Calibri"/>
-              <a:cs typeface="Calibri"/>
-              <a:sym typeface="Calibri"/>
-            </a:endParaRPr>
-          </a:p>
-        </p:txBody>
-      </p:sp>
-      <p:sp>
-        <p:nvSpPr>
-          <p:cNvPr id="450" name="Google Shape;450;p16"/>
-          <p:cNvSpPr/>
-          <p:nvPr/>
-        </p:nvSpPr>
-        <p:spPr>
-          <a:xfrm>
-            <a:off x="3637712" y="5431536"/>
-            <a:ext cx="2101520" cy="256032"/>
-          </a:xfrm>
-          <a:prstGeom prst="rect">
-            <a:avLst/>
-          </a:prstGeom>
-          <a:noFill/>
-          <a:ln>
-            <a:noFill/>
-          </a:ln>
-        </p:spPr>
-        <p:txBody>
-          <a:bodyPr anchorCtr="0" anchor="ctr" bIns="0" lIns="0" spcFirstLastPara="1" rIns="0" wrap="square" tIns="0">
-            <a:noAutofit/>
-          </a:bodyPr>
-          <a:lstStyle/>
-          <a:p>
-            <a:pPr indent="0" lvl="0" marL="0" marR="0" rtl="0" algn="l">
-              <a:spcBef>
-                <a:spcPts val="0"/>
-              </a:spcBef>
-              <a:spcAft>
-                <a:spcPts val="0"/>
-              </a:spcAft>
-              <a:buClr>
-                <a:srgbClr val="65708A"/>
-              </a:buClr>
-              <a:buSzPts val="1050"/>
-              <a:buFont typeface="Malgun Gothic"/>
-              <a:buNone/>
-            </a:pPr>
-            <a:r>
-              <a:rPr b="0" i="0" lang="en-US" sz="1050" u="none" cap="none" strike="noStrike">
-                <a:solidFill>
-                  <a:srgbClr val="65708A"/>
-                </a:solidFill>
-                <a:latin typeface="Malgun Gothic"/>
-                <a:ea typeface="Malgun Gothic"/>
-                <a:cs typeface="Malgun Gothic"/>
-                <a:sym typeface="Malgun Gothic"/>
-              </a:rPr>
-              <a:t>커밋</a:t>
-            </a:r>
-            <a:endParaRPr b="0" i="0" sz="1050" u="none" cap="none" strike="noStrike">
-              <a:solidFill>
-                <a:schemeClr val="dk1"/>
-              </a:solidFill>
-              <a:latin typeface="Calibri"/>
-              <a:ea typeface="Calibri"/>
-              <a:cs typeface="Calibri"/>
-              <a:sym typeface="Calibri"/>
-            </a:endParaRPr>
-          </a:p>
-        </p:txBody>
-      </p:sp>
-      <p:sp>
-        <p:nvSpPr>
-          <p:cNvPr id="451" name="Google Shape;451;p16"/>
-          <p:cNvSpPr/>
-          <p:nvPr/>
-        </p:nvSpPr>
-        <p:spPr>
-          <a:xfrm>
-            <a:off x="6233008" y="4791456"/>
-            <a:ext cx="2558720" cy="1097280"/>
-          </a:xfrm>
-          <a:prstGeom prst="roundRect">
-            <a:avLst>
-              <a:gd fmla="val 6667" name="adj"/>
-            </a:avLst>
-          </a:prstGeom>
-          <a:solidFill>
-            <a:srgbClr val="E8F1F8"/>
-          </a:solidFill>
-          <a:ln cap="flat" cmpd="sng" w="12700">
-            <a:solidFill>
-              <a:srgbClr val="DFE5EF"/>
-            </a:solidFill>
-            <a:prstDash val="solid"/>
-            <a:round/>
-            <a:headEnd len="sm" w="sm" type="none"/>
-            <a:tailEnd len="sm" w="sm" type="none"/>
-          </a:ln>
-          <a:effectLst>
-            <a:outerShdw blurRad="127000" rotWithShape="0" algn="bl" dir="5400000" dist="25400">
-              <a:srgbClr val="8894A8">
-                <a:alpha val="18039"/>
-              </a:srgbClr>
-            </a:outerShdw>
-          </a:effectLst>
-        </p:spPr>
-        <p:txBody>
-          <a:bodyPr anchorCtr="0" anchor="ctr" bIns="91425" lIns="91425" spcFirstLastPara="1" rIns="91425" wrap="square" tIns="91425">
-            <a:noAutofit/>
-          </a:bodyPr>
-          <a:lstStyle/>
-          <a:p>
-            <a:pPr indent="0" lvl="0" marL="0" rtl="0" algn="l">
-              <a:spcBef>
-                <a:spcPts val="0"/>
-              </a:spcBef>
-              <a:spcAft>
-                <a:spcPts val="0"/>
-              </a:spcAft>
-              <a:buNone/>
-            </a:pPr>
-            <a:r>
-              <a:t/>
-            </a:r>
-            <a:endParaRPr/>
-          </a:p>
-        </p:txBody>
-      </p:sp>
-      <p:sp>
-        <p:nvSpPr>
-          <p:cNvPr id="452" name="Google Shape;452;p16"/>
-          <p:cNvSpPr/>
-          <p:nvPr/>
-        </p:nvSpPr>
-        <p:spPr>
-          <a:xfrm>
-            <a:off x="6470752" y="4956048"/>
-            <a:ext cx="2101520" cy="457200"/>
-          </a:xfrm>
-          <a:prstGeom prst="rect">
-            <a:avLst/>
-          </a:prstGeom>
-          <a:noFill/>
-          <a:ln>
-            <a:noFill/>
-          </a:ln>
-        </p:spPr>
-        <p:txBody>
-          <a:bodyPr anchorCtr="0" anchor="ctr" bIns="0" lIns="0" spcFirstLastPara="1" rIns="0" wrap="square" tIns="0">
-            <a:noAutofit/>
-          </a:bodyPr>
-          <a:lstStyle/>
-          <a:p>
-            <a:pPr indent="0" lvl="0" marL="0" marR="0" rtl="0" algn="l">
-              <a:spcBef>
-                <a:spcPts val="0"/>
-              </a:spcBef>
-              <a:spcAft>
-                <a:spcPts val="0"/>
-              </a:spcAft>
-              <a:buClr>
-                <a:srgbClr val="004381"/>
-              </a:buClr>
-              <a:buSzPts val="2400"/>
-              <a:buFont typeface="Malgun Gothic"/>
-              <a:buNone/>
-            </a:pPr>
-            <a:r>
-              <a:rPr b="1" i="0" lang="en-US" sz="2400" u="none" cap="none" strike="noStrike">
-                <a:solidFill>
-                  <a:srgbClr val="004381"/>
-                </a:solidFill>
-                <a:latin typeface="Malgun Gothic"/>
-                <a:ea typeface="Malgun Gothic"/>
-                <a:cs typeface="Malgun Gothic"/>
-                <a:sym typeface="Malgun Gothic"/>
-              </a:rPr>
-              <a:t>9</a:t>
-            </a:r>
-            <a:endParaRPr b="0" i="0" sz="2400" u="none" cap="none" strike="noStrike">
-              <a:solidFill>
-                <a:schemeClr val="dk1"/>
-              </a:solidFill>
-              <a:latin typeface="Calibri"/>
-              <a:ea typeface="Calibri"/>
-              <a:cs typeface="Calibri"/>
-              <a:sym typeface="Calibri"/>
-            </a:endParaRPr>
-          </a:p>
-        </p:txBody>
-      </p:sp>
-      <p:sp>
-        <p:nvSpPr>
-          <p:cNvPr id="453" name="Google Shape;453;p16"/>
-          <p:cNvSpPr/>
-          <p:nvPr/>
-        </p:nvSpPr>
-        <p:spPr>
-          <a:xfrm>
-            <a:off x="6470752" y="5431536"/>
-            <a:ext cx="2101520" cy="256032"/>
-          </a:xfrm>
-          <a:prstGeom prst="rect">
-            <a:avLst/>
-          </a:prstGeom>
-          <a:noFill/>
-          <a:ln>
-            <a:noFill/>
-          </a:ln>
-        </p:spPr>
-        <p:txBody>
-          <a:bodyPr anchorCtr="0" anchor="ctr" bIns="0" lIns="0" spcFirstLastPara="1" rIns="0" wrap="square" tIns="0">
-            <a:noAutofit/>
-          </a:bodyPr>
-          <a:lstStyle/>
-          <a:p>
-            <a:pPr indent="0" lvl="0" marL="0" marR="0" rtl="0" algn="l">
-              <a:spcBef>
-                <a:spcPts val="0"/>
-              </a:spcBef>
-              <a:spcAft>
-                <a:spcPts val="0"/>
-              </a:spcAft>
-              <a:buClr>
-                <a:srgbClr val="65708A"/>
-              </a:buClr>
-              <a:buSzPts val="1050"/>
-              <a:buFont typeface="Malgun Gothic"/>
-              <a:buNone/>
-            </a:pPr>
-            <a:r>
-              <a:rPr b="0" i="0" lang="en-US" sz="1050" u="none" cap="none" strike="noStrike">
-                <a:solidFill>
-                  <a:srgbClr val="65708A"/>
-                </a:solidFill>
-                <a:latin typeface="Malgun Gothic"/>
-                <a:ea typeface="Malgun Gothic"/>
-                <a:cs typeface="Malgun Gothic"/>
-                <a:sym typeface="Malgun Gothic"/>
-              </a:rPr>
-              <a:t>화면·기능 문서</a:t>
-            </a:r>
-            <a:endParaRPr b="0" i="0" sz="1050" u="none" cap="none" strike="noStrike">
-              <a:solidFill>
-                <a:schemeClr val="dk1"/>
-              </a:solidFill>
-              <a:latin typeface="Calibri"/>
-              <a:ea typeface="Calibri"/>
-              <a:cs typeface="Calibri"/>
-              <a:sym typeface="Calibri"/>
-            </a:endParaRPr>
-          </a:p>
-        </p:txBody>
-      </p:sp>
-      <p:sp>
-        <p:nvSpPr>
-          <p:cNvPr id="454" name="Google Shape;454;p16"/>
-          <p:cNvSpPr/>
-          <p:nvPr/>
-        </p:nvSpPr>
-        <p:spPr>
-          <a:xfrm>
-            <a:off x="9066047" y="4791456"/>
-            <a:ext cx="2558720" cy="1097280"/>
-          </a:xfrm>
-          <a:prstGeom prst="roundRect">
-            <a:avLst>
-              <a:gd fmla="val 6667" name="adj"/>
-            </a:avLst>
-          </a:prstGeom>
-          <a:solidFill>
-            <a:srgbClr val="E8F1F8"/>
-          </a:solidFill>
-          <a:ln cap="flat" cmpd="sng" w="12700">
-            <a:solidFill>
-              <a:srgbClr val="DFE5EF"/>
-            </a:solidFill>
-            <a:prstDash val="solid"/>
-            <a:round/>
-            <a:headEnd len="sm" w="sm" type="none"/>
-            <a:tailEnd len="sm" w="sm" type="none"/>
-          </a:ln>
-          <a:effectLst>
-            <a:outerShdw blurRad="127000" rotWithShape="0" algn="bl" dir="5400000" dist="25400">
-              <a:srgbClr val="8894A8">
-                <a:alpha val="18039"/>
-              </a:srgbClr>
-            </a:outerShdw>
-          </a:effectLst>
-        </p:spPr>
-        <p:txBody>
-          <a:bodyPr anchorCtr="0" anchor="ctr" bIns="91425" lIns="91425" spcFirstLastPara="1" rIns="91425" wrap="square" tIns="91425">
-            <a:noAutofit/>
-          </a:bodyPr>
-          <a:lstStyle/>
-          <a:p>
-            <a:pPr indent="0" lvl="0" marL="0" rtl="0" algn="l">
-              <a:spcBef>
-                <a:spcPts val="0"/>
-              </a:spcBef>
-              <a:spcAft>
-                <a:spcPts val="0"/>
-              </a:spcAft>
-              <a:buNone/>
-            </a:pPr>
-            <a:r>
-              <a:t/>
-            </a:r>
-            <a:endParaRPr/>
-          </a:p>
-        </p:txBody>
-      </p:sp>
-      <p:sp>
-        <p:nvSpPr>
-          <p:cNvPr id="455" name="Google Shape;455;p16"/>
-          <p:cNvSpPr/>
-          <p:nvPr/>
-        </p:nvSpPr>
-        <p:spPr>
-          <a:xfrm>
-            <a:off x="9303791" y="4956048"/>
-            <a:ext cx="2101520" cy="457200"/>
-          </a:xfrm>
-          <a:prstGeom prst="rect">
-            <a:avLst/>
-          </a:prstGeom>
-          <a:noFill/>
-          <a:ln>
-            <a:noFill/>
-          </a:ln>
-        </p:spPr>
-        <p:txBody>
-          <a:bodyPr anchorCtr="0" anchor="ctr" bIns="0" lIns="0" spcFirstLastPara="1" rIns="0" wrap="square" tIns="0">
-            <a:noAutofit/>
-          </a:bodyPr>
-          <a:lstStyle/>
-          <a:p>
-            <a:pPr indent="0" lvl="0" marL="0" marR="0" rtl="0" algn="l">
-              <a:spcBef>
-                <a:spcPts val="0"/>
-              </a:spcBef>
-              <a:spcAft>
-                <a:spcPts val="0"/>
-              </a:spcAft>
-              <a:buClr>
-                <a:srgbClr val="004381"/>
-              </a:buClr>
-              <a:buSzPts val="2400"/>
-              <a:buFont typeface="Malgun Gothic"/>
-              <a:buNone/>
-            </a:pPr>
-            <a:r>
-              <a:rPr b="1" i="0" lang="en-US" sz="2400" u="none" cap="none" strike="noStrike">
-                <a:solidFill>
-                  <a:srgbClr val="004381"/>
-                </a:solidFill>
-                <a:latin typeface="Malgun Gothic"/>
-                <a:ea typeface="Malgun Gothic"/>
-                <a:cs typeface="Malgun Gothic"/>
-                <a:sym typeface="Malgun Gothic"/>
-              </a:rPr>
-              <a:t>37,248</a:t>
-            </a:r>
-            <a:endParaRPr b="0" i="0" sz="2400" u="none" cap="none" strike="noStrike">
-              <a:solidFill>
-                <a:schemeClr val="dk1"/>
-              </a:solidFill>
-              <a:latin typeface="Calibri"/>
-              <a:ea typeface="Calibri"/>
-              <a:cs typeface="Calibri"/>
-              <a:sym typeface="Calibri"/>
-            </a:endParaRPr>
-          </a:p>
-        </p:txBody>
-      </p:sp>
-      <p:sp>
-        <p:nvSpPr>
-          <p:cNvPr id="456" name="Google Shape;456;p16"/>
-          <p:cNvSpPr/>
-          <p:nvPr/>
-        </p:nvSpPr>
-        <p:spPr>
-          <a:xfrm>
-            <a:off x="9303791" y="5431536"/>
-            <a:ext cx="2101520" cy="256032"/>
-          </a:xfrm>
-          <a:prstGeom prst="rect">
-            <a:avLst/>
-          </a:prstGeom>
-          <a:noFill/>
-          <a:ln>
-            <a:noFill/>
-          </a:ln>
-        </p:spPr>
-        <p:txBody>
-          <a:bodyPr anchorCtr="0" anchor="ctr" bIns="0" lIns="0" spcFirstLastPara="1" rIns="0" wrap="square" tIns="0">
-            <a:noAutofit/>
-          </a:bodyPr>
-          <a:lstStyle/>
-          <a:p>
-            <a:pPr indent="0" lvl="0" marL="0" marR="0" rtl="0" algn="l">
-              <a:spcBef>
-                <a:spcPts val="0"/>
-              </a:spcBef>
-              <a:spcAft>
-                <a:spcPts val="0"/>
-              </a:spcAft>
-              <a:buClr>
-                <a:srgbClr val="65708A"/>
-              </a:buClr>
-              <a:buSzPts val="1050"/>
-              <a:buFont typeface="Malgun Gothic"/>
-              <a:buNone/>
-            </a:pPr>
-            <a:r>
-              <a:rPr b="0" i="0" lang="en-US" sz="1050" u="none" cap="none" strike="noStrike">
-                <a:solidFill>
-                  <a:srgbClr val="65708A"/>
-                </a:solidFill>
-                <a:latin typeface="Malgun Gothic"/>
-                <a:ea typeface="Malgun Gothic"/>
-                <a:cs typeface="Malgun Gothic"/>
-                <a:sym typeface="Malgun Gothic"/>
-              </a:rPr>
-              <a:t>적재 응답 레코드</a:t>
-            </a:r>
-            <a:endParaRPr b="0" i="0" sz="1050" u="none" cap="none" strike="noStrike">
               <a:solidFill>
                 <a:schemeClr val="dk1"/>
               </a:solidFill>
@@ -9038,7 +7537,7 @@
                 <a:cs typeface="Malgun Gothic"/>
                 <a:sym typeface="Malgun Gothic"/>
               </a:rPr>
-              <a:t>10</a:t>
+              <a:t>9</a:t>
             </a:r>
             <a:endParaRPr b="0" i="0" sz="1000" u="none" cap="none" strike="noStrike">
               <a:solidFill>
@@ -9285,7 +7784,7 @@
                 <a:cs typeface="Malgun Gothic"/>
                 <a:sym typeface="Malgun Gothic"/>
               </a:rPr>
-              <a:t>인증</a:t>
+              <a:t>로그인</a:t>
             </a:r>
             <a:endParaRPr b="0" i="0" sz="1300" u="none" cap="none" strike="noStrike">
               <a:solidFill>
@@ -9348,7 +7847,7 @@
                 <a:cs typeface="Malgun Gothic"/>
                 <a:sym typeface="Malgun Gothic"/>
               </a:rPr>
-              <a:t>조직 선택 + 생년월일 6자리</a:t>
+              <a:t>조직 선택 후 생년월일 입력</a:t>
             </a:r>
             <a:endParaRPr b="0" i="0" sz="1100" u="none" cap="none" strike="noStrike">
               <a:solidFill>
@@ -9457,7 +7956,7 @@
                 <a:cs typeface="Malgun Gothic"/>
                 <a:sym typeface="Malgun Gothic"/>
               </a:rPr>
-              <a:t>사내 SSO 연동 및 권한 매핑</a:t>
+              <a:t>사내 시스템 계정으로 바로 로그인</a:t>
             </a:r>
             <a:endParaRPr b="0" i="0" sz="1100" u="none" cap="none" strike="noStrike">
               <a:solidFill>
@@ -9578,7 +8077,7 @@
                 <a:cs typeface="Malgun Gothic"/>
                 <a:sym typeface="Malgun Gothic"/>
               </a:rPr>
-              <a:t>데이터</a:t>
+              <a:t>진단 데이터</a:t>
             </a:r>
             <a:endParaRPr b="0" i="0" sz="1300" u="none" cap="none" strike="noStrike">
               <a:solidFill>
@@ -9641,7 +8140,7 @@
                 <a:cs typeface="Malgun Gothic"/>
                 <a:sym typeface="Malgun Gothic"/>
               </a:rPr>
-              <a:t>합성 더미 데이터 6개 부서</a:t>
+              <a:t>시연용 가상 데이터 6개 부서</a:t>
             </a:r>
             <a:endParaRPr b="0" i="0" sz="1100" u="none" cap="none" strike="noStrike">
               <a:solidFill>
@@ -9750,7 +8249,7 @@
                 <a:cs typeface="Malgun Gothic"/>
                 <a:sym typeface="Malgun Gothic"/>
               </a:rPr>
-              <a:t>실제 설문 결과 연동 및 조직 마스터 동기화</a:t>
+              <a:t>실제 설문 결과 자동 연동 · 조직 개편 반영</a:t>
             </a:r>
             <a:endParaRPr b="0" i="0" sz="1100" u="none" cap="none" strike="noStrike">
               <a:solidFill>
@@ -9871,7 +8370,7 @@
                 <a:cs typeface="Malgun Gothic"/>
                 <a:sym typeface="Malgun Gothic"/>
               </a:rPr>
-              <a:t>보안</a:t>
+              <a:t>정보 보호</a:t>
             </a:r>
             <a:endParaRPr b="0" i="0" sz="1300" u="none" cap="none" strike="noStrike">
               <a:solidFill>
@@ -9934,7 +8433,7 @@
                 <a:cs typeface="Malgun Gothic"/>
                 <a:sym typeface="Malgun Gothic"/>
               </a:rPr>
-              <a:t>SHA-256 해시 · 로컬 세션</a:t>
+              <a:t>시연 수준의 기본 보호</a:t>
             </a:r>
             <a:endParaRPr b="0" i="0" sz="1100" u="none" cap="none" strike="noStrike">
               <a:solidFill>
@@ -10043,7 +8542,7 @@
                 <a:cs typeface="Malgun Gothic"/>
                 <a:sym typeface="Malgun Gothic"/>
               </a:rPr>
-              <a:t>bcrypt/argon2 · 서버 세션 스토어 · 전송 암호화</a:t>
+              <a:t>전사 보안 기준 적용 · 열람 권한 세분화</a:t>
             </a:r>
             <a:endParaRPr b="0" i="0" sz="1100" u="none" cap="none" strike="noStrike">
               <a:solidFill>
@@ -10164,7 +8663,7 @@
                 <a:cs typeface="Malgun Gothic"/>
                 <a:sym typeface="Malgun Gothic"/>
               </a:rPr>
-              <a:t>AI 비용</a:t>
+              <a:t>AI 이용</a:t>
             </a:r>
             <a:endParaRPr b="0" i="0" sz="1300" u="none" cap="none" strike="noStrike">
               <a:solidFill>
@@ -10227,7 +8726,7 @@
                 <a:cs typeface="Malgun Gothic"/>
                 <a:sym typeface="Malgun Gothic"/>
               </a:rPr>
-              <a:t>질문마다 외부 API 호출</a:t>
+              <a:t>질문할 때마다 외부 AI 호출</a:t>
             </a:r>
             <a:endParaRPr b="0" i="0" sz="1100" u="none" cap="none" strike="noStrike">
               <a:solidFill>
@@ -10336,7 +8835,7 @@
                 <a:cs typeface="Malgun Gothic"/>
                 <a:sym typeface="Malgun Gothic"/>
               </a:rPr>
-              <a:t>응답 캐싱 및 호출량 상한 정책</a:t>
+              <a:t>자주 나오는 답변 재사용으로 비용 관리</a:t>
             </a:r>
             <a:endParaRPr b="0" i="0" sz="1100" u="none" cap="none" strike="noStrike">
               <a:solidFill>
@@ -10457,7 +8956,7 @@
                 <a:cs typeface="Malgun Gothic"/>
                 <a:sym typeface="Malgun Gothic"/>
               </a:rPr>
-              <a:t>운영</a:t>
+              <a:t>동시 사용</a:t>
             </a:r>
             <a:endParaRPr b="0" i="0" sz="1300" u="none" cap="none" strike="noStrike">
               <a:solidFill>
@@ -10520,7 +9019,7 @@
                 <a:cs typeface="Malgun Gothic"/>
                 <a:sym typeface="Malgun Gothic"/>
               </a:rPr>
-              <a:t>단일 프로세스 로컬 구동</a:t>
+              <a:t>1대에서 시연용으로 구동</a:t>
             </a:r>
             <a:endParaRPr b="0" i="0" sz="1100" u="none" cap="none" strike="noStrike">
               <a:solidFill>
@@ -10629,7 +9128,7 @@
                 <a:cs typeface="Malgun Gothic"/>
                 <a:sym typeface="Malgun Gothic"/>
               </a:rPr>
-              <a:t>다중 워커 구성 및 DB 이관(PostgreSQL 등)</a:t>
+              <a:t>전 부서가 동시에 접속하는 운영 환경</a:t>
             </a:r>
             <a:endParaRPr b="0" i="0" sz="1100" u="none" cap="none" strike="noStrike">
               <a:solidFill>
@@ -16476,2345 +14975,6 @@
 </p:sld>
 </file>
 
-<file path=ppt/slides/slide5.xml><?xml version="1.0" encoding="utf-8"?>
-<p:sld xmlns:a="http://schemas.openxmlformats.org/drawingml/2006/main" xmlns:r="http://schemas.openxmlformats.org/officeDocument/2006/relationships" xmlns:mc="http://schemas.openxmlformats.org/markup-compatibility/2006" xmlns:mv="urn:schemas-microsoft-com:mac:vml" xmlns:p="http://schemas.openxmlformats.org/presentationml/2006/main" xmlns:c="http://schemas.openxmlformats.org/drawingml/2006/chart" xmlns:dgm="http://schemas.openxmlformats.org/drawingml/2006/diagram" xmlns:o="urn:schemas-microsoft-com:office:office" xmlns:v="urn:schemas-microsoft-com:vml" xmlns:pvml="urn:schemas-microsoft-com:office:powerpoint" xmlns:com="http://schemas.openxmlformats.org/drawingml/2006/compatibility" xmlns:p14="http://schemas.microsoft.com/office/powerpoint/2010/main" xmlns:p15="http://schemas.microsoft.com/office/powerpoint/2012/main" xmlns:ahyp="http://schemas.microsoft.com/office/drawing/2018/hyperlinkcolor">
-  <p:cSld>
-    <p:bg>
-      <p:bgPr>
-        <a:solidFill>
-          <a:srgbClr val="F5F7FB"/>
-        </a:solidFill>
-      </p:bgPr>
-    </p:bg>
-    <p:spTree>
-      <p:nvGrpSpPr>
-        <p:cNvPr id="121" name="Shape 121"/>
-        <p:cNvGrpSpPr/>
-        <p:nvPr/>
-      </p:nvGrpSpPr>
-      <p:grpSpPr>
-        <a:xfrm>
-          <a:off x="0" y="0"/>
-          <a:ext cx="0" cy="0"/>
-          <a:chOff x="0" y="0"/>
-          <a:chExt cx="0" cy="0"/>
-        </a:xfrm>
-      </p:grpSpPr>
-      <p:sp>
-        <p:nvSpPr>
-          <p:cNvPr id="122" name="Google Shape;122;p7"/>
-          <p:cNvSpPr/>
-          <p:nvPr/>
-        </p:nvSpPr>
-        <p:spPr>
-          <a:xfrm>
-            <a:off x="566928" y="365760"/>
-            <a:ext cx="11057839" cy="219456"/>
-          </a:xfrm>
-          <a:prstGeom prst="rect">
-            <a:avLst/>
-          </a:prstGeom>
-          <a:noFill/>
-          <a:ln>
-            <a:noFill/>
-          </a:ln>
-        </p:spPr>
-        <p:txBody>
-          <a:bodyPr anchorCtr="0" anchor="ctr" bIns="0" lIns="0" spcFirstLastPara="1" rIns="0" wrap="square" tIns="0">
-            <a:noAutofit/>
-          </a:bodyPr>
-          <a:lstStyle/>
-          <a:p>
-            <a:pPr indent="0" lvl="0" marL="0" marR="0" rtl="0" algn="l">
-              <a:spcBef>
-                <a:spcPts val="0"/>
-              </a:spcBef>
-              <a:spcAft>
-                <a:spcPts val="0"/>
-              </a:spcAft>
-              <a:buClr>
-                <a:srgbClr val="0098D9"/>
-              </a:buClr>
-              <a:buSzPts val="1100"/>
-              <a:buFont typeface="Malgun Gothic"/>
-              <a:buNone/>
-            </a:pPr>
-            <a:r>
-              <a:rPr b="1" i="0" lang="en-US" sz="1100" u="none" cap="none" strike="noStrike">
-                <a:solidFill>
-                  <a:srgbClr val="0098D9"/>
-                </a:solidFill>
-                <a:latin typeface="Malgun Gothic"/>
-                <a:ea typeface="Malgun Gothic"/>
-                <a:cs typeface="Malgun Gothic"/>
-                <a:sym typeface="Malgun Gothic"/>
-              </a:rPr>
-              <a:t>ARCHITECTURE</a:t>
-            </a:r>
-            <a:endParaRPr b="0" i="0" sz="1100" u="none" cap="none" strike="noStrike">
-              <a:solidFill>
-                <a:schemeClr val="dk1"/>
-              </a:solidFill>
-              <a:latin typeface="Calibri"/>
-              <a:ea typeface="Calibri"/>
-              <a:cs typeface="Calibri"/>
-              <a:sym typeface="Calibri"/>
-            </a:endParaRPr>
-          </a:p>
-        </p:txBody>
-      </p:sp>
-      <p:sp>
-        <p:nvSpPr>
-          <p:cNvPr id="123" name="Google Shape;123;p7"/>
-          <p:cNvSpPr/>
-          <p:nvPr/>
-        </p:nvSpPr>
-        <p:spPr>
-          <a:xfrm>
-            <a:off x="566928" y="603504"/>
-            <a:ext cx="11057839" cy="566928"/>
-          </a:xfrm>
-          <a:prstGeom prst="rect">
-            <a:avLst/>
-          </a:prstGeom>
-          <a:noFill/>
-          <a:ln>
-            <a:noFill/>
-          </a:ln>
-        </p:spPr>
-        <p:txBody>
-          <a:bodyPr anchorCtr="0" anchor="ctr" bIns="0" lIns="0" spcFirstLastPara="1" rIns="0" wrap="square" tIns="0">
-            <a:noAutofit/>
-          </a:bodyPr>
-          <a:lstStyle/>
-          <a:p>
-            <a:pPr indent="0" lvl="0" marL="0" marR="0" rtl="0" algn="l">
-              <a:spcBef>
-                <a:spcPts val="0"/>
-              </a:spcBef>
-              <a:spcAft>
-                <a:spcPts val="0"/>
-              </a:spcAft>
-              <a:buClr>
-                <a:srgbClr val="002D5A"/>
-              </a:buClr>
-              <a:buSzPts val="3000"/>
-              <a:buFont typeface="Malgun Gothic"/>
-              <a:buNone/>
-            </a:pPr>
-            <a:r>
-              <a:rPr b="1" i="0" lang="en-US" sz="3000" u="none" cap="none" strike="noStrike">
-                <a:solidFill>
-                  <a:srgbClr val="002D5A"/>
-                </a:solidFill>
-                <a:latin typeface="Malgun Gothic"/>
-                <a:ea typeface="Malgun Gothic"/>
-                <a:cs typeface="Malgun Gothic"/>
-                <a:sym typeface="Malgun Gothic"/>
-              </a:rPr>
-              <a:t>역할을 나눠 해석 로직을 한 곳에 집약</a:t>
-            </a:r>
-            <a:endParaRPr b="0" i="0" sz="3000" u="none" cap="none" strike="noStrike">
-              <a:solidFill>
-                <a:schemeClr val="dk1"/>
-              </a:solidFill>
-              <a:latin typeface="Calibri"/>
-              <a:ea typeface="Calibri"/>
-              <a:cs typeface="Calibri"/>
-              <a:sym typeface="Calibri"/>
-            </a:endParaRPr>
-          </a:p>
-        </p:txBody>
-      </p:sp>
-      <p:sp>
-        <p:nvSpPr>
-          <p:cNvPr id="124" name="Google Shape;124;p7"/>
-          <p:cNvSpPr/>
-          <p:nvPr/>
-        </p:nvSpPr>
-        <p:spPr>
-          <a:xfrm>
-            <a:off x="11076127" y="6355080"/>
-            <a:ext cx="548640" cy="256032"/>
-          </a:xfrm>
-          <a:prstGeom prst="rect">
-            <a:avLst/>
-          </a:prstGeom>
-          <a:noFill/>
-          <a:ln>
-            <a:noFill/>
-          </a:ln>
-        </p:spPr>
-        <p:txBody>
-          <a:bodyPr anchorCtr="0" anchor="ctr" bIns="0" lIns="0" spcFirstLastPara="1" rIns="0" wrap="square" tIns="0">
-            <a:noAutofit/>
-          </a:bodyPr>
-          <a:lstStyle/>
-          <a:p>
-            <a:pPr indent="0" lvl="0" marL="0" marR="0" rtl="0" algn="r">
-              <a:spcBef>
-                <a:spcPts val="0"/>
-              </a:spcBef>
-              <a:spcAft>
-                <a:spcPts val="0"/>
-              </a:spcAft>
-              <a:buClr>
-                <a:srgbClr val="65708A"/>
-              </a:buClr>
-              <a:buSzPts val="1000"/>
-              <a:buFont typeface="Malgun Gothic"/>
-              <a:buNone/>
-            </a:pPr>
-            <a:r>
-              <a:rPr b="0" i="0" lang="en-US" sz="1000" u="none" cap="none" strike="noStrike">
-                <a:solidFill>
-                  <a:srgbClr val="65708A"/>
-                </a:solidFill>
-                <a:latin typeface="Malgun Gothic"/>
-                <a:ea typeface="Malgun Gothic"/>
-                <a:cs typeface="Malgun Gothic"/>
-                <a:sym typeface="Malgun Gothic"/>
-              </a:rPr>
-              <a:t>4</a:t>
-            </a:r>
-            <a:endParaRPr b="0" i="0" sz="1000" u="none" cap="none" strike="noStrike">
-              <a:solidFill>
-                <a:schemeClr val="dk1"/>
-              </a:solidFill>
-              <a:latin typeface="Calibri"/>
-              <a:ea typeface="Calibri"/>
-              <a:cs typeface="Calibri"/>
-              <a:sym typeface="Calibri"/>
-            </a:endParaRPr>
-          </a:p>
-        </p:txBody>
-      </p:sp>
-      <p:sp>
-        <p:nvSpPr>
-          <p:cNvPr id="125" name="Google Shape;125;p7"/>
-          <p:cNvSpPr/>
-          <p:nvPr/>
-        </p:nvSpPr>
-        <p:spPr>
-          <a:xfrm>
-            <a:off x="566928" y="1426464"/>
-            <a:ext cx="11057839" cy="1481328"/>
-          </a:xfrm>
-          <a:prstGeom prst="roundRect">
-            <a:avLst>
-              <a:gd fmla="val 4938" name="adj"/>
-            </a:avLst>
-          </a:prstGeom>
-          <a:solidFill>
-            <a:srgbClr val="FFFFFF"/>
-          </a:solidFill>
-          <a:ln cap="flat" cmpd="sng" w="12700">
-            <a:solidFill>
-              <a:srgbClr val="DFE5EF"/>
-            </a:solidFill>
-            <a:prstDash val="solid"/>
-            <a:round/>
-            <a:headEnd len="sm" w="sm" type="none"/>
-            <a:tailEnd len="sm" w="sm" type="none"/>
-          </a:ln>
-          <a:effectLst>
-            <a:outerShdw blurRad="127000" rotWithShape="0" algn="bl" dir="5400000" dist="25400">
-              <a:srgbClr val="8894A8">
-                <a:alpha val="18039"/>
-              </a:srgbClr>
-            </a:outerShdw>
-          </a:effectLst>
-        </p:spPr>
-        <p:txBody>
-          <a:bodyPr anchorCtr="0" anchor="ctr" bIns="91425" lIns="91425" spcFirstLastPara="1" rIns="91425" wrap="square" tIns="91425">
-            <a:noAutofit/>
-          </a:bodyPr>
-          <a:lstStyle/>
-          <a:p>
-            <a:pPr indent="0" lvl="0" marL="0" rtl="0" algn="l">
-              <a:spcBef>
-                <a:spcPts val="0"/>
-              </a:spcBef>
-              <a:spcAft>
-                <a:spcPts val="0"/>
-              </a:spcAft>
-              <a:buNone/>
-            </a:pPr>
-            <a:r>
-              <a:t/>
-            </a:r>
-            <a:endParaRPr/>
-          </a:p>
-        </p:txBody>
-      </p:sp>
-      <p:sp>
-        <p:nvSpPr>
-          <p:cNvPr id="126" name="Google Shape;126;p7"/>
-          <p:cNvSpPr/>
-          <p:nvPr/>
-        </p:nvSpPr>
-        <p:spPr>
-          <a:xfrm>
-            <a:off x="804672" y="1664208"/>
-            <a:ext cx="1572768" cy="420624"/>
-          </a:xfrm>
-          <a:prstGeom prst="roundRect">
-            <a:avLst>
-              <a:gd fmla="val 19565" name="adj"/>
-            </a:avLst>
-          </a:prstGeom>
-          <a:solidFill>
-            <a:srgbClr val="004381"/>
-          </a:solidFill>
-          <a:ln>
-            <a:noFill/>
-          </a:ln>
-        </p:spPr>
-        <p:txBody>
-          <a:bodyPr anchorCtr="0" anchor="ctr" bIns="91425" lIns="91425" spcFirstLastPara="1" rIns="91425" wrap="square" tIns="91425">
-            <a:noAutofit/>
-          </a:bodyPr>
-          <a:lstStyle/>
-          <a:p>
-            <a:pPr indent="0" lvl="0" marL="0" rtl="0" algn="l">
-              <a:spcBef>
-                <a:spcPts val="0"/>
-              </a:spcBef>
-              <a:spcAft>
-                <a:spcPts val="0"/>
-              </a:spcAft>
-              <a:buNone/>
-            </a:pPr>
-            <a:r>
-              <a:t/>
-            </a:r>
-            <a:endParaRPr/>
-          </a:p>
-        </p:txBody>
-      </p:sp>
-      <p:sp>
-        <p:nvSpPr>
-          <p:cNvPr id="127" name="Google Shape;127;p7"/>
-          <p:cNvSpPr/>
-          <p:nvPr/>
-        </p:nvSpPr>
-        <p:spPr>
-          <a:xfrm>
-            <a:off x="804672" y="1664208"/>
-            <a:ext cx="1572768" cy="420624"/>
-          </a:xfrm>
-          <a:prstGeom prst="rect">
-            <a:avLst/>
-          </a:prstGeom>
-          <a:noFill/>
-          <a:ln>
-            <a:noFill/>
-          </a:ln>
-        </p:spPr>
-        <p:txBody>
-          <a:bodyPr anchorCtr="0" anchor="ctr" bIns="0" lIns="0" spcFirstLastPara="1" rIns="0" wrap="square" tIns="0">
-            <a:noAutofit/>
-          </a:bodyPr>
-          <a:lstStyle/>
-          <a:p>
-            <a:pPr indent="0" lvl="0" marL="0" marR="0" rtl="0" algn="ctr">
-              <a:spcBef>
-                <a:spcPts val="0"/>
-              </a:spcBef>
-              <a:spcAft>
-                <a:spcPts val="0"/>
-              </a:spcAft>
-              <a:buClr>
-                <a:srgbClr val="FFFFFF"/>
-              </a:buClr>
-              <a:buSzPts val="1150"/>
-              <a:buFont typeface="Malgun Gothic"/>
-              <a:buNone/>
-            </a:pPr>
-            <a:r>
-              <a:rPr b="1" i="0" lang="en-US" sz="1150" u="none" cap="none" strike="noStrike">
-                <a:solidFill>
-                  <a:srgbClr val="FFFFFF"/>
-                </a:solidFill>
-                <a:latin typeface="Malgun Gothic"/>
-                <a:ea typeface="Malgun Gothic"/>
-                <a:cs typeface="Malgun Gothic"/>
-                <a:sym typeface="Malgun Gothic"/>
-              </a:rPr>
-              <a:t>Presentation</a:t>
-            </a:r>
-            <a:endParaRPr b="0" i="0" sz="1150" u="none" cap="none" strike="noStrike">
-              <a:solidFill>
-                <a:schemeClr val="dk1"/>
-              </a:solidFill>
-              <a:latin typeface="Calibri"/>
-              <a:ea typeface="Calibri"/>
-              <a:cs typeface="Calibri"/>
-              <a:sym typeface="Calibri"/>
-            </a:endParaRPr>
-          </a:p>
-        </p:txBody>
-      </p:sp>
-      <p:sp>
-        <p:nvSpPr>
-          <p:cNvPr id="128" name="Google Shape;128;p7"/>
-          <p:cNvSpPr/>
-          <p:nvPr/>
-        </p:nvSpPr>
-        <p:spPr>
-          <a:xfrm>
-            <a:off x="2596896" y="1609344"/>
-            <a:ext cx="2753258" cy="1097280"/>
-          </a:xfrm>
-          <a:prstGeom prst="roundRect">
-            <a:avLst>
-              <a:gd fmla="val 5833" name="adj"/>
-            </a:avLst>
-          </a:prstGeom>
-          <a:solidFill>
-            <a:srgbClr val="F5F7FB"/>
-          </a:solidFill>
-          <a:ln cap="flat" cmpd="sng" w="12700">
-            <a:solidFill>
-              <a:srgbClr val="DFE5EF"/>
-            </a:solidFill>
-            <a:prstDash val="solid"/>
-            <a:round/>
-            <a:headEnd len="sm" w="sm" type="none"/>
-            <a:tailEnd len="sm" w="sm" type="none"/>
-          </a:ln>
-        </p:spPr>
-        <p:txBody>
-          <a:bodyPr anchorCtr="0" anchor="ctr" bIns="91425" lIns="91425" spcFirstLastPara="1" rIns="91425" wrap="square" tIns="91425">
-            <a:noAutofit/>
-          </a:bodyPr>
-          <a:lstStyle/>
-          <a:p>
-            <a:pPr indent="0" lvl="0" marL="0" rtl="0" algn="l">
-              <a:spcBef>
-                <a:spcPts val="0"/>
-              </a:spcBef>
-              <a:spcAft>
-                <a:spcPts val="0"/>
-              </a:spcAft>
-              <a:buNone/>
-            </a:pPr>
-            <a:r>
-              <a:t/>
-            </a:r>
-            <a:endParaRPr/>
-          </a:p>
-        </p:txBody>
-      </p:sp>
-      <p:sp>
-        <p:nvSpPr>
-          <p:cNvPr id="129" name="Google Shape;129;p7"/>
-          <p:cNvSpPr/>
-          <p:nvPr/>
-        </p:nvSpPr>
-        <p:spPr>
-          <a:xfrm>
-            <a:off x="2779776" y="1755648"/>
-            <a:ext cx="2387498" cy="274320"/>
-          </a:xfrm>
-          <a:prstGeom prst="rect">
-            <a:avLst/>
-          </a:prstGeom>
-          <a:noFill/>
-          <a:ln>
-            <a:noFill/>
-          </a:ln>
-        </p:spPr>
-        <p:txBody>
-          <a:bodyPr anchorCtr="0" anchor="ctr" bIns="0" lIns="0" spcFirstLastPara="1" rIns="0" wrap="square" tIns="0">
-            <a:noAutofit/>
-          </a:bodyPr>
-          <a:lstStyle/>
-          <a:p>
-            <a:pPr indent="0" lvl="0" marL="0" marR="0" rtl="0" algn="l">
-              <a:spcBef>
-                <a:spcPts val="0"/>
-              </a:spcBef>
-              <a:spcAft>
-                <a:spcPts val="0"/>
-              </a:spcAft>
-              <a:buClr>
-                <a:srgbClr val="002D5A"/>
-              </a:buClr>
-              <a:buSzPts val="1200"/>
-              <a:buFont typeface="Malgun Gothic"/>
-              <a:buNone/>
-            </a:pPr>
-            <a:r>
-              <a:rPr b="1" i="0" lang="en-US" sz="1200" u="none" cap="none" strike="noStrike">
-                <a:solidFill>
-                  <a:srgbClr val="002D5A"/>
-                </a:solidFill>
-                <a:latin typeface="Malgun Gothic"/>
-                <a:ea typeface="Malgun Gothic"/>
-                <a:cs typeface="Malgun Gothic"/>
-                <a:sym typeface="Malgun Gothic"/>
-              </a:rPr>
-              <a:t>FastAPI + Jinja2</a:t>
-            </a:r>
-            <a:endParaRPr b="0" i="0" sz="1200" u="none" cap="none" strike="noStrike">
-              <a:solidFill>
-                <a:schemeClr val="dk1"/>
-              </a:solidFill>
-              <a:latin typeface="Calibri"/>
-              <a:ea typeface="Calibri"/>
-              <a:cs typeface="Calibri"/>
-              <a:sym typeface="Calibri"/>
-            </a:endParaRPr>
-          </a:p>
-        </p:txBody>
-      </p:sp>
-      <p:sp>
-        <p:nvSpPr>
-          <p:cNvPr id="130" name="Google Shape;130;p7"/>
-          <p:cNvSpPr/>
-          <p:nvPr/>
-        </p:nvSpPr>
-        <p:spPr>
-          <a:xfrm>
-            <a:off x="2779776" y="2048256"/>
-            <a:ext cx="2387498" cy="566928"/>
-          </a:xfrm>
-          <a:prstGeom prst="rect">
-            <a:avLst/>
-          </a:prstGeom>
-          <a:noFill/>
-          <a:ln>
-            <a:noFill/>
-          </a:ln>
-        </p:spPr>
-        <p:txBody>
-          <a:bodyPr anchorCtr="0" anchor="ctr" bIns="0" lIns="0" spcFirstLastPara="1" rIns="0" wrap="square" tIns="0">
-            <a:noAutofit/>
-          </a:bodyPr>
-          <a:lstStyle/>
-          <a:p>
-            <a:pPr indent="0" lvl="0" marL="0" marR="0" rtl="0" algn="l">
-              <a:lnSpc>
-                <a:spcPct val="140000"/>
-              </a:lnSpc>
-              <a:spcBef>
-                <a:spcPts val="0"/>
-              </a:spcBef>
-              <a:spcAft>
-                <a:spcPts val="0"/>
-              </a:spcAft>
-              <a:buClr>
-                <a:srgbClr val="65708A"/>
-              </a:buClr>
-              <a:buSzPts val="1000"/>
-              <a:buFont typeface="Malgun Gothic"/>
-              <a:buNone/>
-            </a:pPr>
-            <a:r>
-              <a:rPr b="0" i="0" lang="en-US" sz="1000" u="none" cap="none" strike="noStrike">
-                <a:solidFill>
-                  <a:srgbClr val="65708A"/>
-                </a:solidFill>
-                <a:latin typeface="Malgun Gothic"/>
-                <a:ea typeface="Malgun Gothic"/>
-                <a:cs typeface="Malgun Gothic"/>
-                <a:sym typeface="Malgun Gothic"/>
-              </a:rPr>
-              <a:t>서버 렌더링 4개 화면</a:t>
-            </a:r>
-            <a:endParaRPr b="0" i="0" sz="1000" u="none" cap="none" strike="noStrike">
-              <a:solidFill>
-                <a:schemeClr val="dk1"/>
-              </a:solidFill>
-              <a:latin typeface="Calibri"/>
-              <a:ea typeface="Calibri"/>
-              <a:cs typeface="Calibri"/>
-              <a:sym typeface="Calibri"/>
-            </a:endParaRPr>
-          </a:p>
-        </p:txBody>
-      </p:sp>
-      <p:sp>
-        <p:nvSpPr>
-          <p:cNvPr id="131" name="Google Shape;131;p7"/>
-          <p:cNvSpPr/>
-          <p:nvPr/>
-        </p:nvSpPr>
-        <p:spPr>
-          <a:xfrm>
-            <a:off x="5606186" y="1609344"/>
-            <a:ext cx="2753258" cy="1097280"/>
-          </a:xfrm>
-          <a:prstGeom prst="roundRect">
-            <a:avLst>
-              <a:gd fmla="val 5833" name="adj"/>
-            </a:avLst>
-          </a:prstGeom>
-          <a:solidFill>
-            <a:srgbClr val="F5F7FB"/>
-          </a:solidFill>
-          <a:ln cap="flat" cmpd="sng" w="12700">
-            <a:solidFill>
-              <a:srgbClr val="DFE5EF"/>
-            </a:solidFill>
-            <a:prstDash val="solid"/>
-            <a:round/>
-            <a:headEnd len="sm" w="sm" type="none"/>
-            <a:tailEnd len="sm" w="sm" type="none"/>
-          </a:ln>
-        </p:spPr>
-        <p:txBody>
-          <a:bodyPr anchorCtr="0" anchor="ctr" bIns="91425" lIns="91425" spcFirstLastPara="1" rIns="91425" wrap="square" tIns="91425">
-            <a:noAutofit/>
-          </a:bodyPr>
-          <a:lstStyle/>
-          <a:p>
-            <a:pPr indent="0" lvl="0" marL="0" rtl="0" algn="l">
-              <a:spcBef>
-                <a:spcPts val="0"/>
-              </a:spcBef>
-              <a:spcAft>
-                <a:spcPts val="0"/>
-              </a:spcAft>
-              <a:buNone/>
-            </a:pPr>
-            <a:r>
-              <a:t/>
-            </a:r>
-            <a:endParaRPr/>
-          </a:p>
-        </p:txBody>
-      </p:sp>
-      <p:sp>
-        <p:nvSpPr>
-          <p:cNvPr id="132" name="Google Shape;132;p7"/>
-          <p:cNvSpPr/>
-          <p:nvPr/>
-        </p:nvSpPr>
-        <p:spPr>
-          <a:xfrm>
-            <a:off x="5789066" y="1755648"/>
-            <a:ext cx="2387498" cy="274320"/>
-          </a:xfrm>
-          <a:prstGeom prst="rect">
-            <a:avLst/>
-          </a:prstGeom>
-          <a:noFill/>
-          <a:ln>
-            <a:noFill/>
-          </a:ln>
-        </p:spPr>
-        <p:txBody>
-          <a:bodyPr anchorCtr="0" anchor="ctr" bIns="0" lIns="0" spcFirstLastPara="1" rIns="0" wrap="square" tIns="0">
-            <a:noAutofit/>
-          </a:bodyPr>
-          <a:lstStyle/>
-          <a:p>
-            <a:pPr indent="0" lvl="0" marL="0" marR="0" rtl="0" algn="l">
-              <a:spcBef>
-                <a:spcPts val="0"/>
-              </a:spcBef>
-              <a:spcAft>
-                <a:spcPts val="0"/>
-              </a:spcAft>
-              <a:buClr>
-                <a:srgbClr val="002D5A"/>
-              </a:buClr>
-              <a:buSzPts val="1200"/>
-              <a:buFont typeface="Malgun Gothic"/>
-              <a:buNone/>
-            </a:pPr>
-            <a:r>
-              <a:rPr b="1" i="0" lang="en-US" sz="1200" u="none" cap="none" strike="noStrike">
-                <a:solidFill>
-                  <a:srgbClr val="002D5A"/>
-                </a:solidFill>
-                <a:latin typeface="Malgun Gothic"/>
-                <a:ea typeface="Malgun Gothic"/>
-                <a:cs typeface="Malgun Gothic"/>
-                <a:sym typeface="Malgun Gothic"/>
-              </a:rPr>
-              <a:t>Chart.js (로컬 번들)</a:t>
-            </a:r>
-            <a:endParaRPr b="0" i="0" sz="1200" u="none" cap="none" strike="noStrike">
-              <a:solidFill>
-                <a:schemeClr val="dk1"/>
-              </a:solidFill>
-              <a:latin typeface="Calibri"/>
-              <a:ea typeface="Calibri"/>
-              <a:cs typeface="Calibri"/>
-              <a:sym typeface="Calibri"/>
-            </a:endParaRPr>
-          </a:p>
-        </p:txBody>
-      </p:sp>
-      <p:sp>
-        <p:nvSpPr>
-          <p:cNvPr id="133" name="Google Shape;133;p7"/>
-          <p:cNvSpPr/>
-          <p:nvPr/>
-        </p:nvSpPr>
-        <p:spPr>
-          <a:xfrm>
-            <a:off x="5789066" y="2048256"/>
-            <a:ext cx="2387498" cy="566928"/>
-          </a:xfrm>
-          <a:prstGeom prst="rect">
-            <a:avLst/>
-          </a:prstGeom>
-          <a:noFill/>
-          <a:ln>
-            <a:noFill/>
-          </a:ln>
-        </p:spPr>
-        <p:txBody>
-          <a:bodyPr anchorCtr="0" anchor="ctr" bIns="0" lIns="0" spcFirstLastPara="1" rIns="0" wrap="square" tIns="0">
-            <a:noAutofit/>
-          </a:bodyPr>
-          <a:lstStyle/>
-          <a:p>
-            <a:pPr indent="0" lvl="0" marL="0" marR="0" rtl="0" algn="l">
-              <a:lnSpc>
-                <a:spcPct val="140000"/>
-              </a:lnSpc>
-              <a:spcBef>
-                <a:spcPts val="0"/>
-              </a:spcBef>
-              <a:spcAft>
-                <a:spcPts val="0"/>
-              </a:spcAft>
-              <a:buClr>
-                <a:srgbClr val="65708A"/>
-              </a:buClr>
-              <a:buSzPts val="1000"/>
-              <a:buFont typeface="Malgun Gothic"/>
-              <a:buNone/>
-            </a:pPr>
-            <a:r>
-              <a:rPr b="0" i="0" lang="en-US" sz="1000" u="none" cap="none" strike="noStrike">
-                <a:solidFill>
-                  <a:srgbClr val="65708A"/>
-                </a:solidFill>
-                <a:latin typeface="Malgun Gothic"/>
-                <a:ea typeface="Malgun Gothic"/>
-                <a:cs typeface="Malgun Gothic"/>
-                <a:sym typeface="Malgun Gothic"/>
-              </a:rPr>
-              <a:t>인터넷 없이도 차트 렌더링</a:t>
-            </a:r>
-            <a:endParaRPr b="0" i="0" sz="1000" u="none" cap="none" strike="noStrike">
-              <a:solidFill>
-                <a:schemeClr val="dk1"/>
-              </a:solidFill>
-              <a:latin typeface="Calibri"/>
-              <a:ea typeface="Calibri"/>
-              <a:cs typeface="Calibri"/>
-              <a:sym typeface="Calibri"/>
-            </a:endParaRPr>
-          </a:p>
-        </p:txBody>
-      </p:sp>
-      <p:sp>
-        <p:nvSpPr>
-          <p:cNvPr id="134" name="Google Shape;134;p7"/>
-          <p:cNvSpPr/>
-          <p:nvPr/>
-        </p:nvSpPr>
-        <p:spPr>
-          <a:xfrm>
-            <a:off x="8615477" y="1609344"/>
-            <a:ext cx="2753258" cy="1097280"/>
-          </a:xfrm>
-          <a:prstGeom prst="roundRect">
-            <a:avLst>
-              <a:gd fmla="val 5833" name="adj"/>
-            </a:avLst>
-          </a:prstGeom>
-          <a:solidFill>
-            <a:srgbClr val="F5F7FB"/>
-          </a:solidFill>
-          <a:ln cap="flat" cmpd="sng" w="12700">
-            <a:solidFill>
-              <a:srgbClr val="DFE5EF"/>
-            </a:solidFill>
-            <a:prstDash val="solid"/>
-            <a:round/>
-            <a:headEnd len="sm" w="sm" type="none"/>
-            <a:tailEnd len="sm" w="sm" type="none"/>
-          </a:ln>
-        </p:spPr>
-        <p:txBody>
-          <a:bodyPr anchorCtr="0" anchor="ctr" bIns="91425" lIns="91425" spcFirstLastPara="1" rIns="91425" wrap="square" tIns="91425">
-            <a:noAutofit/>
-          </a:bodyPr>
-          <a:lstStyle/>
-          <a:p>
-            <a:pPr indent="0" lvl="0" marL="0" rtl="0" algn="l">
-              <a:spcBef>
-                <a:spcPts val="0"/>
-              </a:spcBef>
-              <a:spcAft>
-                <a:spcPts val="0"/>
-              </a:spcAft>
-              <a:buNone/>
-            </a:pPr>
-            <a:r>
-              <a:t/>
-            </a:r>
-            <a:endParaRPr/>
-          </a:p>
-        </p:txBody>
-      </p:sp>
-      <p:sp>
-        <p:nvSpPr>
-          <p:cNvPr id="135" name="Google Shape;135;p7"/>
-          <p:cNvSpPr/>
-          <p:nvPr/>
-        </p:nvSpPr>
-        <p:spPr>
-          <a:xfrm>
-            <a:off x="8798357" y="1755648"/>
-            <a:ext cx="2387498" cy="274320"/>
-          </a:xfrm>
-          <a:prstGeom prst="rect">
-            <a:avLst/>
-          </a:prstGeom>
-          <a:noFill/>
-          <a:ln>
-            <a:noFill/>
-          </a:ln>
-        </p:spPr>
-        <p:txBody>
-          <a:bodyPr anchorCtr="0" anchor="ctr" bIns="0" lIns="0" spcFirstLastPara="1" rIns="0" wrap="square" tIns="0">
-            <a:noAutofit/>
-          </a:bodyPr>
-          <a:lstStyle/>
-          <a:p>
-            <a:pPr indent="0" lvl="0" marL="0" marR="0" rtl="0" algn="l">
-              <a:spcBef>
-                <a:spcPts val="0"/>
-              </a:spcBef>
-              <a:spcAft>
-                <a:spcPts val="0"/>
-              </a:spcAft>
-              <a:buClr>
-                <a:srgbClr val="002D5A"/>
-              </a:buClr>
-              <a:buSzPts val="1200"/>
-              <a:buFont typeface="Malgun Gothic"/>
-              <a:buNone/>
-            </a:pPr>
-            <a:r>
-              <a:rPr b="1" i="0" lang="en-US" sz="1200" u="none" cap="none" strike="noStrike">
-                <a:solidFill>
-                  <a:srgbClr val="002D5A"/>
-                </a:solidFill>
-                <a:latin typeface="Malgun Gothic"/>
-                <a:ea typeface="Malgun Gothic"/>
-                <a:cs typeface="Malgun Gothic"/>
-                <a:sym typeface="Malgun Gothic"/>
-              </a:rPr>
-              <a:t>report.js / admin.js</a:t>
-            </a:r>
-            <a:endParaRPr b="0" i="0" sz="1200" u="none" cap="none" strike="noStrike">
-              <a:solidFill>
-                <a:schemeClr val="dk1"/>
-              </a:solidFill>
-              <a:latin typeface="Calibri"/>
-              <a:ea typeface="Calibri"/>
-              <a:cs typeface="Calibri"/>
-              <a:sym typeface="Calibri"/>
-            </a:endParaRPr>
-          </a:p>
-        </p:txBody>
-      </p:sp>
-      <p:sp>
-        <p:nvSpPr>
-          <p:cNvPr id="136" name="Google Shape;136;p7"/>
-          <p:cNvSpPr/>
-          <p:nvPr/>
-        </p:nvSpPr>
-        <p:spPr>
-          <a:xfrm>
-            <a:off x="8798357" y="2048256"/>
-            <a:ext cx="2387498" cy="566928"/>
-          </a:xfrm>
-          <a:prstGeom prst="rect">
-            <a:avLst/>
-          </a:prstGeom>
-          <a:noFill/>
-          <a:ln>
-            <a:noFill/>
-          </a:ln>
-        </p:spPr>
-        <p:txBody>
-          <a:bodyPr anchorCtr="0" anchor="ctr" bIns="0" lIns="0" spcFirstLastPara="1" rIns="0" wrap="square" tIns="0">
-            <a:noAutofit/>
-          </a:bodyPr>
-          <a:lstStyle/>
-          <a:p>
-            <a:pPr indent="0" lvl="0" marL="0" marR="0" rtl="0" algn="l">
-              <a:lnSpc>
-                <a:spcPct val="140000"/>
-              </a:lnSpc>
-              <a:spcBef>
-                <a:spcPts val="0"/>
-              </a:spcBef>
-              <a:spcAft>
-                <a:spcPts val="0"/>
-              </a:spcAft>
-              <a:buClr>
-                <a:srgbClr val="65708A"/>
-              </a:buClr>
-              <a:buSzPts val="1000"/>
-              <a:buFont typeface="Malgun Gothic"/>
-              <a:buNone/>
-            </a:pPr>
-            <a:r>
-              <a:rPr b="0" i="0" lang="en-US" sz="1000" u="none" cap="none" strike="noStrike">
-                <a:solidFill>
-                  <a:srgbClr val="65708A"/>
-                </a:solidFill>
-                <a:latin typeface="Malgun Gothic"/>
-                <a:ea typeface="Malgun Gothic"/>
-                <a:cs typeface="Malgun Gothic"/>
-                <a:sym typeface="Malgun Gothic"/>
-              </a:rPr>
-              <a:t>필터·정렬·스크롤·챗봇 UI</a:t>
-            </a:r>
-            <a:endParaRPr b="0" i="0" sz="1000" u="none" cap="none" strike="noStrike">
-              <a:solidFill>
-                <a:schemeClr val="dk1"/>
-              </a:solidFill>
-              <a:latin typeface="Calibri"/>
-              <a:ea typeface="Calibri"/>
-              <a:cs typeface="Calibri"/>
-              <a:sym typeface="Calibri"/>
-            </a:endParaRPr>
-          </a:p>
-        </p:txBody>
-      </p:sp>
-      <p:sp>
-        <p:nvSpPr>
-          <p:cNvPr id="137" name="Google Shape;137;p7"/>
-          <p:cNvSpPr/>
-          <p:nvPr/>
-        </p:nvSpPr>
-        <p:spPr>
-          <a:xfrm>
-            <a:off x="566928" y="3054096"/>
-            <a:ext cx="11057839" cy="1481328"/>
-          </a:xfrm>
-          <a:prstGeom prst="roundRect">
-            <a:avLst>
-              <a:gd fmla="val 4938" name="adj"/>
-            </a:avLst>
-          </a:prstGeom>
-          <a:solidFill>
-            <a:srgbClr val="FFFFFF"/>
-          </a:solidFill>
-          <a:ln cap="flat" cmpd="sng" w="12700">
-            <a:solidFill>
-              <a:srgbClr val="DFE5EF"/>
-            </a:solidFill>
-            <a:prstDash val="solid"/>
-            <a:round/>
-            <a:headEnd len="sm" w="sm" type="none"/>
-            <a:tailEnd len="sm" w="sm" type="none"/>
-          </a:ln>
-          <a:effectLst>
-            <a:outerShdw blurRad="127000" rotWithShape="0" algn="bl" dir="5400000" dist="25400">
-              <a:srgbClr val="8894A8">
-                <a:alpha val="18039"/>
-              </a:srgbClr>
-            </a:outerShdw>
-          </a:effectLst>
-        </p:spPr>
-        <p:txBody>
-          <a:bodyPr anchorCtr="0" anchor="ctr" bIns="91425" lIns="91425" spcFirstLastPara="1" rIns="91425" wrap="square" tIns="91425">
-            <a:noAutofit/>
-          </a:bodyPr>
-          <a:lstStyle/>
-          <a:p>
-            <a:pPr indent="0" lvl="0" marL="0" rtl="0" algn="l">
-              <a:spcBef>
-                <a:spcPts val="0"/>
-              </a:spcBef>
-              <a:spcAft>
-                <a:spcPts val="0"/>
-              </a:spcAft>
-              <a:buNone/>
-            </a:pPr>
-            <a:r>
-              <a:t/>
-            </a:r>
-            <a:endParaRPr/>
-          </a:p>
-        </p:txBody>
-      </p:sp>
-      <p:sp>
-        <p:nvSpPr>
-          <p:cNvPr id="138" name="Google Shape;138;p7"/>
-          <p:cNvSpPr/>
-          <p:nvPr/>
-        </p:nvSpPr>
-        <p:spPr>
-          <a:xfrm>
-            <a:off x="804672" y="3291840"/>
-            <a:ext cx="1572768" cy="420624"/>
-          </a:xfrm>
-          <a:prstGeom prst="roundRect">
-            <a:avLst>
-              <a:gd fmla="val 19565" name="adj"/>
-            </a:avLst>
-          </a:prstGeom>
-          <a:solidFill>
-            <a:srgbClr val="0098D9"/>
-          </a:solidFill>
-          <a:ln>
-            <a:noFill/>
-          </a:ln>
-        </p:spPr>
-        <p:txBody>
-          <a:bodyPr anchorCtr="0" anchor="ctr" bIns="91425" lIns="91425" spcFirstLastPara="1" rIns="91425" wrap="square" tIns="91425">
-            <a:noAutofit/>
-          </a:bodyPr>
-          <a:lstStyle/>
-          <a:p>
-            <a:pPr indent="0" lvl="0" marL="0" rtl="0" algn="l">
-              <a:spcBef>
-                <a:spcPts val="0"/>
-              </a:spcBef>
-              <a:spcAft>
-                <a:spcPts val="0"/>
-              </a:spcAft>
-              <a:buNone/>
-            </a:pPr>
-            <a:r>
-              <a:t/>
-            </a:r>
-            <a:endParaRPr/>
-          </a:p>
-        </p:txBody>
-      </p:sp>
-      <p:sp>
-        <p:nvSpPr>
-          <p:cNvPr id="139" name="Google Shape;139;p7"/>
-          <p:cNvSpPr/>
-          <p:nvPr/>
-        </p:nvSpPr>
-        <p:spPr>
-          <a:xfrm>
-            <a:off x="804672" y="3291840"/>
-            <a:ext cx="1572768" cy="420624"/>
-          </a:xfrm>
-          <a:prstGeom prst="rect">
-            <a:avLst/>
-          </a:prstGeom>
-          <a:noFill/>
-          <a:ln>
-            <a:noFill/>
-          </a:ln>
-        </p:spPr>
-        <p:txBody>
-          <a:bodyPr anchorCtr="0" anchor="ctr" bIns="0" lIns="0" spcFirstLastPara="1" rIns="0" wrap="square" tIns="0">
-            <a:noAutofit/>
-          </a:bodyPr>
-          <a:lstStyle/>
-          <a:p>
-            <a:pPr indent="0" lvl="0" marL="0" marR="0" rtl="0" algn="ctr">
-              <a:spcBef>
-                <a:spcPts val="0"/>
-              </a:spcBef>
-              <a:spcAft>
-                <a:spcPts val="0"/>
-              </a:spcAft>
-              <a:buClr>
-                <a:srgbClr val="FFFFFF"/>
-              </a:buClr>
-              <a:buSzPts val="1150"/>
-              <a:buFont typeface="Malgun Gothic"/>
-              <a:buNone/>
-            </a:pPr>
-            <a:r>
-              <a:rPr b="1" i="0" lang="en-US" sz="1150" u="none" cap="none" strike="noStrike">
-                <a:solidFill>
-                  <a:srgbClr val="FFFFFF"/>
-                </a:solidFill>
-                <a:latin typeface="Malgun Gothic"/>
-                <a:ea typeface="Malgun Gothic"/>
-                <a:cs typeface="Malgun Gothic"/>
-                <a:sym typeface="Malgun Gothic"/>
-              </a:rPr>
-              <a:t>Domain Logic</a:t>
-            </a:r>
-            <a:endParaRPr b="0" i="0" sz="1150" u="none" cap="none" strike="noStrike">
-              <a:solidFill>
-                <a:schemeClr val="dk1"/>
-              </a:solidFill>
-              <a:latin typeface="Calibri"/>
-              <a:ea typeface="Calibri"/>
-              <a:cs typeface="Calibri"/>
-              <a:sym typeface="Calibri"/>
-            </a:endParaRPr>
-          </a:p>
-        </p:txBody>
-      </p:sp>
-      <p:sp>
-        <p:nvSpPr>
-          <p:cNvPr id="140" name="Google Shape;140;p7"/>
-          <p:cNvSpPr/>
-          <p:nvPr/>
-        </p:nvSpPr>
-        <p:spPr>
-          <a:xfrm>
-            <a:off x="2596896" y="3236976"/>
-            <a:ext cx="2753258" cy="1097280"/>
-          </a:xfrm>
-          <a:prstGeom prst="roundRect">
-            <a:avLst>
-              <a:gd fmla="val 5833" name="adj"/>
-            </a:avLst>
-          </a:prstGeom>
-          <a:solidFill>
-            <a:srgbClr val="F5F7FB"/>
-          </a:solidFill>
-          <a:ln cap="flat" cmpd="sng" w="12700">
-            <a:solidFill>
-              <a:srgbClr val="DFE5EF"/>
-            </a:solidFill>
-            <a:prstDash val="solid"/>
-            <a:round/>
-            <a:headEnd len="sm" w="sm" type="none"/>
-            <a:tailEnd len="sm" w="sm" type="none"/>
-          </a:ln>
-        </p:spPr>
-        <p:txBody>
-          <a:bodyPr anchorCtr="0" anchor="ctr" bIns="91425" lIns="91425" spcFirstLastPara="1" rIns="91425" wrap="square" tIns="91425">
-            <a:noAutofit/>
-          </a:bodyPr>
-          <a:lstStyle/>
-          <a:p>
-            <a:pPr indent="0" lvl="0" marL="0" rtl="0" algn="l">
-              <a:spcBef>
-                <a:spcPts val="0"/>
-              </a:spcBef>
-              <a:spcAft>
-                <a:spcPts val="0"/>
-              </a:spcAft>
-              <a:buNone/>
-            </a:pPr>
-            <a:r>
-              <a:t/>
-            </a:r>
-            <a:endParaRPr/>
-          </a:p>
-        </p:txBody>
-      </p:sp>
-      <p:sp>
-        <p:nvSpPr>
-          <p:cNvPr id="141" name="Google Shape;141;p7"/>
-          <p:cNvSpPr/>
-          <p:nvPr/>
-        </p:nvSpPr>
-        <p:spPr>
-          <a:xfrm>
-            <a:off x="2779776" y="3383280"/>
-            <a:ext cx="2387498" cy="274320"/>
-          </a:xfrm>
-          <a:prstGeom prst="rect">
-            <a:avLst/>
-          </a:prstGeom>
-          <a:noFill/>
-          <a:ln>
-            <a:noFill/>
-          </a:ln>
-        </p:spPr>
-        <p:txBody>
-          <a:bodyPr anchorCtr="0" anchor="ctr" bIns="0" lIns="0" spcFirstLastPara="1" rIns="0" wrap="square" tIns="0">
-            <a:noAutofit/>
-          </a:bodyPr>
-          <a:lstStyle/>
-          <a:p>
-            <a:pPr indent="0" lvl="0" marL="0" marR="0" rtl="0" algn="l">
-              <a:spcBef>
-                <a:spcPts val="0"/>
-              </a:spcBef>
-              <a:spcAft>
-                <a:spcPts val="0"/>
-              </a:spcAft>
-              <a:buClr>
-                <a:srgbClr val="002D5A"/>
-              </a:buClr>
-              <a:buSzPts val="1200"/>
-              <a:buFont typeface="Malgun Gothic"/>
-              <a:buNone/>
-            </a:pPr>
-            <a:r>
-              <a:rPr b="1" i="0" lang="en-US" sz="1200" u="none" cap="none" strike="noStrike">
-                <a:solidFill>
-                  <a:srgbClr val="002D5A"/>
-                </a:solidFill>
-                <a:latin typeface="Malgun Gothic"/>
-                <a:ea typeface="Malgun Gothic"/>
-                <a:cs typeface="Malgun Gothic"/>
-                <a:sym typeface="Malgun Gothic"/>
-              </a:rPr>
-              <a:t>analytics.py</a:t>
-            </a:r>
-            <a:endParaRPr b="0" i="0" sz="1200" u="none" cap="none" strike="noStrike">
-              <a:solidFill>
-                <a:schemeClr val="dk1"/>
-              </a:solidFill>
-              <a:latin typeface="Calibri"/>
-              <a:ea typeface="Calibri"/>
-              <a:cs typeface="Calibri"/>
-              <a:sym typeface="Calibri"/>
-            </a:endParaRPr>
-          </a:p>
-        </p:txBody>
-      </p:sp>
-      <p:sp>
-        <p:nvSpPr>
-          <p:cNvPr id="142" name="Google Shape;142;p7"/>
-          <p:cNvSpPr/>
-          <p:nvPr/>
-        </p:nvSpPr>
-        <p:spPr>
-          <a:xfrm>
-            <a:off x="2779776" y="3675888"/>
-            <a:ext cx="2387498" cy="566928"/>
-          </a:xfrm>
-          <a:prstGeom prst="rect">
-            <a:avLst/>
-          </a:prstGeom>
-          <a:noFill/>
-          <a:ln>
-            <a:noFill/>
-          </a:ln>
-        </p:spPr>
-        <p:txBody>
-          <a:bodyPr anchorCtr="0" anchor="ctr" bIns="0" lIns="0" spcFirstLastPara="1" rIns="0" wrap="square" tIns="0">
-            <a:noAutofit/>
-          </a:bodyPr>
-          <a:lstStyle/>
-          <a:p>
-            <a:pPr indent="0" lvl="0" marL="0" marR="0" rtl="0" algn="l">
-              <a:lnSpc>
-                <a:spcPct val="140000"/>
-              </a:lnSpc>
-              <a:spcBef>
-                <a:spcPts val="0"/>
-              </a:spcBef>
-              <a:spcAft>
-                <a:spcPts val="0"/>
-              </a:spcAft>
-              <a:buClr>
-                <a:srgbClr val="65708A"/>
-              </a:buClr>
-              <a:buSzPts val="1000"/>
-              <a:buFont typeface="Malgun Gothic"/>
-              <a:buNone/>
-            </a:pPr>
-            <a:r>
-              <a:rPr b="0" i="0" lang="en-US" sz="1000" u="none" cap="none" strike="noStrike">
-                <a:solidFill>
-                  <a:srgbClr val="65708A"/>
-                </a:solidFill>
-                <a:latin typeface="Malgun Gothic"/>
-                <a:ea typeface="Malgun Gothic"/>
-                <a:cs typeface="Malgun Gothic"/>
-                <a:sym typeface="Malgun Gothic"/>
-              </a:rPr>
-              <a:t>SQL 집계 + 부서 내부 비교 해석</a:t>
-            </a:r>
-            <a:endParaRPr b="0" i="0" sz="1000" u="none" cap="none" strike="noStrike">
-              <a:solidFill>
-                <a:schemeClr val="dk1"/>
-              </a:solidFill>
-              <a:latin typeface="Calibri"/>
-              <a:ea typeface="Calibri"/>
-              <a:cs typeface="Calibri"/>
-              <a:sym typeface="Calibri"/>
-            </a:endParaRPr>
-          </a:p>
-        </p:txBody>
-      </p:sp>
-      <p:sp>
-        <p:nvSpPr>
-          <p:cNvPr id="143" name="Google Shape;143;p7"/>
-          <p:cNvSpPr/>
-          <p:nvPr/>
-        </p:nvSpPr>
-        <p:spPr>
-          <a:xfrm>
-            <a:off x="5606186" y="3236976"/>
-            <a:ext cx="2753258" cy="1097280"/>
-          </a:xfrm>
-          <a:prstGeom prst="roundRect">
-            <a:avLst>
-              <a:gd fmla="val 5833" name="adj"/>
-            </a:avLst>
-          </a:prstGeom>
-          <a:solidFill>
-            <a:srgbClr val="F5F7FB"/>
-          </a:solidFill>
-          <a:ln cap="flat" cmpd="sng" w="12700">
-            <a:solidFill>
-              <a:srgbClr val="DFE5EF"/>
-            </a:solidFill>
-            <a:prstDash val="solid"/>
-            <a:round/>
-            <a:headEnd len="sm" w="sm" type="none"/>
-            <a:tailEnd len="sm" w="sm" type="none"/>
-          </a:ln>
-        </p:spPr>
-        <p:txBody>
-          <a:bodyPr anchorCtr="0" anchor="ctr" bIns="91425" lIns="91425" spcFirstLastPara="1" rIns="91425" wrap="square" tIns="91425">
-            <a:noAutofit/>
-          </a:bodyPr>
-          <a:lstStyle/>
-          <a:p>
-            <a:pPr indent="0" lvl="0" marL="0" rtl="0" algn="l">
-              <a:spcBef>
-                <a:spcPts val="0"/>
-              </a:spcBef>
-              <a:spcAft>
-                <a:spcPts val="0"/>
-              </a:spcAft>
-              <a:buNone/>
-            </a:pPr>
-            <a:r>
-              <a:t/>
-            </a:r>
-            <a:endParaRPr/>
-          </a:p>
-        </p:txBody>
-      </p:sp>
-      <p:sp>
-        <p:nvSpPr>
-          <p:cNvPr id="144" name="Google Shape;144;p7"/>
-          <p:cNvSpPr/>
-          <p:nvPr/>
-        </p:nvSpPr>
-        <p:spPr>
-          <a:xfrm>
-            <a:off x="5789066" y="3383280"/>
-            <a:ext cx="2387498" cy="274320"/>
-          </a:xfrm>
-          <a:prstGeom prst="rect">
-            <a:avLst/>
-          </a:prstGeom>
-          <a:noFill/>
-          <a:ln>
-            <a:noFill/>
-          </a:ln>
-        </p:spPr>
-        <p:txBody>
-          <a:bodyPr anchorCtr="0" anchor="ctr" bIns="0" lIns="0" spcFirstLastPara="1" rIns="0" wrap="square" tIns="0">
-            <a:noAutofit/>
-          </a:bodyPr>
-          <a:lstStyle/>
-          <a:p>
-            <a:pPr indent="0" lvl="0" marL="0" marR="0" rtl="0" algn="l">
-              <a:spcBef>
-                <a:spcPts val="0"/>
-              </a:spcBef>
-              <a:spcAft>
-                <a:spcPts val="0"/>
-              </a:spcAft>
-              <a:buClr>
-                <a:srgbClr val="002D5A"/>
-              </a:buClr>
-              <a:buSzPts val="1200"/>
-              <a:buFont typeface="Malgun Gothic"/>
-              <a:buNone/>
-            </a:pPr>
-            <a:r>
-              <a:rPr b="1" i="0" lang="en-US" sz="1200" u="none" cap="none" strike="noStrike">
-                <a:solidFill>
-                  <a:srgbClr val="002D5A"/>
-                </a:solidFill>
-                <a:latin typeface="Malgun Gothic"/>
-                <a:ea typeface="Malgun Gothic"/>
-                <a:cs typeface="Malgun Gothic"/>
-                <a:sym typeface="Malgun Gothic"/>
-              </a:rPr>
-              <a:t>chat_service.py</a:t>
-            </a:r>
-            <a:endParaRPr b="0" i="0" sz="1200" u="none" cap="none" strike="noStrike">
-              <a:solidFill>
-                <a:schemeClr val="dk1"/>
-              </a:solidFill>
-              <a:latin typeface="Calibri"/>
-              <a:ea typeface="Calibri"/>
-              <a:cs typeface="Calibri"/>
-              <a:sym typeface="Calibri"/>
-            </a:endParaRPr>
-          </a:p>
-        </p:txBody>
-      </p:sp>
-      <p:sp>
-        <p:nvSpPr>
-          <p:cNvPr id="145" name="Google Shape;145;p7"/>
-          <p:cNvSpPr/>
-          <p:nvPr/>
-        </p:nvSpPr>
-        <p:spPr>
-          <a:xfrm>
-            <a:off x="5789066" y="3675888"/>
-            <a:ext cx="2387498" cy="566928"/>
-          </a:xfrm>
-          <a:prstGeom prst="rect">
-            <a:avLst/>
-          </a:prstGeom>
-          <a:noFill/>
-          <a:ln>
-            <a:noFill/>
-          </a:ln>
-        </p:spPr>
-        <p:txBody>
-          <a:bodyPr anchorCtr="0" anchor="ctr" bIns="0" lIns="0" spcFirstLastPara="1" rIns="0" wrap="square" tIns="0">
-            <a:noAutofit/>
-          </a:bodyPr>
-          <a:lstStyle/>
-          <a:p>
-            <a:pPr indent="0" lvl="0" marL="0" marR="0" rtl="0" algn="l">
-              <a:lnSpc>
-                <a:spcPct val="140000"/>
-              </a:lnSpc>
-              <a:spcBef>
-                <a:spcPts val="0"/>
-              </a:spcBef>
-              <a:spcAft>
-                <a:spcPts val="0"/>
-              </a:spcAft>
-              <a:buClr>
-                <a:srgbClr val="65708A"/>
-              </a:buClr>
-              <a:buSzPts val="1000"/>
-              <a:buFont typeface="Malgun Gothic"/>
-              <a:buNone/>
-            </a:pPr>
-            <a:r>
-              <a:rPr b="0" i="0" lang="en-US" sz="1000" u="none" cap="none" strike="noStrike">
-                <a:solidFill>
-                  <a:srgbClr val="65708A"/>
-                </a:solidFill>
-                <a:latin typeface="Malgun Gothic"/>
-                <a:ea typeface="Malgun Gothic"/>
-                <a:cs typeface="Malgun Gothic"/>
-                <a:sym typeface="Malgun Gothic"/>
-              </a:rPr>
-              <a:t>3단 라우팅 + 금지 요청 차단</a:t>
-            </a:r>
-            <a:endParaRPr b="0" i="0" sz="1000" u="none" cap="none" strike="noStrike">
-              <a:solidFill>
-                <a:schemeClr val="dk1"/>
-              </a:solidFill>
-              <a:latin typeface="Calibri"/>
-              <a:ea typeface="Calibri"/>
-              <a:cs typeface="Calibri"/>
-              <a:sym typeface="Calibri"/>
-            </a:endParaRPr>
-          </a:p>
-        </p:txBody>
-      </p:sp>
-      <p:sp>
-        <p:nvSpPr>
-          <p:cNvPr id="146" name="Google Shape;146;p7"/>
-          <p:cNvSpPr/>
-          <p:nvPr/>
-        </p:nvSpPr>
-        <p:spPr>
-          <a:xfrm>
-            <a:off x="8615477" y="3236976"/>
-            <a:ext cx="2753258" cy="1097280"/>
-          </a:xfrm>
-          <a:prstGeom prst="roundRect">
-            <a:avLst>
-              <a:gd fmla="val 5833" name="adj"/>
-            </a:avLst>
-          </a:prstGeom>
-          <a:solidFill>
-            <a:srgbClr val="F5F7FB"/>
-          </a:solidFill>
-          <a:ln cap="flat" cmpd="sng" w="12700">
-            <a:solidFill>
-              <a:srgbClr val="DFE5EF"/>
-            </a:solidFill>
-            <a:prstDash val="solid"/>
-            <a:round/>
-            <a:headEnd len="sm" w="sm" type="none"/>
-            <a:tailEnd len="sm" w="sm" type="none"/>
-          </a:ln>
-        </p:spPr>
-        <p:txBody>
-          <a:bodyPr anchorCtr="0" anchor="ctr" bIns="91425" lIns="91425" spcFirstLastPara="1" rIns="91425" wrap="square" tIns="91425">
-            <a:noAutofit/>
-          </a:bodyPr>
-          <a:lstStyle/>
-          <a:p>
-            <a:pPr indent="0" lvl="0" marL="0" rtl="0" algn="l">
-              <a:spcBef>
-                <a:spcPts val="0"/>
-              </a:spcBef>
-              <a:spcAft>
-                <a:spcPts val="0"/>
-              </a:spcAft>
-              <a:buNone/>
-            </a:pPr>
-            <a:r>
-              <a:t/>
-            </a:r>
-            <a:endParaRPr/>
-          </a:p>
-        </p:txBody>
-      </p:sp>
-      <p:sp>
-        <p:nvSpPr>
-          <p:cNvPr id="147" name="Google Shape;147;p7"/>
-          <p:cNvSpPr/>
-          <p:nvPr/>
-        </p:nvSpPr>
-        <p:spPr>
-          <a:xfrm>
-            <a:off x="8798357" y="3383280"/>
-            <a:ext cx="2387498" cy="274320"/>
-          </a:xfrm>
-          <a:prstGeom prst="rect">
-            <a:avLst/>
-          </a:prstGeom>
-          <a:noFill/>
-          <a:ln>
-            <a:noFill/>
-          </a:ln>
-        </p:spPr>
-        <p:txBody>
-          <a:bodyPr anchorCtr="0" anchor="ctr" bIns="0" lIns="0" spcFirstLastPara="1" rIns="0" wrap="square" tIns="0">
-            <a:noAutofit/>
-          </a:bodyPr>
-          <a:lstStyle/>
-          <a:p>
-            <a:pPr indent="0" lvl="0" marL="0" marR="0" rtl="0" algn="l">
-              <a:spcBef>
-                <a:spcPts val="0"/>
-              </a:spcBef>
-              <a:spcAft>
-                <a:spcPts val="0"/>
-              </a:spcAft>
-              <a:buClr>
-                <a:srgbClr val="002D5A"/>
-              </a:buClr>
-              <a:buSzPts val="1200"/>
-              <a:buFont typeface="Malgun Gothic"/>
-              <a:buNone/>
-            </a:pPr>
-            <a:r>
-              <a:rPr b="1" i="0" lang="en-US" sz="1200" u="none" cap="none" strike="noStrike">
-                <a:solidFill>
-                  <a:srgbClr val="002D5A"/>
-                </a:solidFill>
-                <a:latin typeface="Malgun Gothic"/>
-                <a:ea typeface="Malgun Gothic"/>
-                <a:cs typeface="Malgun Gothic"/>
-                <a:sym typeface="Malgun Gothic"/>
-              </a:rPr>
-              <a:t>catalog.py</a:t>
-            </a:r>
-            <a:endParaRPr b="0" i="0" sz="1200" u="none" cap="none" strike="noStrike">
-              <a:solidFill>
-                <a:schemeClr val="dk1"/>
-              </a:solidFill>
-              <a:latin typeface="Calibri"/>
-              <a:ea typeface="Calibri"/>
-              <a:cs typeface="Calibri"/>
-              <a:sym typeface="Calibri"/>
-            </a:endParaRPr>
-          </a:p>
-        </p:txBody>
-      </p:sp>
-      <p:sp>
-        <p:nvSpPr>
-          <p:cNvPr id="148" name="Google Shape;148;p7"/>
-          <p:cNvSpPr/>
-          <p:nvPr/>
-        </p:nvSpPr>
-        <p:spPr>
-          <a:xfrm>
-            <a:off x="8798357" y="3675888"/>
-            <a:ext cx="2387498" cy="566928"/>
-          </a:xfrm>
-          <a:prstGeom prst="rect">
-            <a:avLst/>
-          </a:prstGeom>
-          <a:noFill/>
-          <a:ln>
-            <a:noFill/>
-          </a:ln>
-        </p:spPr>
-        <p:txBody>
-          <a:bodyPr anchorCtr="0" anchor="ctr" bIns="0" lIns="0" spcFirstLastPara="1" rIns="0" wrap="square" tIns="0">
-            <a:noAutofit/>
-          </a:bodyPr>
-          <a:lstStyle/>
-          <a:p>
-            <a:pPr indent="0" lvl="0" marL="0" marR="0" rtl="0" algn="l">
-              <a:lnSpc>
-                <a:spcPct val="140000"/>
-              </a:lnSpc>
-              <a:spcBef>
-                <a:spcPts val="0"/>
-              </a:spcBef>
-              <a:spcAft>
-                <a:spcPts val="0"/>
-              </a:spcAft>
-              <a:buClr>
-                <a:srgbClr val="65708A"/>
-              </a:buClr>
-              <a:buSzPts val="1000"/>
-              <a:buFont typeface="Malgun Gothic"/>
-              <a:buNone/>
-            </a:pPr>
-            <a:r>
-              <a:rPr b="0" i="0" lang="en-US" sz="1000" u="none" cap="none" strike="noStrike">
-                <a:solidFill>
-                  <a:srgbClr val="65708A"/>
-                </a:solidFill>
-                <a:latin typeface="Malgun Gothic"/>
-                <a:ea typeface="Malgun Gothic"/>
-                <a:cs typeface="Malgun Gothic"/>
-                <a:sym typeface="Malgun Gothic"/>
-              </a:rPr>
-              <a:t>문항 매핑 · 해석 사전 (공용)</a:t>
-            </a:r>
-            <a:endParaRPr b="0" i="0" sz="1000" u="none" cap="none" strike="noStrike">
-              <a:solidFill>
-                <a:schemeClr val="dk1"/>
-              </a:solidFill>
-              <a:latin typeface="Calibri"/>
-              <a:ea typeface="Calibri"/>
-              <a:cs typeface="Calibri"/>
-              <a:sym typeface="Calibri"/>
-            </a:endParaRPr>
-          </a:p>
-        </p:txBody>
-      </p:sp>
-      <p:sp>
-        <p:nvSpPr>
-          <p:cNvPr id="149" name="Google Shape;149;p7"/>
-          <p:cNvSpPr/>
-          <p:nvPr/>
-        </p:nvSpPr>
-        <p:spPr>
-          <a:xfrm>
-            <a:off x="566928" y="4681728"/>
-            <a:ext cx="11057839" cy="1481328"/>
-          </a:xfrm>
-          <a:prstGeom prst="roundRect">
-            <a:avLst>
-              <a:gd fmla="val 4938" name="adj"/>
-            </a:avLst>
-          </a:prstGeom>
-          <a:solidFill>
-            <a:srgbClr val="FFFFFF"/>
-          </a:solidFill>
-          <a:ln cap="flat" cmpd="sng" w="12700">
-            <a:solidFill>
-              <a:srgbClr val="DFE5EF"/>
-            </a:solidFill>
-            <a:prstDash val="solid"/>
-            <a:round/>
-            <a:headEnd len="sm" w="sm" type="none"/>
-            <a:tailEnd len="sm" w="sm" type="none"/>
-          </a:ln>
-          <a:effectLst>
-            <a:outerShdw blurRad="127000" rotWithShape="0" algn="bl" dir="5400000" dist="25400">
-              <a:srgbClr val="8894A8">
-                <a:alpha val="18039"/>
-              </a:srgbClr>
-            </a:outerShdw>
-          </a:effectLst>
-        </p:spPr>
-        <p:txBody>
-          <a:bodyPr anchorCtr="0" anchor="ctr" bIns="91425" lIns="91425" spcFirstLastPara="1" rIns="91425" wrap="square" tIns="91425">
-            <a:noAutofit/>
-          </a:bodyPr>
-          <a:lstStyle/>
-          <a:p>
-            <a:pPr indent="0" lvl="0" marL="0" rtl="0" algn="l">
-              <a:spcBef>
-                <a:spcPts val="0"/>
-              </a:spcBef>
-              <a:spcAft>
-                <a:spcPts val="0"/>
-              </a:spcAft>
-              <a:buNone/>
-            </a:pPr>
-            <a:r>
-              <a:t/>
-            </a:r>
-            <a:endParaRPr/>
-          </a:p>
-        </p:txBody>
-      </p:sp>
-      <p:sp>
-        <p:nvSpPr>
-          <p:cNvPr id="150" name="Google Shape;150;p7"/>
-          <p:cNvSpPr/>
-          <p:nvPr/>
-        </p:nvSpPr>
-        <p:spPr>
-          <a:xfrm>
-            <a:off x="804672" y="4919472"/>
-            <a:ext cx="1572768" cy="420624"/>
-          </a:xfrm>
-          <a:prstGeom prst="roundRect">
-            <a:avLst>
-              <a:gd fmla="val 19565" name="adj"/>
-            </a:avLst>
-          </a:prstGeom>
-          <a:solidFill>
-            <a:srgbClr val="00A950"/>
-          </a:solidFill>
-          <a:ln>
-            <a:noFill/>
-          </a:ln>
-        </p:spPr>
-        <p:txBody>
-          <a:bodyPr anchorCtr="0" anchor="ctr" bIns="91425" lIns="91425" spcFirstLastPara="1" rIns="91425" wrap="square" tIns="91425">
-            <a:noAutofit/>
-          </a:bodyPr>
-          <a:lstStyle/>
-          <a:p>
-            <a:pPr indent="0" lvl="0" marL="0" rtl="0" algn="l">
-              <a:spcBef>
-                <a:spcPts val="0"/>
-              </a:spcBef>
-              <a:spcAft>
-                <a:spcPts val="0"/>
-              </a:spcAft>
-              <a:buNone/>
-            </a:pPr>
-            <a:r>
-              <a:t/>
-            </a:r>
-            <a:endParaRPr/>
-          </a:p>
-        </p:txBody>
-      </p:sp>
-      <p:sp>
-        <p:nvSpPr>
-          <p:cNvPr id="151" name="Google Shape;151;p7"/>
-          <p:cNvSpPr/>
-          <p:nvPr/>
-        </p:nvSpPr>
-        <p:spPr>
-          <a:xfrm>
-            <a:off x="804672" y="4919472"/>
-            <a:ext cx="1572768" cy="420624"/>
-          </a:xfrm>
-          <a:prstGeom prst="rect">
-            <a:avLst/>
-          </a:prstGeom>
-          <a:noFill/>
-          <a:ln>
-            <a:noFill/>
-          </a:ln>
-        </p:spPr>
-        <p:txBody>
-          <a:bodyPr anchorCtr="0" anchor="ctr" bIns="0" lIns="0" spcFirstLastPara="1" rIns="0" wrap="square" tIns="0">
-            <a:noAutofit/>
-          </a:bodyPr>
-          <a:lstStyle/>
-          <a:p>
-            <a:pPr indent="0" lvl="0" marL="0" marR="0" rtl="0" algn="ctr">
-              <a:spcBef>
-                <a:spcPts val="0"/>
-              </a:spcBef>
-              <a:spcAft>
-                <a:spcPts val="0"/>
-              </a:spcAft>
-              <a:buClr>
-                <a:srgbClr val="FFFFFF"/>
-              </a:buClr>
-              <a:buSzPts val="1150"/>
-              <a:buFont typeface="Malgun Gothic"/>
-              <a:buNone/>
-            </a:pPr>
-            <a:r>
-              <a:rPr b="1" i="0" lang="en-US" sz="1150" u="none" cap="none" strike="noStrike">
-                <a:solidFill>
-                  <a:srgbClr val="FFFFFF"/>
-                </a:solidFill>
-                <a:latin typeface="Malgun Gothic"/>
-                <a:ea typeface="Malgun Gothic"/>
-                <a:cs typeface="Malgun Gothic"/>
-                <a:sym typeface="Malgun Gothic"/>
-              </a:rPr>
-              <a:t>Data &amp; External</a:t>
-            </a:r>
-            <a:endParaRPr b="0" i="0" sz="1150" u="none" cap="none" strike="noStrike">
-              <a:solidFill>
-                <a:schemeClr val="dk1"/>
-              </a:solidFill>
-              <a:latin typeface="Calibri"/>
-              <a:ea typeface="Calibri"/>
-              <a:cs typeface="Calibri"/>
-              <a:sym typeface="Calibri"/>
-            </a:endParaRPr>
-          </a:p>
-        </p:txBody>
-      </p:sp>
-      <p:sp>
-        <p:nvSpPr>
-          <p:cNvPr id="152" name="Google Shape;152;p7"/>
-          <p:cNvSpPr/>
-          <p:nvPr/>
-        </p:nvSpPr>
-        <p:spPr>
-          <a:xfrm>
-            <a:off x="2596896" y="4864608"/>
-            <a:ext cx="2753258" cy="1097280"/>
-          </a:xfrm>
-          <a:prstGeom prst="roundRect">
-            <a:avLst>
-              <a:gd fmla="val 5833" name="adj"/>
-            </a:avLst>
-          </a:prstGeom>
-          <a:solidFill>
-            <a:srgbClr val="F5F7FB"/>
-          </a:solidFill>
-          <a:ln cap="flat" cmpd="sng" w="12700">
-            <a:solidFill>
-              <a:srgbClr val="DFE5EF"/>
-            </a:solidFill>
-            <a:prstDash val="solid"/>
-            <a:round/>
-            <a:headEnd len="sm" w="sm" type="none"/>
-            <a:tailEnd len="sm" w="sm" type="none"/>
-          </a:ln>
-        </p:spPr>
-        <p:txBody>
-          <a:bodyPr anchorCtr="0" anchor="ctr" bIns="91425" lIns="91425" spcFirstLastPara="1" rIns="91425" wrap="square" tIns="91425">
-            <a:noAutofit/>
-          </a:bodyPr>
-          <a:lstStyle/>
-          <a:p>
-            <a:pPr indent="0" lvl="0" marL="0" rtl="0" algn="l">
-              <a:spcBef>
-                <a:spcPts val="0"/>
-              </a:spcBef>
-              <a:spcAft>
-                <a:spcPts val="0"/>
-              </a:spcAft>
-              <a:buNone/>
-            </a:pPr>
-            <a:r>
-              <a:t/>
-            </a:r>
-            <a:endParaRPr/>
-          </a:p>
-        </p:txBody>
-      </p:sp>
-      <p:sp>
-        <p:nvSpPr>
-          <p:cNvPr id="153" name="Google Shape;153;p7"/>
-          <p:cNvSpPr/>
-          <p:nvPr/>
-        </p:nvSpPr>
-        <p:spPr>
-          <a:xfrm>
-            <a:off x="2779776" y="5010912"/>
-            <a:ext cx="2387498" cy="274320"/>
-          </a:xfrm>
-          <a:prstGeom prst="rect">
-            <a:avLst/>
-          </a:prstGeom>
-          <a:noFill/>
-          <a:ln>
-            <a:noFill/>
-          </a:ln>
-        </p:spPr>
-        <p:txBody>
-          <a:bodyPr anchorCtr="0" anchor="ctr" bIns="0" lIns="0" spcFirstLastPara="1" rIns="0" wrap="square" tIns="0">
-            <a:noAutofit/>
-          </a:bodyPr>
-          <a:lstStyle/>
-          <a:p>
-            <a:pPr indent="0" lvl="0" marL="0" marR="0" rtl="0" algn="l">
-              <a:spcBef>
-                <a:spcPts val="0"/>
-              </a:spcBef>
-              <a:spcAft>
-                <a:spcPts val="0"/>
-              </a:spcAft>
-              <a:buClr>
-                <a:srgbClr val="002D5A"/>
-              </a:buClr>
-              <a:buSzPts val="1200"/>
-              <a:buFont typeface="Malgun Gothic"/>
-              <a:buNone/>
-            </a:pPr>
-            <a:r>
-              <a:rPr b="1" i="0" lang="en-US" sz="1200" u="none" cap="none" strike="noStrike">
-                <a:solidFill>
-                  <a:srgbClr val="002D5A"/>
-                </a:solidFill>
-                <a:latin typeface="Malgun Gothic"/>
-                <a:ea typeface="Malgun Gothic"/>
-                <a:cs typeface="Malgun Gothic"/>
-                <a:sym typeface="Malgun Gothic"/>
-              </a:rPr>
-              <a:t>SQLite 5 tables</a:t>
-            </a:r>
-            <a:endParaRPr b="0" i="0" sz="1200" u="none" cap="none" strike="noStrike">
-              <a:solidFill>
-                <a:schemeClr val="dk1"/>
-              </a:solidFill>
-              <a:latin typeface="Calibri"/>
-              <a:ea typeface="Calibri"/>
-              <a:cs typeface="Calibri"/>
-              <a:sym typeface="Calibri"/>
-            </a:endParaRPr>
-          </a:p>
-        </p:txBody>
-      </p:sp>
-      <p:sp>
-        <p:nvSpPr>
-          <p:cNvPr id="154" name="Google Shape;154;p7"/>
-          <p:cNvSpPr/>
-          <p:nvPr/>
-        </p:nvSpPr>
-        <p:spPr>
-          <a:xfrm>
-            <a:off x="2779776" y="5303520"/>
-            <a:ext cx="2387498" cy="566928"/>
-          </a:xfrm>
-          <a:prstGeom prst="rect">
-            <a:avLst/>
-          </a:prstGeom>
-          <a:noFill/>
-          <a:ln>
-            <a:noFill/>
-          </a:ln>
-        </p:spPr>
-        <p:txBody>
-          <a:bodyPr anchorCtr="0" anchor="ctr" bIns="0" lIns="0" spcFirstLastPara="1" rIns="0" wrap="square" tIns="0">
-            <a:noAutofit/>
-          </a:bodyPr>
-          <a:lstStyle/>
-          <a:p>
-            <a:pPr indent="0" lvl="0" marL="0" marR="0" rtl="0" algn="l">
-              <a:lnSpc>
-                <a:spcPct val="140000"/>
-              </a:lnSpc>
-              <a:spcBef>
-                <a:spcPts val="0"/>
-              </a:spcBef>
-              <a:spcAft>
-                <a:spcPts val="0"/>
-              </a:spcAft>
-              <a:buClr>
-                <a:srgbClr val="65708A"/>
-              </a:buClr>
-              <a:buSzPts val="1000"/>
-              <a:buFont typeface="Malgun Gothic"/>
-              <a:buNone/>
-            </a:pPr>
-            <a:r>
-              <a:rPr b="0" i="0" lang="en-US" sz="1000" u="none" cap="none" strike="noStrike">
-                <a:solidFill>
-                  <a:srgbClr val="65708A"/>
-                </a:solidFill>
-                <a:latin typeface="Malgun Gothic"/>
-                <a:ea typeface="Malgun Gothic"/>
-                <a:cs typeface="Malgun Gothic"/>
-                <a:sym typeface="Malgun Gothic"/>
-              </a:rPr>
-              <a:t>responses · open_texts · orgs · admins · logs</a:t>
-            </a:r>
-            <a:endParaRPr b="0" i="0" sz="1000" u="none" cap="none" strike="noStrike">
-              <a:solidFill>
-                <a:schemeClr val="dk1"/>
-              </a:solidFill>
-              <a:latin typeface="Calibri"/>
-              <a:ea typeface="Calibri"/>
-              <a:cs typeface="Calibri"/>
-              <a:sym typeface="Calibri"/>
-            </a:endParaRPr>
-          </a:p>
-        </p:txBody>
-      </p:sp>
-      <p:sp>
-        <p:nvSpPr>
-          <p:cNvPr id="155" name="Google Shape;155;p7"/>
-          <p:cNvSpPr/>
-          <p:nvPr/>
-        </p:nvSpPr>
-        <p:spPr>
-          <a:xfrm>
-            <a:off x="5606186" y="4864608"/>
-            <a:ext cx="2753258" cy="1097280"/>
-          </a:xfrm>
-          <a:prstGeom prst="roundRect">
-            <a:avLst>
-              <a:gd fmla="val 5833" name="adj"/>
-            </a:avLst>
-          </a:prstGeom>
-          <a:solidFill>
-            <a:srgbClr val="F5F7FB"/>
-          </a:solidFill>
-          <a:ln cap="flat" cmpd="sng" w="12700">
-            <a:solidFill>
-              <a:srgbClr val="DFE5EF"/>
-            </a:solidFill>
-            <a:prstDash val="solid"/>
-            <a:round/>
-            <a:headEnd len="sm" w="sm" type="none"/>
-            <a:tailEnd len="sm" w="sm" type="none"/>
-          </a:ln>
-        </p:spPr>
-        <p:txBody>
-          <a:bodyPr anchorCtr="0" anchor="ctr" bIns="91425" lIns="91425" spcFirstLastPara="1" rIns="91425" wrap="square" tIns="91425">
-            <a:noAutofit/>
-          </a:bodyPr>
-          <a:lstStyle/>
-          <a:p>
-            <a:pPr indent="0" lvl="0" marL="0" rtl="0" algn="l">
-              <a:spcBef>
-                <a:spcPts val="0"/>
-              </a:spcBef>
-              <a:spcAft>
-                <a:spcPts val="0"/>
-              </a:spcAft>
-              <a:buNone/>
-            </a:pPr>
-            <a:r>
-              <a:t/>
-            </a:r>
-            <a:endParaRPr/>
-          </a:p>
-        </p:txBody>
-      </p:sp>
-      <p:sp>
-        <p:nvSpPr>
-          <p:cNvPr id="156" name="Google Shape;156;p7"/>
-          <p:cNvSpPr/>
-          <p:nvPr/>
-        </p:nvSpPr>
-        <p:spPr>
-          <a:xfrm>
-            <a:off x="5789066" y="5010912"/>
-            <a:ext cx="2387498" cy="274320"/>
-          </a:xfrm>
-          <a:prstGeom prst="rect">
-            <a:avLst/>
-          </a:prstGeom>
-          <a:noFill/>
-          <a:ln>
-            <a:noFill/>
-          </a:ln>
-        </p:spPr>
-        <p:txBody>
-          <a:bodyPr anchorCtr="0" anchor="ctr" bIns="0" lIns="0" spcFirstLastPara="1" rIns="0" wrap="square" tIns="0">
-            <a:noAutofit/>
-          </a:bodyPr>
-          <a:lstStyle/>
-          <a:p>
-            <a:pPr indent="0" lvl="0" marL="0" marR="0" rtl="0" algn="l">
-              <a:spcBef>
-                <a:spcPts val="0"/>
-              </a:spcBef>
-              <a:spcAft>
-                <a:spcPts val="0"/>
-              </a:spcAft>
-              <a:buClr>
-                <a:srgbClr val="002D5A"/>
-              </a:buClr>
-              <a:buSzPts val="1200"/>
-              <a:buFont typeface="Malgun Gothic"/>
-              <a:buNone/>
-            </a:pPr>
-            <a:r>
-              <a:rPr b="1" i="0" lang="en-US" sz="1200" u="none" cap="none" strike="noStrike">
-                <a:solidFill>
-                  <a:srgbClr val="002D5A"/>
-                </a:solidFill>
-                <a:latin typeface="Malgun Gothic"/>
-                <a:ea typeface="Malgun Gothic"/>
-                <a:cs typeface="Malgun Gothic"/>
-                <a:sym typeface="Malgun Gothic"/>
-              </a:rPr>
-              <a:t>seed.py</a:t>
-            </a:r>
-            <a:endParaRPr b="0" i="0" sz="1200" u="none" cap="none" strike="noStrike">
-              <a:solidFill>
-                <a:schemeClr val="dk1"/>
-              </a:solidFill>
-              <a:latin typeface="Calibri"/>
-              <a:ea typeface="Calibri"/>
-              <a:cs typeface="Calibri"/>
-              <a:sym typeface="Calibri"/>
-            </a:endParaRPr>
-          </a:p>
-        </p:txBody>
-      </p:sp>
-      <p:sp>
-        <p:nvSpPr>
-          <p:cNvPr id="157" name="Google Shape;157;p7"/>
-          <p:cNvSpPr/>
-          <p:nvPr/>
-        </p:nvSpPr>
-        <p:spPr>
-          <a:xfrm>
-            <a:off x="5789066" y="5303520"/>
-            <a:ext cx="2387498" cy="566928"/>
-          </a:xfrm>
-          <a:prstGeom prst="rect">
-            <a:avLst/>
-          </a:prstGeom>
-          <a:noFill/>
-          <a:ln>
-            <a:noFill/>
-          </a:ln>
-        </p:spPr>
-        <p:txBody>
-          <a:bodyPr anchorCtr="0" anchor="ctr" bIns="0" lIns="0" spcFirstLastPara="1" rIns="0" wrap="square" tIns="0">
-            <a:noAutofit/>
-          </a:bodyPr>
-          <a:lstStyle/>
-          <a:p>
-            <a:pPr indent="0" lvl="0" marL="0" marR="0" rtl="0" algn="l">
-              <a:lnSpc>
-                <a:spcPct val="140000"/>
-              </a:lnSpc>
-              <a:spcBef>
-                <a:spcPts val="0"/>
-              </a:spcBef>
-              <a:spcAft>
-                <a:spcPts val="0"/>
-              </a:spcAft>
-              <a:buClr>
-                <a:srgbClr val="65708A"/>
-              </a:buClr>
-              <a:buSzPts val="1000"/>
-              <a:buFont typeface="Malgun Gothic"/>
-              <a:buNone/>
-            </a:pPr>
-            <a:r>
-              <a:rPr b="0" i="0" lang="en-US" sz="1000" u="none" cap="none" strike="noStrike">
-                <a:solidFill>
-                  <a:srgbClr val="65708A"/>
-                </a:solidFill>
-                <a:latin typeface="Malgun Gothic"/>
-                <a:ea typeface="Malgun Gothic"/>
-                <a:cs typeface="Malgun Gothic"/>
-                <a:sym typeface="Malgun Gothic"/>
-              </a:rPr>
-              <a:t>엑셀 → DB 적재 (업로드 시 재사용)</a:t>
-            </a:r>
-            <a:endParaRPr b="0" i="0" sz="1000" u="none" cap="none" strike="noStrike">
-              <a:solidFill>
-                <a:schemeClr val="dk1"/>
-              </a:solidFill>
-              <a:latin typeface="Calibri"/>
-              <a:ea typeface="Calibri"/>
-              <a:cs typeface="Calibri"/>
-              <a:sym typeface="Calibri"/>
-            </a:endParaRPr>
-          </a:p>
-        </p:txBody>
-      </p:sp>
-      <p:sp>
-        <p:nvSpPr>
-          <p:cNvPr id="158" name="Google Shape;158;p7"/>
-          <p:cNvSpPr/>
-          <p:nvPr/>
-        </p:nvSpPr>
-        <p:spPr>
-          <a:xfrm>
-            <a:off x="8615477" y="4864608"/>
-            <a:ext cx="2753258" cy="1097280"/>
-          </a:xfrm>
-          <a:prstGeom prst="roundRect">
-            <a:avLst>
-              <a:gd fmla="val 5833" name="adj"/>
-            </a:avLst>
-          </a:prstGeom>
-          <a:solidFill>
-            <a:srgbClr val="F5F7FB"/>
-          </a:solidFill>
-          <a:ln cap="flat" cmpd="sng" w="12700">
-            <a:solidFill>
-              <a:srgbClr val="DFE5EF"/>
-            </a:solidFill>
-            <a:prstDash val="solid"/>
-            <a:round/>
-            <a:headEnd len="sm" w="sm" type="none"/>
-            <a:tailEnd len="sm" w="sm" type="none"/>
-          </a:ln>
-        </p:spPr>
-        <p:txBody>
-          <a:bodyPr anchorCtr="0" anchor="ctr" bIns="91425" lIns="91425" spcFirstLastPara="1" rIns="91425" wrap="square" tIns="91425">
-            <a:noAutofit/>
-          </a:bodyPr>
-          <a:lstStyle/>
-          <a:p>
-            <a:pPr indent="0" lvl="0" marL="0" rtl="0" algn="l">
-              <a:spcBef>
-                <a:spcPts val="0"/>
-              </a:spcBef>
-              <a:spcAft>
-                <a:spcPts val="0"/>
-              </a:spcAft>
-              <a:buNone/>
-            </a:pPr>
-            <a:r>
-              <a:t/>
-            </a:r>
-            <a:endParaRPr/>
-          </a:p>
-        </p:txBody>
-      </p:sp>
-      <p:sp>
-        <p:nvSpPr>
-          <p:cNvPr id="159" name="Google Shape;159;p7"/>
-          <p:cNvSpPr/>
-          <p:nvPr/>
-        </p:nvSpPr>
-        <p:spPr>
-          <a:xfrm>
-            <a:off x="8798357" y="5010912"/>
-            <a:ext cx="2387498" cy="274320"/>
-          </a:xfrm>
-          <a:prstGeom prst="rect">
-            <a:avLst/>
-          </a:prstGeom>
-          <a:noFill/>
-          <a:ln>
-            <a:noFill/>
-          </a:ln>
-        </p:spPr>
-        <p:txBody>
-          <a:bodyPr anchorCtr="0" anchor="ctr" bIns="0" lIns="0" spcFirstLastPara="1" rIns="0" wrap="square" tIns="0">
-            <a:noAutofit/>
-          </a:bodyPr>
-          <a:lstStyle/>
-          <a:p>
-            <a:pPr indent="0" lvl="0" marL="0" marR="0" rtl="0" algn="l">
-              <a:spcBef>
-                <a:spcPts val="0"/>
-              </a:spcBef>
-              <a:spcAft>
-                <a:spcPts val="0"/>
-              </a:spcAft>
-              <a:buClr>
-                <a:srgbClr val="002D5A"/>
-              </a:buClr>
-              <a:buSzPts val="1200"/>
-              <a:buFont typeface="Malgun Gothic"/>
-              <a:buNone/>
-            </a:pPr>
-            <a:r>
-              <a:rPr b="1" i="0" lang="en-US" sz="1200" u="none" cap="none" strike="noStrike">
-                <a:solidFill>
-                  <a:srgbClr val="002D5A"/>
-                </a:solidFill>
-                <a:latin typeface="Malgun Gothic"/>
-                <a:ea typeface="Malgun Gothic"/>
-                <a:cs typeface="Malgun Gothic"/>
-                <a:sym typeface="Malgun Gothic"/>
-              </a:rPr>
-              <a:t>OpenAI · Tavily</a:t>
-            </a:r>
-            <a:endParaRPr b="0" i="0" sz="1200" u="none" cap="none" strike="noStrike">
-              <a:solidFill>
-                <a:schemeClr val="dk1"/>
-              </a:solidFill>
-              <a:latin typeface="Calibri"/>
-              <a:ea typeface="Calibri"/>
-              <a:cs typeface="Calibri"/>
-              <a:sym typeface="Calibri"/>
-            </a:endParaRPr>
-          </a:p>
-        </p:txBody>
-      </p:sp>
-      <p:sp>
-        <p:nvSpPr>
-          <p:cNvPr id="160" name="Google Shape;160;p7"/>
-          <p:cNvSpPr/>
-          <p:nvPr/>
-        </p:nvSpPr>
-        <p:spPr>
-          <a:xfrm>
-            <a:off x="8798357" y="5303520"/>
-            <a:ext cx="2387498" cy="566928"/>
-          </a:xfrm>
-          <a:prstGeom prst="rect">
-            <a:avLst/>
-          </a:prstGeom>
-          <a:noFill/>
-          <a:ln>
-            <a:noFill/>
-          </a:ln>
-        </p:spPr>
-        <p:txBody>
-          <a:bodyPr anchorCtr="0" anchor="ctr" bIns="0" lIns="0" spcFirstLastPara="1" rIns="0" wrap="square" tIns="0">
-            <a:noAutofit/>
-          </a:bodyPr>
-          <a:lstStyle/>
-          <a:p>
-            <a:pPr indent="0" lvl="0" marL="0" marR="0" rtl="0" algn="l">
-              <a:lnSpc>
-                <a:spcPct val="140000"/>
-              </a:lnSpc>
-              <a:spcBef>
-                <a:spcPts val="0"/>
-              </a:spcBef>
-              <a:spcAft>
-                <a:spcPts val="0"/>
-              </a:spcAft>
-              <a:buClr>
-                <a:srgbClr val="65708A"/>
-              </a:buClr>
-              <a:buSzPts val="1000"/>
-              <a:buFont typeface="Malgun Gothic"/>
-              <a:buNone/>
-            </a:pPr>
-            <a:r>
-              <a:rPr b="0" i="0" lang="en-US" sz="1000" u="none" cap="none" strike="noStrike">
-                <a:solidFill>
-                  <a:srgbClr val="65708A"/>
-                </a:solidFill>
-                <a:latin typeface="Malgun Gothic"/>
-                <a:ea typeface="Malgun Gothic"/>
-                <a:cs typeface="Malgun Gothic"/>
-                <a:sym typeface="Malgun Gothic"/>
-              </a:rPr>
-              <a:t>근거 기반 답변 · 웹검색 · 대화 요약</a:t>
-            </a:r>
-            <a:endParaRPr b="0" i="0" sz="1000" u="none" cap="none" strike="noStrike">
-              <a:solidFill>
-                <a:schemeClr val="dk1"/>
-              </a:solidFill>
-              <a:latin typeface="Calibri"/>
-              <a:ea typeface="Calibri"/>
-              <a:cs typeface="Calibri"/>
-              <a:sym typeface="Calibri"/>
-            </a:endParaRPr>
-          </a:p>
-        </p:txBody>
-      </p:sp>
-    </p:spTree>
-  </p:cSld>
-  <p:clrMapOvr>
-    <a:masterClrMapping/>
-  </p:clrMapOvr>
-</p:sld>
-</file>
-
 <file path=ppt/slides/slide6.xml><?xml version="1.0" encoding="utf-8"?>
 <p:sld xmlns:a="http://schemas.openxmlformats.org/drawingml/2006/main" xmlns:r="http://schemas.openxmlformats.org/officeDocument/2006/relationships" xmlns:mc="http://schemas.openxmlformats.org/markup-compatibility/2006" xmlns:mv="urn:schemas-microsoft-com:mac:vml" xmlns:p="http://schemas.openxmlformats.org/presentationml/2006/main" xmlns:c="http://schemas.openxmlformats.org/drawingml/2006/chart" xmlns:dgm="http://schemas.openxmlformats.org/drawingml/2006/diagram" xmlns:o="urn:schemas-microsoft-com:office:office" xmlns:v="urn:schemas-microsoft-com:vml" xmlns:pvml="urn:schemas-microsoft-com:office:powerpoint" xmlns:com="http://schemas.openxmlformats.org/drawingml/2006/compatibility" xmlns:p14="http://schemas.microsoft.com/office/powerpoint/2010/main" xmlns:p15="http://schemas.microsoft.com/office/powerpoint/2012/main" xmlns:ahyp="http://schemas.microsoft.com/office/drawing/2018/hyperlinkcolor">
   <p:cSld>
@@ -19014,7 +15174,7 @@
                 <a:cs typeface="Malgun Gothic"/>
                 <a:sym typeface="Malgun Gothic"/>
               </a:rPr>
-              <a:t>5</a:t>
+              <a:t>4</a:t>
             </a:r>
             <a:endParaRPr b="0" i="0" sz="1000" u="none" cap="none" strike="noStrike">
               <a:solidFill>
@@ -20653,7 +16813,7 @@
                 <a:cs typeface="Malgun Gothic"/>
                 <a:sym typeface="Malgun Gothic"/>
               </a:rPr>
-              <a:t>6</a:t>
+              <a:t>5</a:t>
             </a:r>
             <a:endParaRPr b="0" i="0" sz="1000" u="none" cap="none" strike="noStrike">
               <a:solidFill>
@@ -22297,7 +18457,7 @@
                 <a:cs typeface="Malgun Gothic"/>
                 <a:sym typeface="Malgun Gothic"/>
               </a:rPr>
-              <a:t>7</a:t>
+              <a:t>6</a:t>
             </a:r>
             <a:endParaRPr b="0" i="0" sz="1000" u="none" cap="none" strike="noStrike">
               <a:solidFill>

--- a/Org_health_diag/docs/2026_조직건강도_AI_Agent_수행결과.pptx
+++ b/Org_health_diag/docs/2026_조직건강도_AI_Agent_수행결과.pptx
@@ -1,6 +1,6 @@
 
 <file path=ppt/presentation.xml><?xml version="1.0" encoding="utf-8"?>
-<p:presentation xmlns:a="http://schemas.openxmlformats.org/drawingml/2006/main" xmlns:r="http://schemas.openxmlformats.org/officeDocument/2006/relationships" xmlns:mc="http://schemas.openxmlformats.org/markup-compatibility/2006" xmlns:mv="urn:schemas-microsoft-com:mac:vml" xmlns:p="http://schemas.openxmlformats.org/presentationml/2006/main" xmlns:c="http://schemas.openxmlformats.org/drawingml/2006/chart" xmlns:dgm="http://schemas.openxmlformats.org/drawingml/2006/diagram" xmlns:o="urn:schemas-microsoft-com:office:office" xmlns:v="urn:schemas-microsoft-com:vml" xmlns:pvml="urn:schemas-microsoft-com:office:powerpoint" xmlns:com="http://schemas.openxmlformats.org/drawingml/2006/compatibility" xmlns:p14="http://schemas.microsoft.com/office/powerpoint/2010/main" xmlns:p15="http://schemas.microsoft.com/office/powerpoint/2012/main" xmlns:ahyp="http://schemas.microsoft.com/office/drawing/2018/hyperlinkcolor" autoCompressPictures="0" strictFirstAndLastChars="0" saveSubsetFonts="1">
+<p:presentation xmlns:a="http://schemas.openxmlformats.org/drawingml/2006/main" xmlns:r="http://schemas.openxmlformats.org/officeDocument/2006/relationships" xmlns:mc="http://schemas.openxmlformats.org/markup-compatibility/2006" xmlns:mv="urn:schemas-microsoft-com:mac:vml" xmlns:p="http://schemas.openxmlformats.org/presentationml/2006/main" xmlns:c="http://schemas.openxmlformats.org/drawingml/2006/chart" xmlns:dgm="http://schemas.openxmlformats.org/drawingml/2006/diagram" xmlns:o="urn:schemas-microsoft-com:office:office" xmlns:v="urn:schemas-microsoft-com:vml" xmlns:pvml="urn:schemas-microsoft-com:office:powerpoint" xmlns:com="http://schemas.openxmlformats.org/drawingml/2006/compatibility" xmlns:p14="http://schemas.microsoft.com/office/powerpoint/2010/main" xmlns:p15="http://schemas.microsoft.com/office/powerpoint/2012/main" xmlns:ahyp="http://schemas.microsoft.com/office/drawing/2018/hyperlinkcolor" autoCompressPictures="0" strictFirstAndLastChars="0" saveSubsetFonts="1" embedTrueTypeFonts="1">
   <p:sldMasterIdLst>
     <p:sldMasterId id="2147483648" r:id="rId3"/>
     <p:sldMasterId id="2147483650" r:id="rId4"/>
@@ -23,6 +23,13 @@
   </p:sldIdLst>
   <p:sldSz cy="6858000" cx="12192000"/>
   <p:notesSz cx="6858000" cy="12192000"/>
+  <p:embeddedFontLst>
+    <p:embeddedFont>
+      <p:font typeface="Pretendard" panose="02000503000000020004" pitchFamily="2" charset="-127"/>
+      <p:regular r:id="rId18"/>
+      <p:bold r:id="rId19"/>
+    </p:embeddedFont>
+  </p:embeddedFontLst>
   <p:defaultTextStyle>
     <a:defPPr lvl="0" marR="0" rtl="0" algn="l">
       <a:lnSpc>
@@ -11301,15 +11308,19 @@
                 <a:solidFill>
                   <a:srgbClr val="000000"/>
                 </a:solidFill>
-                <a:latin typeface="Arial"/>
-                <a:ea typeface="Arial"/>
-                <a:cs typeface="Arial"/>
                 <a:sym typeface="Arial"/>
+                <a:latin typeface="Pretendard" panose="02000503000000020004" pitchFamily="2" charset="-127"/>
+                <a:ea typeface="Pretendard" panose="02000503000000020004" pitchFamily="2" charset="-127"/>
+                <a:cs typeface="Pretendard" panose="02000503000000020004" pitchFamily="2" charset="-127"/>
               </a:rPr>
               <a:t>조직건강도 </a:t>
             </a:r>
             <a:r>
-              <a:rPr b="1" lang="en-US" sz="4400"/>
+              <a:rPr b="1" lang="en-US" sz="4400">
+                <a:latin typeface="Pretendard" panose="02000503000000020004" pitchFamily="2" charset="-127"/>
+                <a:ea typeface="Pretendard" panose="02000503000000020004" pitchFamily="2" charset="-127"/>
+                <a:cs typeface="Pretendard" panose="02000503000000020004" pitchFamily="2" charset="-127"/>
+              </a:rPr>
               <a:t>진단 </a:t>
             </a:r>
             <a:r>
@@ -11317,10 +11328,10 @@
                 <a:solidFill>
                   <a:srgbClr val="000000"/>
                 </a:solidFill>
-                <a:latin typeface="Arial"/>
-                <a:ea typeface="Arial"/>
-                <a:cs typeface="Arial"/>
                 <a:sym typeface="Arial"/>
+                <a:latin typeface="Pretendard" panose="02000503000000020004" pitchFamily="2" charset="-127"/>
+                <a:ea typeface="Pretendard" panose="02000503000000020004" pitchFamily="2" charset="-127"/>
+                <a:cs typeface="Pretendard" panose="02000503000000020004" pitchFamily="2" charset="-127"/>
               </a:rPr>
               <a:t>AI Agent 개발 결과</a:t>
             </a:r>
@@ -11370,10 +11381,10 @@
                 <a:solidFill>
                   <a:srgbClr val="0E2841"/>
                 </a:solidFill>
-                <a:latin typeface="Arial"/>
-                <a:ea typeface="Arial"/>
-                <a:cs typeface="Arial"/>
                 <a:sym typeface="Arial"/>
+                <a:latin typeface="Pretendard" panose="02000503000000020004" pitchFamily="2" charset="-127"/>
+                <a:ea typeface="Pretendard" panose="02000503000000020004" pitchFamily="2" charset="-127"/>
+                <a:cs typeface="Pretendard" panose="02000503000000020004" pitchFamily="2" charset="-127"/>
               </a:rPr>
               <a:t>포스코</a:t>
             </a:r>
@@ -11401,10 +11412,10 @@
                 <a:solidFill>
                   <a:srgbClr val="0E2841"/>
                 </a:solidFill>
-                <a:latin typeface="Arial"/>
-                <a:ea typeface="Arial"/>
-                <a:cs typeface="Arial"/>
                 <a:sym typeface="Arial"/>
+                <a:latin typeface="Pretendard" panose="02000503000000020004" pitchFamily="2" charset="-127"/>
+                <a:ea typeface="Pretendard" panose="02000503000000020004" pitchFamily="2" charset="-127"/>
+                <a:cs typeface="Pretendard" panose="02000503000000020004" pitchFamily="2" charset="-127"/>
               </a:rPr>
               <a:t>곽경제</a:t>
             </a:r>
@@ -13611,10 +13622,10 @@
             </a:pPr>
             <a:r>
               <a:rPr b="1" lang="en-US" sz="5700">
-                <a:latin typeface="Arial"/>
-                <a:ea typeface="Arial"/>
-                <a:cs typeface="Arial"/>
                 <a:sym typeface="Arial"/>
+                <a:latin typeface="Pretendard" panose="02000503000000020004" pitchFamily="2" charset="-127"/>
+                <a:ea typeface="Pretendard" panose="02000503000000020004" pitchFamily="2" charset="-127"/>
+                <a:cs typeface="Pretendard" panose="02000503000000020004" pitchFamily="2" charset="-127"/>
               </a:rPr>
               <a:t>감사합니다.</a:t>
             </a:r>
